--- a/time-uncertainty-error-bar.pptx
+++ b/time-uncertainty-error-bar.pptx
@@ -611,7 +611,7 @@
           <a:lstStyle/>
           <a:p>
             <a:r>
-              <a:t>A consolidated budget before we zoom into individual layers. Two sources come from the source clock itself: the grandmaster's class (clockClass / clockAccuracy) and its own residual time error — both reach us folded into offsetFromMaster and stepsRemoved. Two come from our local oscillator: its free-run drift between sync messages, and holdover when discipline is lost entirely. Two are properties of reading the clock: the access latency of a PHC or clock_gettime read, and the finite resolution of the tick itself. And two live in the network: the delays accumulated across every transparent/boundary clock and queue on the path (whose mean PTP measures and compensates), and link asymmetry — the up/down difference PTP cannot see, which stays an unmodeled conservative gap. The rest of Part 3 drills into the ones that dominate.</a:t>
+              <a:t>A consolidated budget before we zoom into individual layers. Two sources come from the source clock itself, and they differ in kind: the grandmaster's class (clockClass / clockAccuracy) is an advertised bound on the source quality, while the offset from the grandmaster is our own value, measured locally from the t1-t4 timestamp exchange — that measured |offset| is what enters the bound. (stepsRemoved is neither: just the hop count to the GM.) Two come from our local oscillator: its free-run drift between sync messages, and holdover when discipline is lost entirely. Two are properties of reading the clock: the access latency of a PHC or clock_gettime read, and the finite resolution of the tick itself. And two live in the network: the delays accumulated across every transparent/boundary clock and queue on the path (whose mean PTP measures and compensates), and link asymmetry — the up/down difference PTP cannot see, which stays an unmodeled conservative gap. The rest of Part 3 drills into the ones that dominate.</a:t>
             </a:r>
           </a:p>
         </p:txBody>
@@ -681,7 +681,7 @@
           <a:lstStyle/>
           <a:p>
             <a:r>
-              <a:t>PTP believes something about your clock. That belief is an input to U, not a guarantee.</a:t>
+              <a:t>Layer 1 is the oscillator alone — stability in ppb and temperature sensitivity, free-running drift. Layer 2 is the PHC clock it feeds: offsetFromMaster is an estimate (not a truth), and the clock has a finite resolution (tick granularity) plus a read latency. PTP believes something about your clock; that belief is an input to U, not a guarantee.</a:t>
             </a:r>
           </a:p>
         </p:txBody>
@@ -821,7 +821,7 @@
           <a:lstStyle/>
           <a:p>
             <a:r>
-              <a:t>Mean path delay is measured and compensated by PTP, so it does not belong in the uncertainty bound; only the residual up/down asymmetry does, and we do not get a clean measurement of it. Foreshadow the kernel-gaps section: ingredients exist, the single 'current uncertainty' API does not.</a:t>
+              <a:t>Layer 3 is the network: every hop — transparent/boundary clocks and queues — adds delay. PTP measures and compensates the mean path delay, so it is not in the bound; only the residual up/down asymmetry is, it grows with hop count, and we do not get a clean measurement of it. Layer 5 is the kernel path: the ingredients exist (PTP_SYS_OFFSET, SO_TIMESTAMPING, ptp4l mgmt), but the single 'current uncertainty' API does not. Foreshadow the kernel-gaps section.</a:t>
             </a:r>
           </a:p>
         </p:txBody>
@@ -1101,7 +1101,7 @@
           <a:lstStyle/>
           <a:p>
             <a:r>
-              <a:t>PTP measures and compensates the mean path delay inside the offset, so adding it back would double-count. The residual path-asymmetry term is real but unmodeled here — a known conservative gap. This is a practical model, not a full Allan-deviation analysis.</a:t>
+              <a:t>Three residual terms after the offset correction is applied: drift (staleness), clock resolution (tick granularity), and capture-point error (HW vs SW stamp). Mean path delay is measured and compensated by PTP inside the offset, so it is not added; the offset itself is a correction, not an uncertainty. Residual path asymmetry is real but unmodeled here — a known conservative gap. A practical model, not a full Allan-deviation analysis.</a:t>
             </a:r>
           </a:p>
         </p:txBody>
@@ -2361,7 +2361,7 @@
           <a:lstStyle/>
           <a:p>
             <a:r>
-              <a:t>This is the aha. The numbers look confident; the reality is ambiguous. We need the error bar to be part of the data.</a:t>
+              <a:t>This is the aha. The numbers look confident; the reality is ambiguous. Each bar is the timestamp ± its uncertainty; because 150 + 150 &gt; 200, the intervals overlap (amber) and either event could have come first. We need the error bar to be part of the data.</a:t>
             </a:r>
           </a:p>
         </p:txBody>
@@ -2501,7 +2501,7 @@
           <a:lstStyle/>
           <a:p>
             <a:r>
-              <a:t>Draw this on a whiteboard if possible. 'Unknown' is a valid, useful answer a system can act on.</a:t>
+              <a:t>Draw this on a whiteboard if possible. The interval end-points have names: t−U is the earliest the event could have happened, t+U the latest. 'Unknown' is a valid, useful answer a system can act on.</a:t>
             </a:r>
           </a:p>
         </p:txBody>
@@ -6553,8 +6553,8 @@
         </p:nvSpPr>
         <p:spPr>
           <a:xfrm>
-            <a:off x="7680959" y="3236976"/>
-            <a:ext cx="1005840" cy="365760"/>
+            <a:off x="7543799" y="2359152"/>
+            <a:ext cx="1280160" cy="274320"/>
           </a:xfrm>
           <a:prstGeom prst="rect">
             <a:avLst/>
@@ -6576,13 +6576,13 @@
               </a:spcAft>
             </a:pPr>
             <a:r>
-              <a:rPr sz="1400" b="1" i="0">
+              <a:rPr sz="1300" b="0" i="1">
                 <a:solidFill>
                   <a:srgbClr val="2E6BE6"/>
                 </a:solidFill>
                 <a:latin typeface="Calibri"/>
               </a:rPr>
-              <a:t>t−U</a:t>
+              <a:t>earliest</a:t>
             </a:r>
           </a:p>
         </p:txBody>
@@ -6595,8 +6595,8 @@
         </p:nvSpPr>
         <p:spPr>
           <a:xfrm>
-            <a:off x="8869679" y="3236976"/>
-            <a:ext cx="731520" cy="365760"/>
+            <a:off x="9646919" y="2359152"/>
+            <a:ext cx="1280160" cy="274320"/>
           </a:xfrm>
           <a:prstGeom prst="rect">
             <a:avLst/>
@@ -6618,13 +6618,13 @@
               </a:spcAft>
             </a:pPr>
             <a:r>
-              <a:rPr sz="1400" b="1" i="0">
-                <a:solidFill>
-                  <a:srgbClr val="1A1D29"/>
-                </a:solidFill>
-                <a:latin typeface="Calibri"/>
-              </a:rPr>
-              <a:t>t</a:t>
+              <a:rPr sz="1300" b="0" i="1">
+                <a:solidFill>
+                  <a:srgbClr val="2E6BE6"/>
+                </a:solidFill>
+                <a:latin typeface="Calibri"/>
+              </a:rPr>
+              <a:t>latest</a:t>
             </a:r>
           </a:p>
         </p:txBody>
@@ -6637,7 +6637,7 @@
         </p:nvSpPr>
         <p:spPr>
           <a:xfrm>
-            <a:off x="9784079" y="3236976"/>
+            <a:off x="7680959" y="3236976"/>
             <a:ext cx="1005840" cy="365760"/>
           </a:xfrm>
           <a:prstGeom prst="rect">
@@ -6666,6 +6666,90 @@
                 </a:solidFill>
                 <a:latin typeface="Calibri"/>
               </a:rPr>
+              <a:t>t−U</a:t>
+            </a:r>
+          </a:p>
+        </p:txBody>
+      </p:sp>
+      <p:sp>
+        <p:nvSpPr>
+          <p:cNvPr id="20" name="TextBox 19"/>
+          <p:cNvSpPr txBox="1"/>
+          <p:nvPr/>
+        </p:nvSpPr>
+        <p:spPr>
+          <a:xfrm>
+            <a:off x="8869679" y="3236976"/>
+            <a:ext cx="731520" cy="365760"/>
+          </a:xfrm>
+          <a:prstGeom prst="rect">
+            <a:avLst/>
+          </a:prstGeom>
+          <a:noFill/>
+        </p:spPr>
+        <p:txBody>
+          <a:bodyPr wrap="square" anchor="t" lIns="0" rIns="0" tIns="0" bIns="0">
+            <a:spAutoFit/>
+          </a:bodyPr>
+          <a:lstStyle/>
+          <a:p>
+            <a:pPr algn="ctr">
+              <a:spcBef>
+                <a:spcPts val="0"/>
+              </a:spcBef>
+              <a:spcAft>
+                <a:spcPts val="600"/>
+              </a:spcAft>
+            </a:pPr>
+            <a:r>
+              <a:rPr sz="1400" b="1" i="0">
+                <a:solidFill>
+                  <a:srgbClr val="1A1D29"/>
+                </a:solidFill>
+                <a:latin typeface="Calibri"/>
+              </a:rPr>
+              <a:t>t</a:t>
+            </a:r>
+          </a:p>
+        </p:txBody>
+      </p:sp>
+      <p:sp>
+        <p:nvSpPr>
+          <p:cNvPr id="21" name="TextBox 20"/>
+          <p:cNvSpPr txBox="1"/>
+          <p:nvPr/>
+        </p:nvSpPr>
+        <p:spPr>
+          <a:xfrm>
+            <a:off x="9784079" y="3236976"/>
+            <a:ext cx="1005840" cy="365760"/>
+          </a:xfrm>
+          <a:prstGeom prst="rect">
+            <a:avLst/>
+          </a:prstGeom>
+          <a:noFill/>
+        </p:spPr>
+        <p:txBody>
+          <a:bodyPr wrap="square" anchor="t" lIns="0" rIns="0" tIns="0" bIns="0">
+            <a:spAutoFit/>
+          </a:bodyPr>
+          <a:lstStyle/>
+          <a:p>
+            <a:pPr algn="ctr">
+              <a:spcBef>
+                <a:spcPts val="0"/>
+              </a:spcBef>
+              <a:spcAft>
+                <a:spcPts val="600"/>
+              </a:spcAft>
+            </a:pPr>
+            <a:r>
+              <a:rPr sz="1400" b="1" i="0">
+                <a:solidFill>
+                  <a:srgbClr val="2E6BE6"/>
+                </a:solidFill>
+                <a:latin typeface="Calibri"/>
+              </a:rPr>
               <a:t>t+U</a:t>
             </a:r>
           </a:p>
@@ -6673,7 +6757,7 @@
       </p:sp>
       <p:sp>
         <p:nvSpPr>
-          <p:cNvPr id="20" name="Rectangle 19"/>
+          <p:cNvPr id="22" name="Rectangle 21"/>
           <p:cNvSpPr/>
           <p:nvPr/>
         </p:nvSpPr>
@@ -6717,7 +6801,7 @@
       </p:sp>
       <p:sp>
         <p:nvSpPr>
-          <p:cNvPr id="21" name="TextBox 20"/>
+          <p:cNvPr id="23" name="TextBox 22"/>
           <p:cNvSpPr txBox="1"/>
           <p:nvPr/>
         </p:nvSpPr>
@@ -6759,7 +6843,7 @@
       </p:sp>
       <p:sp>
         <p:nvSpPr>
-          <p:cNvPr id="22" name="TextBox 21"/>
+          <p:cNvPr id="24" name="TextBox 23"/>
           <p:cNvSpPr txBox="1"/>
           <p:nvPr/>
         </p:nvSpPr>
@@ -6801,7 +6885,7 @@
       </p:sp>
       <p:sp>
         <p:nvSpPr>
-          <p:cNvPr id="23" name="TextBox 22"/>
+          <p:cNvPr id="25" name="TextBox 24"/>
           <p:cNvSpPr txBox="1"/>
           <p:nvPr/>
         </p:nvSpPr>
@@ -6843,7 +6927,7 @@
       </p:sp>
       <p:sp>
         <p:nvSpPr>
-          <p:cNvPr id="24" name="Rectangle 23"/>
+          <p:cNvPr id="26" name="Rectangle 25"/>
           <p:cNvSpPr/>
           <p:nvPr/>
         </p:nvSpPr>
@@ -6887,7 +6971,7 @@
       </p:sp>
       <p:sp>
         <p:nvSpPr>
-          <p:cNvPr id="25" name="TextBox 24"/>
+          <p:cNvPr id="27" name="TextBox 26"/>
           <p:cNvSpPr txBox="1"/>
           <p:nvPr/>
         </p:nvSpPr>
@@ -6929,7 +7013,7 @@
       </p:sp>
       <p:sp>
         <p:nvSpPr>
-          <p:cNvPr id="26" name="TextBox 25"/>
+          <p:cNvPr id="28" name="TextBox 27"/>
           <p:cNvSpPr txBox="1"/>
           <p:nvPr/>
         </p:nvSpPr>
@@ -8039,7 +8123,7 @@
                 </a:solidFill>
                 <a:latin typeface="Consolas"/>
               </a:rPr>
-              <a:t>  6  Userspace observation delay      &lt;- syscall + scheduling</a:t>
+              <a:t>  6  Userspace observation delay   &lt;- syscall + scheduling</a:t>
             </a:r>
           </a:p>
           <a:p>
@@ -8055,7 +8139,7 @@
                 </a:solidFill>
                 <a:latin typeface="Consolas"/>
               </a:rPr>
-              <a:t>  5  Kernel -&gt; userspace transfer     &lt;- IRQ, softirq, copy</a:t>
+              <a:t>  5  Kernel -&gt; userspace transfer  &lt;- IRQ, softirq, copy</a:t>
             </a:r>
           </a:p>
           <a:p>
@@ -8071,7 +8155,7 @@
                 </a:solidFill>
                 <a:latin typeface="Consolas"/>
               </a:rPr>
-              <a:t>  4  Timestamp capture point          &lt;- HW vs SW</a:t>
+              <a:t>  4  Timestamp capture point       &lt;- HW vs SW</a:t>
             </a:r>
           </a:p>
           <a:p>
@@ -8087,7 +8171,7 @@
                 </a:solidFill>
                 <a:latin typeface="Consolas"/>
               </a:rPr>
-              <a:t>  3  Network path asymmetry           &lt;- queueing, routing</a:t>
+              <a:t>  3  Network                       &lt;- queueing, routing, hop count</a:t>
             </a:r>
           </a:p>
           <a:p>
@@ -8103,7 +8187,7 @@
                 </a:solidFill>
                 <a:latin typeface="Consolas"/>
               </a:rPr>
-              <a:t>  2  PTP servo &amp; synchronization      &lt;- offset, delay</a:t>
+              <a:t>  2  PHC clock                     &lt;- offset, clock resolution</a:t>
             </a:r>
           </a:p>
           <a:p>
@@ -8119,7 +8203,7 @@
                 </a:solidFill>
                 <a:latin typeface="Consolas"/>
               </a:rPr>
-              <a:t>  1  Oscillator / PHC hardware        &lt;- drift, temperature</a:t>
+              <a:t>  1  Oscillator                    &lt;- drift, temperature</a:t>
             </a:r>
           </a:p>
         </p:txBody>
@@ -8458,7 +8542,7 @@
         </p:nvGraphicFramePr>
         <p:xfrm>
           <a:off x="640080" y="1645920"/>
-          <a:ext cx="10881360" cy="3657600"/>
+          <a:ext cx="10881360" cy="4114800"/>
         </p:xfrm>
         <a:graphic>
           <a:graphicData uri="http://schemas.openxmlformats.org/drawingml/2006/table">
@@ -8546,13 +8630,13 @@
                     <a:lstStyle/>
                     <a:p>
                       <a:r>
-                        <a:rPr sz="1350" b="1">
+                        <a:rPr sz="1200" b="1">
                           <a:solidFill>
                             <a:srgbClr val="1A1D29"/>
                           </a:solidFill>
                           <a:latin typeface="Calibri"/>
                         </a:rPr>
-                        <a:t>Grandmaster class &amp; its own error</a:t>
+                        <a:t>Grandmaster class</a:t>
                       </a:r>
                     </a:p>
                   </a:txBody>
@@ -8568,13 +8652,13 @@
                     <a:lstStyle/>
                     <a:p>
                       <a:r>
-                        <a:rPr sz="1350" b="0">
+                        <a:rPr sz="1200" b="0">
                           <a:solidFill>
                             <a:srgbClr val="5B6172"/>
                           </a:solidFill>
                           <a:latin typeface="Calibri"/>
                         </a:rPr>
-                        <a:t>GM clockClass / accuracy + the GM’s time error</a:t>
+                        <a:t>advertised GM quality (clockClass / accuracy)</a:t>
                       </a:r>
                     </a:p>
                   </a:txBody>
@@ -8590,13 +8674,13 @@
                     <a:lstStyle/>
                     <a:p>
                       <a:r>
-                        <a:rPr sz="1350" b="0">
+                        <a:rPr sz="1200" b="0">
                           <a:solidFill>
                             <a:srgbClr val="5B6172"/>
                           </a:solidFill>
                           <a:latin typeface="Calibri"/>
                         </a:rPr>
-                        <a:t>via |offset| (steps removed)</a:t>
+                        <a:t>error bound we are told</a:t>
                       </a:r>
                     </a:p>
                   </a:txBody>
@@ -8614,13 +8698,13 @@
                     <a:lstStyle/>
                     <a:p>
                       <a:r>
-                        <a:rPr sz="1350" b="1">
+                        <a:rPr sz="1200" b="1">
                           <a:solidFill>
                             <a:srgbClr val="1A1D29"/>
                           </a:solidFill>
                           <a:latin typeface="Calibri"/>
                         </a:rPr>
-                        <a:t>Local oscillator drift</a:t>
+                        <a:t>Offset from grandmaster</a:t>
                       </a:r>
                     </a:p>
                   </a:txBody>
@@ -8636,13 +8720,13 @@
                     <a:lstStyle/>
                     <a:p>
                       <a:r>
-                        <a:rPr sz="1350" b="0">
+                        <a:rPr sz="1200" b="0">
                           <a:solidFill>
                             <a:srgbClr val="5B6172"/>
                           </a:solidFill>
                           <a:latin typeface="Calibri"/>
                         </a:rPr>
-                        <a:t>free-run drift between syncs (ppb–ppm)</a:t>
+                        <a:t>our offset, measured from the t1–t4 exchange</a:t>
                       </a:r>
                     </a:p>
                   </a:txBody>
@@ -8658,13 +8742,13 @@
                     <a:lstStyle/>
                     <a:p>
                       <a:r>
-                        <a:rPr sz="1350" b="0">
+                        <a:rPr sz="1200" b="0">
                           <a:solidFill>
                             <a:srgbClr val="5B6172"/>
                           </a:solidFill>
                           <a:latin typeface="Calibri"/>
                         </a:rPr>
-                        <a:t>yes — drift term</a:t>
+                        <a:t>yes — |offset| term</a:t>
                       </a:r>
                     </a:p>
                   </a:txBody>
@@ -8682,13 +8766,13 @@
                     <a:lstStyle/>
                     <a:p>
                       <a:r>
-                        <a:rPr sz="1350" b="1">
+                        <a:rPr sz="1200" b="1">
                           <a:solidFill>
                             <a:srgbClr val="1A1D29"/>
                           </a:solidFill>
                           <a:latin typeface="Calibri"/>
                         </a:rPr>
-                        <a:t>Holdover</a:t>
+                        <a:t>Local oscillator drift</a:t>
                       </a:r>
                     </a:p>
                   </a:txBody>
@@ -8704,13 +8788,13 @@
                     <a:lstStyle/>
                     <a:p>
                       <a:r>
-                        <a:rPr sz="1350" b="0">
+                        <a:rPr sz="1200" b="0">
                           <a:solidFill>
                             <a:srgbClr val="5B6172"/>
                           </a:solidFill>
                           <a:latin typeface="Calibri"/>
                         </a:rPr>
-                        <a:t>drift with no discipline (ptp4l down)</a:t>
+                        <a:t>free-run drift between syncs (ppb–ppm)</a:t>
                       </a:r>
                     </a:p>
                   </a:txBody>
@@ -8726,13 +8810,13 @@
                     <a:lstStyle/>
                     <a:p>
                       <a:r>
-                        <a:rPr sz="1350" b="0">
+                        <a:rPr sz="1200" b="0">
                           <a:solidFill>
                             <a:srgbClr val="5B6172"/>
                           </a:solidFill>
                           <a:latin typeface="Calibri"/>
                         </a:rPr>
-                        <a:t>yes — anchor held, drift grows</a:t>
+                        <a:t>yes — drift term</a:t>
                       </a:r>
                     </a:p>
                   </a:txBody>
@@ -8750,13 +8834,13 @@
                     <a:lstStyle/>
                     <a:p>
                       <a:r>
-                        <a:rPr sz="1350" b="1">
+                        <a:rPr sz="1200" b="1">
                           <a:solidFill>
                             <a:srgbClr val="1A1D29"/>
                           </a:solidFill>
                           <a:latin typeface="Calibri"/>
                         </a:rPr>
-                        <a:t>Clock read delays</a:t>
+                        <a:t>Holdover</a:t>
                       </a:r>
                     </a:p>
                   </a:txBody>
@@ -8772,13 +8856,13 @@
                     <a:lstStyle/>
                     <a:p>
                       <a:r>
-                        <a:rPr sz="1350" b="0">
+                        <a:rPr sz="1200" b="0">
                           <a:solidFill>
                             <a:srgbClr val="5B6172"/>
                           </a:solidFill>
                           <a:latin typeface="Calibri"/>
                         </a:rPr>
-                        <a:t>latency to read the PHC / clock_gettime</a:t>
+                        <a:t>drift with no discipline (ptp4l down)</a:t>
                       </a:r>
                     </a:p>
                   </a:txBody>
@@ -8794,13 +8878,13 @@
                     <a:lstStyle/>
                     <a:p>
                       <a:r>
-                        <a:rPr sz="1350" b="0">
+                        <a:rPr sz="1200" b="0">
                           <a:solidFill>
                             <a:srgbClr val="5B6172"/>
                           </a:solidFill>
                           <a:latin typeface="Calibri"/>
                         </a:rPr>
-                        <a:t>partial — capture-point dependent</a:t>
+                        <a:t>yes — anchor held, drift grows</a:t>
                       </a:r>
                     </a:p>
                   </a:txBody>
@@ -8818,13 +8902,13 @@
                     <a:lstStyle/>
                     <a:p>
                       <a:r>
-                        <a:rPr sz="1350" b="1">
+                        <a:rPr sz="1200" b="1">
                           <a:solidFill>
                             <a:srgbClr val="1A1D29"/>
                           </a:solidFill>
                           <a:latin typeface="Calibri"/>
                         </a:rPr>
-                        <a:t>Clock resolution</a:t>
+                        <a:t>Clock read delays</a:t>
                       </a:r>
                     </a:p>
                   </a:txBody>
@@ -8840,13 +8924,13 @@
                     <a:lstStyle/>
                     <a:p>
                       <a:r>
-                        <a:rPr sz="1350" b="0">
+                        <a:rPr sz="1200" b="0">
                           <a:solidFill>
                             <a:srgbClr val="5B6172"/>
                           </a:solidFill>
                           <a:latin typeface="Calibri"/>
                         </a:rPr>
-                        <a:t>granularity of the timestamp tick</a:t>
+                        <a:t>latency to read the PHC / clock_gettime</a:t>
                       </a:r>
                     </a:p>
                   </a:txBody>
@@ -8862,13 +8946,13 @@
                     <a:lstStyle/>
                     <a:p>
                       <a:r>
-                        <a:rPr sz="1350" b="0">
+                        <a:rPr sz="1200" b="0">
                           <a:solidFill>
                             <a:srgbClr val="5B6172"/>
                           </a:solidFill>
                           <a:latin typeface="Calibri"/>
                         </a:rPr>
-                        <a:t>bounded by tick size</a:t>
+                        <a:t>partial — capture-point dependent</a:t>
                       </a:r>
                     </a:p>
                   </a:txBody>
@@ -8886,13 +8970,13 @@
                     <a:lstStyle/>
                     <a:p>
                       <a:r>
-                        <a:rPr sz="1350" b="1">
+                        <a:rPr sz="1200" b="1">
                           <a:solidFill>
                             <a:srgbClr val="1A1D29"/>
                           </a:solidFill>
                           <a:latin typeface="Calibri"/>
                         </a:rPr>
-                        <a:t>Accumulated path-element delays</a:t>
+                        <a:t>Clock resolution</a:t>
                       </a:r>
                     </a:p>
                   </a:txBody>
@@ -8908,13 +8992,13 @@
                     <a:lstStyle/>
                     <a:p>
                       <a:r>
-                        <a:rPr sz="1350" b="0">
+                        <a:rPr sz="1200" b="0">
                           <a:solidFill>
                             <a:srgbClr val="5B6172"/>
                           </a:solidFill>
                           <a:latin typeface="Calibri"/>
                         </a:rPr>
-                        <a:t>residence + queueing over each hop</a:t>
+                        <a:t>granularity of the timestamp tick</a:t>
                       </a:r>
                     </a:p>
                   </a:txBody>
@@ -8930,13 +9014,13 @@
                     <a:lstStyle/>
                     <a:p>
                       <a:r>
-                        <a:rPr sz="1350" b="0">
+                        <a:rPr sz="1200" b="0">
                           <a:solidFill>
                             <a:srgbClr val="5B6172"/>
                           </a:solidFill>
                           <a:latin typeface="Calibri"/>
                         </a:rPr>
-                        <a:t>compensated by PTP (mean)</a:t>
+                        <a:t>bounded by tick size</a:t>
                       </a:r>
                     </a:p>
                   </a:txBody>
@@ -8954,13 +9038,13 @@
                     <a:lstStyle/>
                     <a:p>
                       <a:r>
-                        <a:rPr sz="1350" b="1">
+                        <a:rPr sz="1200" b="1">
                           <a:solidFill>
                             <a:srgbClr val="1A1D29"/>
                           </a:solidFill>
                           <a:latin typeface="Calibri"/>
                         </a:rPr>
-                        <a:t>Link asymmetry</a:t>
+                        <a:t>Accumulated path-element delays</a:t>
                       </a:r>
                     </a:p>
                   </a:txBody>
@@ -8976,13 +9060,13 @@
                     <a:lstStyle/>
                     <a:p>
                       <a:r>
-                        <a:rPr sz="1350" b="0">
+                        <a:rPr sz="1200" b="0">
                           <a:solidFill>
                             <a:srgbClr val="5B6172"/>
                           </a:solidFill>
                           <a:latin typeface="Calibri"/>
                         </a:rPr>
-                        <a:t>up and down paths differ</a:t>
+                        <a:t>residence + queueing over each hop</a:t>
                       </a:r>
                     </a:p>
                   </a:txBody>
@@ -8998,7 +9082,75 @@
                     <a:lstStyle/>
                     <a:p>
                       <a:r>
-                        <a:rPr sz="1350" b="0">
+                        <a:rPr sz="1200" b="0">
+                          <a:solidFill>
+                            <a:srgbClr val="5B6172"/>
+                          </a:solidFill>
+                          <a:latin typeface="Calibri"/>
+                        </a:rPr>
+                        <a:t>compensated by PTP (mean)</a:t>
+                      </a:r>
+                    </a:p>
+                  </a:txBody>
+                  <a:tcPr marL="109728" marT="36576" marB="36576">
+                    <a:solidFill>
+                      <a:srgbClr val="FFFFFF"/>
+                    </a:solidFill>
+                  </a:tcPr>
+                </a:tc>
+              </a:tr>
+              <a:tr h="457200">
+                <a:tc>
+                  <a:txBody>
+                    <a:bodyPr/>
+                    <a:lstStyle/>
+                    <a:p>
+                      <a:r>
+                        <a:rPr sz="1200" b="1">
+                          <a:solidFill>
+                            <a:srgbClr val="1A1D29"/>
+                          </a:solidFill>
+                          <a:latin typeface="Calibri"/>
+                        </a:rPr>
+                        <a:t>Link asymmetry</a:t>
+                      </a:r>
+                    </a:p>
+                  </a:txBody>
+                  <a:tcPr marL="109728" marT="36576" marB="36576">
+                    <a:solidFill>
+                      <a:srgbClr val="EDF1FB"/>
+                    </a:solidFill>
+                  </a:tcPr>
+                </a:tc>
+                <a:tc>
+                  <a:txBody>
+                    <a:bodyPr/>
+                    <a:lstStyle/>
+                    <a:p>
+                      <a:r>
+                        <a:rPr sz="1200" b="0">
+                          <a:solidFill>
+                            <a:srgbClr val="5B6172"/>
+                          </a:solidFill>
+                          <a:latin typeface="Calibri"/>
+                        </a:rPr>
+                        <a:t>up and down paths differ</a:t>
+                      </a:r>
+                    </a:p>
+                  </a:txBody>
+                  <a:tcPr marL="109728" marT="36576" marB="36576">
+                    <a:solidFill>
+                      <a:srgbClr val="EDF1FB"/>
+                    </a:solidFill>
+                  </a:tcPr>
+                </a:tc>
+                <a:tc>
+                  <a:txBody>
+                    <a:bodyPr/>
+                    <a:lstStyle/>
+                    <a:p>
+                      <a:r>
+                        <a:rPr sz="1200" b="0">
                           <a:solidFill>
                             <a:srgbClr val="5B6172"/>
                           </a:solidFill>
@@ -9010,7 +9162,7 @@
                   </a:txBody>
                   <a:tcPr marL="109728" marT="36576" marB="36576">
                     <a:solidFill>
-                      <a:srgbClr val="FFFFFF"/>
+                      <a:srgbClr val="EDF1FB"/>
                     </a:solidFill>
                   </a:tcPr>
                 </a:tc>
@@ -9296,7 +9448,7 @@
                 </a:solidFill>
                 <a:latin typeface="Calibri"/>
               </a:rPr>
-              <a:t>Layers 1–2: hardware &amp; sync offset</a:t>
+              <a:t>Layers 1–2: oscillator &amp; PHC clock</a:t>
             </a:r>
           </a:p>
         </p:txBody>
@@ -9347,7 +9499,7 @@
                 </a:solidFill>
                 <a:latin typeface="Calibri"/>
               </a:rPr>
-              <a:t>Oscillator: TCXO/OCXO stability (ppb), temperature sensitivity, PHC read latency</a:t>
+              <a:t>Oscillator (layer 1): TCXO/OCXO stability (ppb), temperature sensitivity, free-run drift</a:t>
             </a:r>
           </a:p>
           <a:p>
@@ -9375,7 +9527,7 @@
                 </a:solidFill>
                 <a:latin typeface="Calibri"/>
               </a:rPr>
-              <a:t>PTP gives estimates, not truths:</a:t>
+              <a:t>PHC clock (layer 2): the disciplined hardware clock we actually read</a:t>
             </a:r>
           </a:p>
           <a:p>
@@ -9403,7 +9555,7 @@
                 </a:solidFill>
                 <a:latin typeface="Calibri"/>
               </a:rPr>
-              <a:t>offsetFromMaster — clock offset estimate</a:t>
+              <a:t>offsetFromMaster — offset estimate</a:t>
             </a:r>
           </a:p>
           <a:p>
@@ -9431,7 +9583,7 @@
                 </a:solidFill>
                 <a:latin typeface="Calibri"/>
               </a:rPr>
-              <a:t>meanPathDelay — path-asymmetry estimate</a:t>
+              <a:t>clock resolution — granularity of a single tick</a:t>
             </a:r>
           </a:p>
           <a:p>
@@ -9459,7 +9611,7 @@
                 </a:solidFill>
                 <a:latin typeface="Calibri"/>
               </a:rPr>
-              <a:t>stepsRemoved — distance from the grandmaster</a:t>
+              <a:t>PHC read latency — the cost of reading it</a:t>
             </a:r>
           </a:p>
           <a:p>
@@ -9487,7 +9639,7 @@
                 </a:solidFill>
                 <a:latin typeface="Calibri"/>
               </a:rPr>
-              <a:t>The servo converges; it never mathematically reaches zero</a:t>
+              <a:t>The servo converges toward zero offset; it never mathematically reaches it</a:t>
             </a:r>
           </a:p>
         </p:txBody>
@@ -10401,7 +10553,7 @@
                 </a:solidFill>
                 <a:latin typeface="Calibri"/>
               </a:rPr>
-              <a:t>PTP compensates the mean path delay — so it is not in the bound</a:t>
+              <a:t>Network (layer 3): each hop adds queueing + routing delay</a:t>
             </a:r>
           </a:p>
           <a:p>
@@ -10429,7 +10581,7 @@
                 </a:solidFill>
                 <a:latin typeface="Calibri"/>
               </a:rPr>
-              <a:t>Residual risk is path asymmetry (up/down differ) — unmodeled today</a:t>
+              <a:t>PTP compensates the mean path delay — so it is not in the bound</a:t>
             </a:r>
           </a:p>
           <a:p>
@@ -10442,6 +10594,34 @@
               </a:spcAft>
             </a:pPr>
             <a:r>
+              <a:rPr sz="1600" b="0" i="0">
+                <a:solidFill>
+                  <a:srgbClr val="5B6172"/>
+                </a:solidFill>
+                <a:latin typeface="Calibri"/>
+              </a:rPr>
+              <a:t>        –  </a:t>
+            </a:r>
+            <a:r>
+              <a:rPr sz="1600" b="0" i="0">
+                <a:solidFill>
+                  <a:srgbClr val="5B6172"/>
+                </a:solidFill>
+                <a:latin typeface="Calibri"/>
+              </a:rPr>
+              <a:t>Residual is link asymmetry (up/down differ), accumulating with hop count — unmodeled</a:t>
+            </a:r>
+          </a:p>
+          <a:p>
+            <a:pPr algn="l">
+              <a:spcBef>
+                <a:spcPts val="0"/>
+              </a:spcBef>
+              <a:spcAft>
+                <a:spcPts val="1000"/>
+              </a:spcAft>
+            </a:pPr>
+            <a:r>
               <a:rPr sz="1800" b="1" i="0">
                 <a:solidFill>
                   <a:srgbClr val="2E6BE6"/>
@@ -10457,7 +10637,7 @@
                 </a:solidFill>
                 <a:latin typeface="Calibri"/>
               </a:rPr>
-              <a:t>Linux exposes useful data — but not as one package:</a:t>
+              <a:t>Kernel path (layer 5): Linux exposes useful data — but not as one package:</a:t>
             </a:r>
           </a:p>
           <a:p>
@@ -12600,7 +12780,7 @@
                 </a:solidFill>
                 <a:latin typeface="Consolas"/>
               </a:rPr>
-              <a:t>  drift_ns = (now_mono - ingress_mono)</a:t>
+              <a:t>  drift_ns = (time_now - ingress_time)</a:t>
             </a:r>
           </a:p>
           <a:p>
@@ -12904,7 +13084,7 @@
                 </a:solidFill>
                 <a:latin typeface="Calibri"/>
               </a:rPr>
-              <a:t>total_uncertainty_ns = |offset| + drift</a:t>
+              <a:t>total_uncertainty_ns = |offdrift + clock_resolution + capture_point_error</a:t>
             </a:r>
           </a:p>
         </p:txBody>
@@ -12946,7 +13126,7 @@
                 </a:solidFill>
                 <a:latin typeface="Calibri"/>
               </a:rPr>
-              <a:t>Mean path delay is compensated by PTP, so it is excluded.  Example: 80 ns offset + 50 ns drift = 130 ns bound.</a:t>
+              <a:t>Example: 50 ns drift + 8 ns resolution + 40 ns capture ≈ 98 ns bound.</a:t>
             </a:r>
           </a:p>
         </p:txBody>
@@ -21617,7 +21797,7 @@
                 </a:solidFill>
                 <a:latin typeface="Calibri"/>
               </a:rPr>
-              <a:t>We spent a decade chasing precision</a:t>
+              <a:t>We spent two decades chasing precision</a:t>
             </a:r>
           </a:p>
         </p:txBody>
@@ -22077,7 +22257,7 @@
         </p:nvGraphicFramePr>
         <p:xfrm>
           <a:off x="640080" y="1645920"/>
-          <a:ext cx="10881360" cy="4754871"/>
+          <a:ext cx="10881360" cy="4754880"/>
         </p:xfrm>
         <a:graphic>
           <a:graphicData uri="http://schemas.openxmlformats.org/drawingml/2006/table">
@@ -22090,7 +22270,7 @@
                 <a:gridCol w="3627120"/>
                 <a:gridCol w="3627120"/>
               </a:tblGrid>
-              <a:tr h="432261">
+              <a:tr h="396240">
                 <a:tc>
                   <a:txBody>
                     <a:bodyPr/>
@@ -22158,7 +22338,7 @@
                   </a:tcPr>
                 </a:tc>
               </a:tr>
-              <a:tr h="432261">
+              <a:tr h="396240">
                 <a:tc>
                   <a:txBody>
                     <a:bodyPr/>
@@ -22226,7 +22406,7 @@
                   </a:tcPr>
                 </a:tc>
               </a:tr>
-              <a:tr h="432261">
+              <a:tr h="396240">
                 <a:tc>
                   <a:txBody>
                     <a:bodyPr/>
@@ -22294,7 +22474,7 @@
                   </a:tcPr>
                 </a:tc>
               </a:tr>
-              <a:tr h="432261">
+              <a:tr h="396240">
                 <a:tc>
                   <a:txBody>
                     <a:bodyPr/>
@@ -22362,7 +22542,7 @@
                   </a:tcPr>
                 </a:tc>
               </a:tr>
-              <a:tr h="432261">
+              <a:tr h="396240">
                 <a:tc>
                   <a:txBody>
                     <a:bodyPr/>
@@ -22430,7 +22610,7 @@
                   </a:tcPr>
                 </a:tc>
               </a:tr>
-              <a:tr h="432261">
+              <a:tr h="396240">
                 <a:tc>
                   <a:txBody>
                     <a:bodyPr/>
@@ -22498,7 +22678,7 @@
                   </a:tcPr>
                 </a:tc>
               </a:tr>
-              <a:tr h="432261">
+              <a:tr h="396240">
                 <a:tc>
                   <a:txBody>
                     <a:bodyPr/>
@@ -22566,7 +22746,7 @@
                   </a:tcPr>
                 </a:tc>
               </a:tr>
-              <a:tr h="432261">
+              <a:tr h="396240">
                 <a:tc>
                   <a:txBody>
                     <a:bodyPr/>
@@ -22634,7 +22814,7 @@
                   </a:tcPr>
                 </a:tc>
               </a:tr>
-              <a:tr h="432261">
+              <a:tr h="396240">
                 <a:tc>
                   <a:txBody>
                     <a:bodyPr/>
@@ -22702,7 +22882,7 @@
                   </a:tcPr>
                 </a:tc>
               </a:tr>
-              <a:tr h="432261">
+              <a:tr h="396240">
                 <a:tc>
                   <a:txBody>
                     <a:bodyPr/>
@@ -22770,7 +22950,7 @@
                   </a:tcPr>
                 </a:tc>
               </a:tr>
-              <a:tr h="432261">
+              <a:tr h="396240">
                 <a:tc>
                   <a:txBody>
                     <a:bodyPr/>
@@ -22838,6 +23018,74 @@
                   </a:tcPr>
                 </a:tc>
               </a:tr>
+              <a:tr h="396240">
+                <a:tc>
+                  <a:txBody>
+                    <a:bodyPr/>
+                    <a:lstStyle/>
+                    <a:p>
+                      <a:r>
+                        <a:rPr sz="1200" b="1">
+                          <a:solidFill>
+                            <a:srgbClr val="1A1D29"/>
+                          </a:solidFill>
+                          <a:latin typeface="Calibri"/>
+                        </a:rPr>
+                        <a:t>Launch time load balancing</a:t>
+                      </a:r>
+                    </a:p>
+                  </a:txBody>
+                  <a:tcPr marL="109728" marT="36576" marB="36576">
+                    <a:solidFill>
+                      <a:srgbClr val="FFFFFF"/>
+                    </a:solidFill>
+                  </a:tcPr>
+                </a:tc>
+                <a:tc>
+                  <a:txBody>
+                    <a:bodyPr/>
+                    <a:lstStyle/>
+                    <a:p>
+                      <a:r>
+                        <a:rPr sz="1200" b="0">
+                          <a:solidFill>
+                            <a:srgbClr val="5B6172"/>
+                          </a:solidFill>
+                          <a:latin typeface="Calibri"/>
+                        </a:rPr>
+                        <a:t>packets will have their dedicated slots</a:t>
+                      </a:r>
+                    </a:p>
+                  </a:txBody>
+                  <a:tcPr marL="109728" marT="36576" marB="36576">
+                    <a:solidFill>
+                      <a:srgbClr val="FFFFFF"/>
+                    </a:solidFill>
+                  </a:tcPr>
+                </a:tc>
+                <a:tc>
+                  <a:txBody>
+                    <a:bodyPr/>
+                    <a:lstStyle/>
+                    <a:p>
+                      <a:r>
+                        <a:rPr sz="1200" b="0">
+                          <a:solidFill>
+                            <a:srgbClr val="5B6172"/>
+                          </a:solidFill>
+                          <a:latin typeface="Calibri"/>
+                        </a:rPr>
+                        <a:t>packet collisions</a:t>
+                      </a:r>
+                    </a:p>
+                  </a:txBody>
+                  <a:tcPr marL="109728" marT="36576" marB="36576">
+                    <a:solidFill>
+                      <a:srgbClr val="FFFFFF"/>
+                    </a:solidFill>
+                  </a:tcPr>
+                </a:tc>
+              </a:tr>
             </a:tbl>
           </a:graphicData>
         </a:graphic>
@@ -23004,7 +23252,7 @@
         </p:nvSpPr>
         <p:spPr>
           <a:xfrm>
-            <a:off x="822960" y="2331720"/>
+            <a:off x="822960" y="932688"/>
             <a:ext cx="2377440" cy="91440"/>
           </a:xfrm>
           <a:prstGeom prst="rect">
@@ -23048,8 +23296,8 @@
         </p:nvSpPr>
         <p:spPr>
           <a:xfrm>
-            <a:off x="822960" y="2514600"/>
-            <a:ext cx="10515600" cy="1828800"/>
+            <a:off x="822960" y="1078992"/>
+            <a:ext cx="10698480" cy="914400"/>
           </a:xfrm>
           <a:prstGeom prst="rect">
             <a:avLst/>
@@ -23071,7 +23319,7 @@
               </a:spcAft>
             </a:pPr>
             <a:r>
-              <a:rPr sz="3400" b="1" i="0">
+              <a:rPr sz="3000" b="1" i="0">
                 <a:solidFill>
                   <a:srgbClr val="1A1D29"/>
                 </a:solidFill>
@@ -23084,14 +23332,58 @@
       </p:sp>
       <p:sp>
         <p:nvSpPr>
-          <p:cNvPr id="4" name="TextBox 3"/>
+          <p:cNvPr id="4" name="Rectangle 3"/>
+          <p:cNvSpPr/>
+          <p:nvPr/>
+        </p:nvSpPr>
+        <p:spPr>
+          <a:xfrm>
+            <a:off x="5349230" y="2697480"/>
+            <a:ext cx="1188700" cy="1920240"/>
+          </a:xfrm>
+          <a:prstGeom prst="rect">
+            <a:avLst/>
+          </a:prstGeom>
+          <a:solidFill>
+            <a:srgbClr val="FBE8C0"/>
+          </a:solidFill>
+          <a:ln>
+            <a:noFill/>
+          </a:ln>
+          <a:effectLst/>
+        </p:spPr>
+        <p:style>
+          <a:lnRef idx="1">
+            <a:schemeClr val="accent1"/>
+          </a:lnRef>
+          <a:fillRef idx="3">
+            <a:schemeClr val="accent1"/>
+          </a:fillRef>
+          <a:effectRef idx="2">
+            <a:schemeClr val="accent1"/>
+          </a:effectRef>
+          <a:fontRef idx="minor">
+            <a:schemeClr val="lt1"/>
+          </a:fontRef>
+        </p:style>
+        <p:txBody>
+          <a:bodyPr rtlCol="0" anchor="ctr"/>
+          <a:lstStyle/>
+          <a:p>
+            <a:pPr algn="ctr"/>
+          </a:p>
+        </p:txBody>
+      </p:sp>
+      <p:sp>
+        <p:nvSpPr>
+          <p:cNvPr id="5" name="TextBox 4"/>
           <p:cNvSpPr txBox="1"/>
           <p:nvPr/>
         </p:nvSpPr>
         <p:spPr>
           <a:xfrm>
-            <a:off x="841248" y="4206240"/>
-            <a:ext cx="10515600" cy="1097280"/>
+            <a:off x="5349230" y="2743200"/>
+            <a:ext cx="1188700" cy="365760"/>
           </a:xfrm>
           <a:prstGeom prst="rect">
             <a:avLst/>
@@ -23099,12 +23391,12 @@
           <a:noFill/>
         </p:spPr>
         <p:txBody>
-          <a:bodyPr wrap="square" anchor="t" lIns="0" rIns="0" tIns="0" bIns="0">
+          <a:bodyPr wrap="square" anchor="ctr" lIns="0" rIns="0" tIns="0" bIns="0">
             <a:spAutoFit/>
           </a:bodyPr>
           <a:lstStyle/>
           <a:p>
-            <a:pPr algn="l">
+            <a:pPr algn="ctr">
               <a:spcBef>
                 <a:spcPts val="0"/>
               </a:spcBef>
@@ -23113,27 +23405,115 @@
               </a:spcAft>
             </a:pPr>
             <a:r>
-              <a:rPr sz="2000" b="0" i="1">
-                <a:solidFill>
-                  <a:srgbClr val="5B6172"/>
-                </a:solidFill>
-                <a:latin typeface="Calibri"/>
-              </a:rPr>
-              <a:t>Their true order is unknown — and nothing in the timestamp told you so.</a:t>
-            </a:r>
-          </a:p>
-        </p:txBody>
-      </p:sp>
-      <p:sp>
-        <p:nvSpPr>
-          <p:cNvPr id="5" name="Rectangle 4"/>
+              <a:rPr sz="1400" b="1" i="0">
+                <a:solidFill>
+                  <a:srgbClr val="B4760A"/>
+                </a:solidFill>
+                <a:latin typeface="Calibri"/>
+              </a:rPr>
+              <a:t>overlap</a:t>
+            </a:r>
+          </a:p>
+        </p:txBody>
+      </p:sp>
+      <p:sp>
+        <p:nvSpPr>
+          <p:cNvPr id="6" name="Rectangle 5"/>
           <p:cNvSpPr/>
           <p:nvPr/>
         </p:nvSpPr>
         <p:spPr>
           <a:xfrm>
-            <a:off x="0" y="6601968"/>
-            <a:ext cx="12191695" cy="256032"/>
+            <a:off x="2377480" y="4617720"/>
+            <a:ext cx="7132200" cy="25400"/>
+          </a:xfrm>
+          <a:prstGeom prst="rect">
+            <a:avLst/>
+          </a:prstGeom>
+          <a:solidFill>
+            <a:srgbClr val="5B6172"/>
+          </a:solidFill>
+          <a:ln>
+            <a:noFill/>
+          </a:ln>
+          <a:effectLst/>
+        </p:spPr>
+        <p:style>
+          <a:lnRef idx="1">
+            <a:schemeClr val="accent1"/>
+          </a:lnRef>
+          <a:fillRef idx="3">
+            <a:schemeClr val="accent1"/>
+          </a:fillRef>
+          <a:effectRef idx="2">
+            <a:schemeClr val="accent1"/>
+          </a:effectRef>
+          <a:fontRef idx="minor">
+            <a:schemeClr val="lt1"/>
+          </a:fontRef>
+        </p:style>
+        <p:txBody>
+          <a:bodyPr rtlCol="0" anchor="ctr"/>
+          <a:lstStyle/>
+          <a:p>
+            <a:pPr algn="ctr"/>
+          </a:p>
+        </p:txBody>
+      </p:sp>
+      <p:sp>
+        <p:nvSpPr>
+          <p:cNvPr id="7" name="Rectangle 6"/>
+          <p:cNvSpPr/>
+          <p:nvPr/>
+        </p:nvSpPr>
+        <p:spPr>
+          <a:xfrm>
+            <a:off x="4754880" y="3063240"/>
+            <a:ext cx="19050" cy="1554480"/>
+          </a:xfrm>
+          <a:prstGeom prst="rect">
+            <a:avLst/>
+          </a:prstGeom>
+          <a:solidFill>
+            <a:srgbClr val="C2CBDD"/>
+          </a:solidFill>
+          <a:ln>
+            <a:noFill/>
+          </a:ln>
+          <a:effectLst/>
+        </p:spPr>
+        <p:style>
+          <a:lnRef idx="1">
+            <a:schemeClr val="accent1"/>
+          </a:lnRef>
+          <a:fillRef idx="3">
+            <a:schemeClr val="accent1"/>
+          </a:fillRef>
+          <a:effectRef idx="2">
+            <a:schemeClr val="accent1"/>
+          </a:effectRef>
+          <a:fontRef idx="minor">
+            <a:schemeClr val="lt1"/>
+          </a:fontRef>
+        </p:style>
+        <p:txBody>
+          <a:bodyPr rtlCol="0" anchor="ctr"/>
+          <a:lstStyle/>
+          <a:p>
+            <a:pPr algn="ctr"/>
+          </a:p>
+        </p:txBody>
+      </p:sp>
+      <p:sp>
+        <p:nvSpPr>
+          <p:cNvPr id="8" name="Rectangle 7"/>
+          <p:cNvSpPr/>
+          <p:nvPr/>
+        </p:nvSpPr>
+        <p:spPr>
+          <a:xfrm>
+            <a:off x="2971830" y="2980944"/>
+            <a:ext cx="3566100" cy="164592"/>
           </a:xfrm>
           <a:prstGeom prst="rect">
             <a:avLst/>
@@ -23170,14 +23550,146 @@
       </p:sp>
       <p:sp>
         <p:nvSpPr>
-          <p:cNvPr id="6" name="TextBox 5"/>
+          <p:cNvPr id="9" name="Rectangle 8"/>
+          <p:cNvSpPr/>
+          <p:nvPr/>
+        </p:nvSpPr>
+        <p:spPr>
+          <a:xfrm>
+            <a:off x="2971830" y="2898648"/>
+            <a:ext cx="50800" cy="329184"/>
+          </a:xfrm>
+          <a:prstGeom prst="rect">
+            <a:avLst/>
+          </a:prstGeom>
+          <a:solidFill>
+            <a:srgbClr val="2E6BE6"/>
+          </a:solidFill>
+          <a:ln>
+            <a:noFill/>
+          </a:ln>
+          <a:effectLst/>
+        </p:spPr>
+        <p:style>
+          <a:lnRef idx="1">
+            <a:schemeClr val="accent1"/>
+          </a:lnRef>
+          <a:fillRef idx="3">
+            <a:schemeClr val="accent1"/>
+          </a:fillRef>
+          <a:effectRef idx="2">
+            <a:schemeClr val="accent1"/>
+          </a:effectRef>
+          <a:fontRef idx="minor">
+            <a:schemeClr val="lt1"/>
+          </a:fontRef>
+        </p:style>
+        <p:txBody>
+          <a:bodyPr rtlCol="0" anchor="ctr"/>
+          <a:lstStyle/>
+          <a:p>
+            <a:pPr algn="ctr"/>
+          </a:p>
+        </p:txBody>
+      </p:sp>
+      <p:sp>
+        <p:nvSpPr>
+          <p:cNvPr id="10" name="Rectangle 9"/>
+          <p:cNvSpPr/>
+          <p:nvPr/>
+        </p:nvSpPr>
+        <p:spPr>
+          <a:xfrm>
+            <a:off x="6487130" y="2898648"/>
+            <a:ext cx="50800" cy="329184"/>
+          </a:xfrm>
+          <a:prstGeom prst="rect">
+            <a:avLst/>
+          </a:prstGeom>
+          <a:solidFill>
+            <a:srgbClr val="2E6BE6"/>
+          </a:solidFill>
+          <a:ln>
+            <a:noFill/>
+          </a:ln>
+          <a:effectLst/>
+        </p:spPr>
+        <p:style>
+          <a:lnRef idx="1">
+            <a:schemeClr val="accent1"/>
+          </a:lnRef>
+          <a:fillRef idx="3">
+            <a:schemeClr val="accent1"/>
+          </a:fillRef>
+          <a:effectRef idx="2">
+            <a:schemeClr val="accent1"/>
+          </a:effectRef>
+          <a:fontRef idx="minor">
+            <a:schemeClr val="lt1"/>
+          </a:fontRef>
+        </p:style>
+        <p:txBody>
+          <a:bodyPr rtlCol="0" anchor="ctr"/>
+          <a:lstStyle/>
+          <a:p>
+            <a:pPr algn="ctr"/>
+          </a:p>
+        </p:txBody>
+      </p:sp>
+      <p:sp>
+        <p:nvSpPr>
+          <p:cNvPr id="11" name="Rectangle 10"/>
+          <p:cNvSpPr/>
+          <p:nvPr/>
+        </p:nvSpPr>
+        <p:spPr>
+          <a:xfrm>
+            <a:off x="4716780" y="2852928"/>
+            <a:ext cx="76200" cy="420624"/>
+          </a:xfrm>
+          <a:prstGeom prst="rect">
+            <a:avLst/>
+          </a:prstGeom>
+          <a:solidFill>
+            <a:srgbClr val="1A1D29"/>
+          </a:solidFill>
+          <a:ln>
+            <a:noFill/>
+          </a:ln>
+          <a:effectLst/>
+        </p:spPr>
+        <p:style>
+          <a:lnRef idx="1">
+            <a:schemeClr val="accent1"/>
+          </a:lnRef>
+          <a:fillRef idx="3">
+            <a:schemeClr val="accent1"/>
+          </a:fillRef>
+          <a:effectRef idx="2">
+            <a:schemeClr val="accent1"/>
+          </a:effectRef>
+          <a:fontRef idx="minor">
+            <a:schemeClr val="lt1"/>
+          </a:fontRef>
+        </p:style>
+        <p:txBody>
+          <a:bodyPr rtlCol="0" anchor="ctr"/>
+          <a:lstStyle/>
+          <a:p>
+            <a:pPr algn="ctr"/>
+          </a:p>
+        </p:txBody>
+      </p:sp>
+      <p:sp>
+        <p:nvSpPr>
+          <p:cNvPr id="12" name="TextBox 11"/>
           <p:cNvSpPr txBox="1"/>
           <p:nvPr/>
         </p:nvSpPr>
         <p:spPr>
           <a:xfrm>
-            <a:off x="457200" y="6583680"/>
-            <a:ext cx="8229600" cy="256032"/>
+            <a:off x="2404902" y="2880360"/>
+            <a:ext cx="457200" cy="365760"/>
           </a:xfrm>
           <a:prstGeom prst="rect">
             <a:avLst/>
@@ -23186,6 +23698,612 @@
         </p:spPr>
         <p:txBody>
           <a:bodyPr wrap="square" anchor="ctr" lIns="0" rIns="0" tIns="0" bIns="0">
+            <a:spAutoFit/>
+          </a:bodyPr>
+          <a:lstStyle/>
+          <a:p>
+            <a:pPr algn="ctr">
+              <a:spcBef>
+                <a:spcPts val="0"/>
+              </a:spcBef>
+              <a:spcAft>
+                <a:spcPts val="600"/>
+              </a:spcAft>
+            </a:pPr>
+            <a:r>
+              <a:rPr sz="1800" b="1" i="0">
+                <a:solidFill>
+                  <a:srgbClr val="2E6BE6"/>
+                </a:solidFill>
+                <a:latin typeface="Calibri"/>
+              </a:rPr>
+              <a:t>A</a:t>
+            </a:r>
+          </a:p>
+        </p:txBody>
+      </p:sp>
+      <p:sp>
+        <p:nvSpPr>
+          <p:cNvPr id="13" name="Rectangle 12"/>
+          <p:cNvSpPr/>
+          <p:nvPr/>
+        </p:nvSpPr>
+        <p:spPr>
+          <a:xfrm>
+            <a:off x="7132280" y="3977639"/>
+            <a:ext cx="19050" cy="640081"/>
+          </a:xfrm>
+          <a:prstGeom prst="rect">
+            <a:avLst/>
+          </a:prstGeom>
+          <a:solidFill>
+            <a:srgbClr val="C2CBDD"/>
+          </a:solidFill>
+          <a:ln>
+            <a:noFill/>
+          </a:ln>
+          <a:effectLst/>
+        </p:spPr>
+        <p:style>
+          <a:lnRef idx="1">
+            <a:schemeClr val="accent1"/>
+          </a:lnRef>
+          <a:fillRef idx="3">
+            <a:schemeClr val="accent1"/>
+          </a:fillRef>
+          <a:effectRef idx="2">
+            <a:schemeClr val="accent1"/>
+          </a:effectRef>
+          <a:fontRef idx="minor">
+            <a:schemeClr val="lt1"/>
+          </a:fontRef>
+        </p:style>
+        <p:txBody>
+          <a:bodyPr rtlCol="0" anchor="ctr"/>
+          <a:lstStyle/>
+          <a:p>
+            <a:pPr algn="ctr"/>
+          </a:p>
+        </p:txBody>
+      </p:sp>
+      <p:sp>
+        <p:nvSpPr>
+          <p:cNvPr id="14" name="Rectangle 13"/>
+          <p:cNvSpPr/>
+          <p:nvPr/>
+        </p:nvSpPr>
+        <p:spPr>
+          <a:xfrm>
+            <a:off x="5349230" y="3895343"/>
+            <a:ext cx="3566100" cy="164592"/>
+          </a:xfrm>
+          <a:prstGeom prst="rect">
+            <a:avLst/>
+          </a:prstGeom>
+          <a:solidFill>
+            <a:srgbClr val="14B8A6"/>
+          </a:solidFill>
+          <a:ln>
+            <a:noFill/>
+          </a:ln>
+          <a:effectLst/>
+        </p:spPr>
+        <p:style>
+          <a:lnRef idx="1">
+            <a:schemeClr val="accent1"/>
+          </a:lnRef>
+          <a:fillRef idx="3">
+            <a:schemeClr val="accent1"/>
+          </a:fillRef>
+          <a:effectRef idx="2">
+            <a:schemeClr val="accent1"/>
+          </a:effectRef>
+          <a:fontRef idx="minor">
+            <a:schemeClr val="lt1"/>
+          </a:fontRef>
+        </p:style>
+        <p:txBody>
+          <a:bodyPr rtlCol="0" anchor="ctr"/>
+          <a:lstStyle/>
+          <a:p>
+            <a:pPr algn="ctr"/>
+          </a:p>
+        </p:txBody>
+      </p:sp>
+      <p:sp>
+        <p:nvSpPr>
+          <p:cNvPr id="15" name="Rectangle 14"/>
+          <p:cNvSpPr/>
+          <p:nvPr/>
+        </p:nvSpPr>
+        <p:spPr>
+          <a:xfrm>
+            <a:off x="5349230" y="3813047"/>
+            <a:ext cx="50800" cy="329184"/>
+          </a:xfrm>
+          <a:prstGeom prst="rect">
+            <a:avLst/>
+          </a:prstGeom>
+          <a:solidFill>
+            <a:srgbClr val="14B8A6"/>
+          </a:solidFill>
+          <a:ln>
+            <a:noFill/>
+          </a:ln>
+          <a:effectLst/>
+        </p:spPr>
+        <p:style>
+          <a:lnRef idx="1">
+            <a:schemeClr val="accent1"/>
+          </a:lnRef>
+          <a:fillRef idx="3">
+            <a:schemeClr val="accent1"/>
+          </a:fillRef>
+          <a:effectRef idx="2">
+            <a:schemeClr val="accent1"/>
+          </a:effectRef>
+          <a:fontRef idx="minor">
+            <a:schemeClr val="lt1"/>
+          </a:fontRef>
+        </p:style>
+        <p:txBody>
+          <a:bodyPr rtlCol="0" anchor="ctr"/>
+          <a:lstStyle/>
+          <a:p>
+            <a:pPr algn="ctr"/>
+          </a:p>
+        </p:txBody>
+      </p:sp>
+      <p:sp>
+        <p:nvSpPr>
+          <p:cNvPr id="16" name="Rectangle 15"/>
+          <p:cNvSpPr/>
+          <p:nvPr/>
+        </p:nvSpPr>
+        <p:spPr>
+          <a:xfrm>
+            <a:off x="8864530" y="3813047"/>
+            <a:ext cx="50800" cy="329184"/>
+          </a:xfrm>
+          <a:prstGeom prst="rect">
+            <a:avLst/>
+          </a:prstGeom>
+          <a:solidFill>
+            <a:srgbClr val="14B8A6"/>
+          </a:solidFill>
+          <a:ln>
+            <a:noFill/>
+          </a:ln>
+          <a:effectLst/>
+        </p:spPr>
+        <p:style>
+          <a:lnRef idx="1">
+            <a:schemeClr val="accent1"/>
+          </a:lnRef>
+          <a:fillRef idx="3">
+            <a:schemeClr val="accent1"/>
+          </a:fillRef>
+          <a:effectRef idx="2">
+            <a:schemeClr val="accent1"/>
+          </a:effectRef>
+          <a:fontRef idx="minor">
+            <a:schemeClr val="lt1"/>
+          </a:fontRef>
+        </p:style>
+        <p:txBody>
+          <a:bodyPr rtlCol="0" anchor="ctr"/>
+          <a:lstStyle/>
+          <a:p>
+            <a:pPr algn="ctr"/>
+          </a:p>
+        </p:txBody>
+      </p:sp>
+      <p:sp>
+        <p:nvSpPr>
+          <p:cNvPr id="17" name="Rectangle 16"/>
+          <p:cNvSpPr/>
+          <p:nvPr/>
+        </p:nvSpPr>
+        <p:spPr>
+          <a:xfrm>
+            <a:off x="7094180" y="3767327"/>
+            <a:ext cx="76200" cy="420624"/>
+          </a:xfrm>
+          <a:prstGeom prst="rect">
+            <a:avLst/>
+          </a:prstGeom>
+          <a:solidFill>
+            <a:srgbClr val="1A1D29"/>
+          </a:solidFill>
+          <a:ln>
+            <a:noFill/>
+          </a:ln>
+          <a:effectLst/>
+        </p:spPr>
+        <p:style>
+          <a:lnRef idx="1">
+            <a:schemeClr val="accent1"/>
+          </a:lnRef>
+          <a:fillRef idx="3">
+            <a:schemeClr val="accent1"/>
+          </a:fillRef>
+          <a:effectRef idx="2">
+            <a:schemeClr val="accent1"/>
+          </a:effectRef>
+          <a:fontRef idx="minor">
+            <a:schemeClr val="lt1"/>
+          </a:fontRef>
+        </p:style>
+        <p:txBody>
+          <a:bodyPr rtlCol="0" anchor="ctr"/>
+          <a:lstStyle/>
+          <a:p>
+            <a:pPr algn="ctr"/>
+          </a:p>
+        </p:txBody>
+      </p:sp>
+      <p:sp>
+        <p:nvSpPr>
+          <p:cNvPr id="18" name="TextBox 17"/>
+          <p:cNvSpPr txBox="1"/>
+          <p:nvPr/>
+        </p:nvSpPr>
+        <p:spPr>
+          <a:xfrm>
+            <a:off x="4782302" y="3794759"/>
+            <a:ext cx="457200" cy="365760"/>
+          </a:xfrm>
+          <a:prstGeom prst="rect">
+            <a:avLst/>
+          </a:prstGeom>
+          <a:noFill/>
+        </p:spPr>
+        <p:txBody>
+          <a:bodyPr wrap="square" anchor="ctr" lIns="0" rIns="0" tIns="0" bIns="0">
+            <a:spAutoFit/>
+          </a:bodyPr>
+          <a:lstStyle/>
+          <a:p>
+            <a:pPr algn="ctr">
+              <a:spcBef>
+                <a:spcPts val="0"/>
+              </a:spcBef>
+              <a:spcAft>
+                <a:spcPts val="600"/>
+              </a:spcAft>
+            </a:pPr>
+            <a:r>
+              <a:rPr sz="1800" b="1" i="0">
+                <a:solidFill>
+                  <a:srgbClr val="14B8A6"/>
+                </a:solidFill>
+                <a:latin typeface="Calibri"/>
+              </a:rPr>
+              <a:t>B</a:t>
+            </a:r>
+          </a:p>
+        </p:txBody>
+      </p:sp>
+      <p:sp>
+        <p:nvSpPr>
+          <p:cNvPr id="19" name="Rectangle 18"/>
+          <p:cNvSpPr/>
+          <p:nvPr/>
+        </p:nvSpPr>
+        <p:spPr>
+          <a:xfrm>
+            <a:off x="2971830" y="3246120"/>
+            <a:ext cx="3566100" cy="19050"/>
+          </a:xfrm>
+          <a:prstGeom prst="rect">
+            <a:avLst/>
+          </a:prstGeom>
+          <a:solidFill>
+            <a:srgbClr val="5B6172"/>
+          </a:solidFill>
+          <a:ln>
+            <a:noFill/>
+          </a:ln>
+          <a:effectLst/>
+        </p:spPr>
+        <p:style>
+          <a:lnRef idx="1">
+            <a:schemeClr val="accent1"/>
+          </a:lnRef>
+          <a:fillRef idx="3">
+            <a:schemeClr val="accent1"/>
+          </a:fillRef>
+          <a:effectRef idx="2">
+            <a:schemeClr val="accent1"/>
+          </a:effectRef>
+          <a:fontRef idx="minor">
+            <a:schemeClr val="lt1"/>
+          </a:fontRef>
+        </p:style>
+        <p:txBody>
+          <a:bodyPr rtlCol="0" anchor="ctr"/>
+          <a:lstStyle/>
+          <a:p>
+            <a:pPr algn="ctr"/>
+          </a:p>
+        </p:txBody>
+      </p:sp>
+      <p:sp>
+        <p:nvSpPr>
+          <p:cNvPr id="20" name="Rectangle 19"/>
+          <p:cNvSpPr/>
+          <p:nvPr/>
+        </p:nvSpPr>
+        <p:spPr>
+          <a:xfrm>
+            <a:off x="2971830" y="3209544"/>
+            <a:ext cx="19050" cy="100584"/>
+          </a:xfrm>
+          <a:prstGeom prst="rect">
+            <a:avLst/>
+          </a:prstGeom>
+          <a:solidFill>
+            <a:srgbClr val="5B6172"/>
+          </a:solidFill>
+          <a:ln>
+            <a:noFill/>
+          </a:ln>
+          <a:effectLst/>
+        </p:spPr>
+        <p:style>
+          <a:lnRef idx="1">
+            <a:schemeClr val="accent1"/>
+          </a:lnRef>
+          <a:fillRef idx="3">
+            <a:schemeClr val="accent1"/>
+          </a:fillRef>
+          <a:effectRef idx="2">
+            <a:schemeClr val="accent1"/>
+          </a:effectRef>
+          <a:fontRef idx="minor">
+            <a:schemeClr val="lt1"/>
+          </a:fontRef>
+        </p:style>
+        <p:txBody>
+          <a:bodyPr rtlCol="0" anchor="ctr"/>
+          <a:lstStyle/>
+          <a:p>
+            <a:pPr algn="ctr"/>
+          </a:p>
+        </p:txBody>
+      </p:sp>
+      <p:sp>
+        <p:nvSpPr>
+          <p:cNvPr id="21" name="Rectangle 20"/>
+          <p:cNvSpPr/>
+          <p:nvPr/>
+        </p:nvSpPr>
+        <p:spPr>
+          <a:xfrm>
+            <a:off x="4754880" y="3209544"/>
+            <a:ext cx="19050" cy="100584"/>
+          </a:xfrm>
+          <a:prstGeom prst="rect">
+            <a:avLst/>
+          </a:prstGeom>
+          <a:solidFill>
+            <a:srgbClr val="5B6172"/>
+          </a:solidFill>
+          <a:ln>
+            <a:noFill/>
+          </a:ln>
+          <a:effectLst/>
+        </p:spPr>
+        <p:style>
+          <a:lnRef idx="1">
+            <a:schemeClr val="accent1"/>
+          </a:lnRef>
+          <a:fillRef idx="3">
+            <a:schemeClr val="accent1"/>
+          </a:fillRef>
+          <a:effectRef idx="2">
+            <a:schemeClr val="accent1"/>
+          </a:effectRef>
+          <a:fontRef idx="minor">
+            <a:schemeClr val="lt1"/>
+          </a:fontRef>
+        </p:style>
+        <p:txBody>
+          <a:bodyPr rtlCol="0" anchor="ctr"/>
+          <a:lstStyle/>
+          <a:p>
+            <a:pPr algn="ctr"/>
+          </a:p>
+        </p:txBody>
+      </p:sp>
+      <p:sp>
+        <p:nvSpPr>
+          <p:cNvPr id="22" name="Rectangle 21"/>
+          <p:cNvSpPr/>
+          <p:nvPr/>
+        </p:nvSpPr>
+        <p:spPr>
+          <a:xfrm>
+            <a:off x="6537930" y="3209544"/>
+            <a:ext cx="19050" cy="100584"/>
+          </a:xfrm>
+          <a:prstGeom prst="rect">
+            <a:avLst/>
+          </a:prstGeom>
+          <a:solidFill>
+            <a:srgbClr val="5B6172"/>
+          </a:solidFill>
+          <a:ln>
+            <a:noFill/>
+          </a:ln>
+          <a:effectLst/>
+        </p:spPr>
+        <p:style>
+          <a:lnRef idx="1">
+            <a:schemeClr val="accent1"/>
+          </a:lnRef>
+          <a:fillRef idx="3">
+            <a:schemeClr val="accent1"/>
+          </a:fillRef>
+          <a:effectRef idx="2">
+            <a:schemeClr val="accent1"/>
+          </a:effectRef>
+          <a:fontRef idx="minor">
+            <a:schemeClr val="lt1"/>
+          </a:fontRef>
+        </p:style>
+        <p:txBody>
+          <a:bodyPr rtlCol="0" anchor="ctr"/>
+          <a:lstStyle/>
+          <a:p>
+            <a:pPr algn="ctr"/>
+          </a:p>
+        </p:txBody>
+      </p:sp>
+      <p:sp>
+        <p:nvSpPr>
+          <p:cNvPr id="23" name="TextBox 22"/>
+          <p:cNvSpPr txBox="1"/>
+          <p:nvPr/>
+        </p:nvSpPr>
+        <p:spPr>
+          <a:xfrm>
+            <a:off x="2971830" y="3291840"/>
+            <a:ext cx="1783050" cy="274320"/>
+          </a:xfrm>
+          <a:prstGeom prst="rect">
+            <a:avLst/>
+          </a:prstGeom>
+          <a:noFill/>
+        </p:spPr>
+        <p:txBody>
+          <a:bodyPr wrap="square" anchor="ctr" lIns="0" rIns="0" tIns="0" bIns="0">
+            <a:spAutoFit/>
+          </a:bodyPr>
+          <a:lstStyle/>
+          <a:p>
+            <a:pPr algn="ctr">
+              <a:spcBef>
+                <a:spcPts val="0"/>
+              </a:spcBef>
+              <a:spcAft>
+                <a:spcPts val="600"/>
+              </a:spcAft>
+            </a:pPr>
+            <a:r>
+              <a:rPr sz="1200" b="0" i="1">
+                <a:solidFill>
+                  <a:srgbClr val="1A1D29"/>
+                </a:solidFill>
+                <a:latin typeface="Calibri"/>
+              </a:rPr>
+              <a:t>150 ns</a:t>
+            </a:r>
+          </a:p>
+        </p:txBody>
+      </p:sp>
+      <p:sp>
+        <p:nvSpPr>
+          <p:cNvPr id="24" name="TextBox 23"/>
+          <p:cNvSpPr txBox="1"/>
+          <p:nvPr/>
+        </p:nvSpPr>
+        <p:spPr>
+          <a:xfrm>
+            <a:off x="4754880" y="3291840"/>
+            <a:ext cx="1783050" cy="274320"/>
+          </a:xfrm>
+          <a:prstGeom prst="rect">
+            <a:avLst/>
+          </a:prstGeom>
+          <a:noFill/>
+        </p:spPr>
+        <p:txBody>
+          <a:bodyPr wrap="square" anchor="ctr" lIns="0" rIns="0" tIns="0" bIns="0">
+            <a:spAutoFit/>
+          </a:bodyPr>
+          <a:lstStyle/>
+          <a:p>
+            <a:pPr algn="ctr">
+              <a:spcBef>
+                <a:spcPts val="0"/>
+              </a:spcBef>
+              <a:spcAft>
+                <a:spcPts val="600"/>
+              </a:spcAft>
+            </a:pPr>
+            <a:r>
+              <a:rPr sz="1200" b="0" i="1">
+                <a:solidFill>
+                  <a:srgbClr val="1A1D29"/>
+                </a:solidFill>
+                <a:latin typeface="Calibri"/>
+              </a:rPr>
+              <a:t>150 ns</a:t>
+            </a:r>
+          </a:p>
+        </p:txBody>
+      </p:sp>
+      <p:sp>
+        <p:nvSpPr>
+          <p:cNvPr id="25" name="TextBox 24"/>
+          <p:cNvSpPr txBox="1"/>
+          <p:nvPr/>
+        </p:nvSpPr>
+        <p:spPr>
+          <a:xfrm>
+            <a:off x="4754880" y="5029200"/>
+            <a:ext cx="2377400" cy="320040"/>
+          </a:xfrm>
+          <a:prstGeom prst="rect">
+            <a:avLst/>
+          </a:prstGeom>
+          <a:noFill/>
+        </p:spPr>
+        <p:txBody>
+          <a:bodyPr wrap="square" anchor="ctr" lIns="0" rIns="0" tIns="0" bIns="0">
+            <a:spAutoFit/>
+          </a:bodyPr>
+          <a:lstStyle/>
+          <a:p>
+            <a:pPr algn="ctr">
+              <a:spcBef>
+                <a:spcPts val="0"/>
+              </a:spcBef>
+              <a:spcAft>
+                <a:spcPts val="600"/>
+              </a:spcAft>
+            </a:pPr>
+            <a:r>
+              <a:rPr sz="1400" b="1" i="0">
+                <a:solidFill>
+                  <a:srgbClr val="1A1D29"/>
+                </a:solidFill>
+                <a:latin typeface="Calibri"/>
+              </a:rPr>
+              <a:t>←  200 ns apart  →</a:t>
+            </a:r>
+          </a:p>
+        </p:txBody>
+      </p:sp>
+      <p:sp>
+        <p:nvSpPr>
+          <p:cNvPr id="26" name="TextBox 25"/>
+          <p:cNvSpPr txBox="1"/>
+          <p:nvPr/>
+        </p:nvSpPr>
+        <p:spPr>
+          <a:xfrm>
+            <a:off x="841248" y="5623560"/>
+            <a:ext cx="10698480" cy="822960"/>
+          </a:xfrm>
+          <a:prstGeom prst="rect">
+            <a:avLst/>
+          </a:prstGeom>
+          <a:noFill/>
+        </p:spPr>
+        <p:txBody>
+          <a:bodyPr wrap="square" anchor="t" lIns="0" rIns="0" tIns="0" bIns="0">
             <a:spAutoFit/>
           </a:bodyPr>
           <a:lstStyle/>
@@ -23199,6 +24317,92 @@
               </a:spcAft>
             </a:pPr>
             <a:r>
+              <a:rPr sz="2000" b="0" i="1">
+                <a:solidFill>
+                  <a:srgbClr val="5B6172"/>
+                </a:solidFill>
+                <a:latin typeface="Calibri"/>
+              </a:rPr>
+              <a:t>Their true order is unknown — and nothing in the timestamp told you so.</a:t>
+            </a:r>
+          </a:p>
+        </p:txBody>
+      </p:sp>
+      <p:sp>
+        <p:nvSpPr>
+          <p:cNvPr id="27" name="Rectangle 26"/>
+          <p:cNvSpPr/>
+          <p:nvPr/>
+        </p:nvSpPr>
+        <p:spPr>
+          <a:xfrm>
+            <a:off x="0" y="6601968"/>
+            <a:ext cx="12191695" cy="256032"/>
+          </a:xfrm>
+          <a:prstGeom prst="rect">
+            <a:avLst/>
+          </a:prstGeom>
+          <a:solidFill>
+            <a:srgbClr val="2E6BE6"/>
+          </a:solidFill>
+          <a:ln>
+            <a:noFill/>
+          </a:ln>
+          <a:effectLst/>
+        </p:spPr>
+        <p:style>
+          <a:lnRef idx="1">
+            <a:schemeClr val="accent1"/>
+          </a:lnRef>
+          <a:fillRef idx="3">
+            <a:schemeClr val="accent1"/>
+          </a:fillRef>
+          <a:effectRef idx="2">
+            <a:schemeClr val="accent1"/>
+          </a:effectRef>
+          <a:fontRef idx="minor">
+            <a:schemeClr val="lt1"/>
+          </a:fontRef>
+        </p:style>
+        <p:txBody>
+          <a:bodyPr rtlCol="0" anchor="ctr"/>
+          <a:lstStyle/>
+          <a:p>
+            <a:pPr algn="ctr"/>
+          </a:p>
+        </p:txBody>
+      </p:sp>
+      <p:sp>
+        <p:nvSpPr>
+          <p:cNvPr id="28" name="TextBox 27"/>
+          <p:cNvSpPr txBox="1"/>
+          <p:nvPr/>
+        </p:nvSpPr>
+        <p:spPr>
+          <a:xfrm>
+            <a:off x="457200" y="6583680"/>
+            <a:ext cx="8229600" cy="256032"/>
+          </a:xfrm>
+          <a:prstGeom prst="rect">
+            <a:avLst/>
+          </a:prstGeom>
+          <a:noFill/>
+        </p:spPr>
+        <p:txBody>
+          <a:bodyPr wrap="square" anchor="ctr" lIns="0" rIns="0" tIns="0" bIns="0">
+            <a:spAutoFit/>
+          </a:bodyPr>
+          <a:lstStyle/>
+          <a:p>
+            <a:pPr algn="l">
+              <a:spcBef>
+                <a:spcPts val="0"/>
+              </a:spcBef>
+              <a:spcAft>
+                <a:spcPts val="600"/>
+              </a:spcAft>
+            </a:pPr>
+            <a:r>
               <a:rPr sz="1000" b="0" i="0">
                 <a:solidFill>
                   <a:srgbClr val="FFFFFF"/>
@@ -23212,7 +24416,7 @@
       </p:sp>
       <p:sp>
         <p:nvSpPr>
-          <p:cNvPr id="7" name="TextBox 6"/>
+          <p:cNvPr id="29" name="TextBox 28"/>
           <p:cNvSpPr txBox="1"/>
           <p:nvPr/>
         </p:nvSpPr>
@@ -23705,6 +24909,34 @@
                 <a:latin typeface="Calibri"/>
               </a:rPr>
               <a:t>U = the time-uncertainty bound at the moment of observation</a:t>
+            </a:r>
+          </a:p>
+          <a:p>
+            <a:pPr algn="l">
+              <a:spcBef>
+                <a:spcPts val="0"/>
+              </a:spcBef>
+              <a:spcAft>
+                <a:spcPts val="1000"/>
+              </a:spcAft>
+            </a:pPr>
+            <a:r>
+              <a:rPr sz="1600" b="0" i="0">
+                <a:solidFill>
+                  <a:srgbClr val="5B6172"/>
+                </a:solidFill>
+                <a:latin typeface="Calibri"/>
+              </a:rPr>
+              <a:t>        –  </a:t>
+            </a:r>
+            <a:r>
+              <a:rPr sz="1600" b="0" i="0">
+                <a:solidFill>
+                  <a:srgbClr val="5B6172"/>
+                </a:solidFill>
+                <a:latin typeface="Calibri"/>
+              </a:rPr>
+              <a:t>Also can be viewed as earliest-latest</a:t>
             </a:r>
           </a:p>
           <a:p>

--- a/time-uncertainty-error-bar.pptx
+++ b/time-uncertainty-error-bar.pptx
@@ -13084,7 +13084,7 @@
                 </a:solidFill>
                 <a:latin typeface="Calibri"/>
               </a:rPr>
-              <a:t>total_uncertainty_ns = |offdrift + clock_resolution + capture_point_error</a:t>
+              <a:t>total_uncertainty_ns = |offset| + drift + clock_resolution + capture_point_error</a:t>
             </a:r>
           </a:p>
         </p:txBody>
@@ -13126,7 +13126,7 @@
                 </a:solidFill>
                 <a:latin typeface="Calibri"/>
               </a:rPr>
-              <a:t>Example: 50 ns drift + 8 ns resolution + 40 ns capture ≈ 98 ns bound.</a:t>
+              <a:t>Example: 12 ns offset + 50 ns drift + 8 ns resolution + 40 ns capture ≈ 110 ns bound.</a:t>
             </a:r>
           </a:p>
         </p:txBody>
@@ -14891,7 +14891,7 @@
                           </a:solidFill>
                           <a:latin typeface="Calibri"/>
                         </a:rPr>
-                        <a:t>PHC index (optional)</a:t>
+                        <a:t>PHC index</a:t>
                       </a:r>
                     </a:p>
                   </a:txBody>
@@ -15311,22 +15311,6 @@
                 <a:latin typeface="Consolas"/>
               </a:rPr>
               <a:t>  ptp_unc_get(h, &amp;u);            // uncertainty at now</a:t>
-            </a:r>
-          </a:p>
-          <a:p>
-            <a:pPr algn="l">
-              <a:spcAft>
-                <a:spcPts val="200"/>
-              </a:spcAft>
-            </a:pPr>
-            <a:r>
-              <a:rPr sz="1500">
-                <a:solidFill>
-                  <a:srgbClr val="D6E2FF"/>
-                </a:solidFill>
-                <a:latin typeface="Consolas"/>
-              </a:rPr>
-              <a:t>  ptp_unc_get_at(h, &amp;u, t_mono); // at a given monotonic t</a:t>
             </a:r>
           </a:p>
           <a:p>

--- a/time-uncertainty-error-bar.pptx
+++ b/time-uncertainty-error-bar.pptx
@@ -2011,7 +2011,7 @@
           <a:lstStyle/>
           <a:p>
             <a:r>
-              <a:t>Matches the abstract's conclusion: frequency offset is available, but oscillator stability and calibration staleness are not — so precise bounds still need operator config and hardware knowledge. The measurements just proved how much that missing oscillator term matters. And Meta's fbclock is the existence proof: to run holdover in production they estimate drift from PHC frequency-adjustment history and calibrate it with temperature and vibration telemetry — exactly the data the kernel does not hand you. Do not oversell automation.</a:t>
+              <a:t>Correction to the usual framing: the ptp4l management socket is not a kernel API — it lives in userspace. The kernel exposes raw ingredients (SO_TIMESTAMPING, PTP_SYS_OFFSET, /dev/ptpN) but no disciplined PTP sync state, so today the only way to get the offset, the sync ingress anchor, the drift bound and the grandmaster identity is to talk to ptp4l out-of-band. The piece I want to add is exactly that state, exposed by the kernel and built on the ptp-uncertainty IPC segment: master_offset_ns, ingress_time_ns, max_drift_ppb, gm_id and steps_removed — with port state optional since it is derivable from the rest. Those few fields are what let any app compute a live bound without linking a PTP stack. (The harder physical unknowns — oscillator stability, calibration age — still need operator config.)</a:t>
             </a:r>
           </a:p>
         </p:txBody>
@@ -20262,7 +20262,7 @@
                 </a:solidFill>
                 <a:latin typeface="Calibri"/>
               </a:rPr>
-              <a:t>Available today</a:t>
+              <a:t>Kernel today: raw ingredients</a:t>
             </a:r>
           </a:p>
         </p:txBody>
@@ -20369,7 +20369,7 @@
                 </a:solidFill>
                 <a:latin typeface="Calibri"/>
               </a:rPr>
-              <a:t>ptp4l mgmt socket — offset, delay, ingress</a:t>
+              <a:t>/dev/ptpN — freq adjust, ext timestamps</a:t>
             </a:r>
           </a:p>
           <a:p>
@@ -20397,7 +20397,7 @@
                 </a:solidFill>
                 <a:latin typeface="Calibri"/>
               </a:rPr>
-              <a:t>/dev/ptpN — freq adjust, ext timestamps</a:t>
+              <a:t>sync state lives only in ptp4l userspace</a:t>
             </a:r>
           </a:p>
         </p:txBody>
@@ -20483,7 +20483,7 @@
                 </a:solidFill>
                 <a:latin typeface="Calibri"/>
               </a:rPr>
-              <a:t>Not exposed / not standardized</a:t>
+              <a:t>Missing: a kernel PTP sync-state</a:t>
             </a:r>
           </a:p>
         </p:txBody>
@@ -20534,7 +20534,7 @@
                 </a:solidFill>
                 <a:latin typeface="Calibri"/>
               </a:rPr>
-              <a:t>Oscillator stability (Allan deviation)</a:t>
+              <a:t>master_offset_ns — offset at last sync</a:t>
             </a:r>
           </a:p>
           <a:p>
@@ -20562,7 +20562,7 @@
                 </a:solidFill>
                 <a:latin typeface="Calibri"/>
               </a:rPr>
-              <a:t>Calibration age + temperature model</a:t>
+              <a:t>ingress_time_ns — PHC time of sync (drift anchor)</a:t>
             </a:r>
           </a:p>
           <a:p>
@@ -20590,7 +20590,7 @@
                 </a:solidFill>
                 <a:latin typeface="Calibri"/>
               </a:rPr>
-              <a:t>Per-read PHC access-latency bound</a:t>
+              <a:t>max_drift_ppb — worst-case drift bound</a:t>
             </a:r>
           </a:p>
           <a:p>
@@ -20618,7 +20618,35 @@
                 </a:solidFill>
                 <a:latin typeface="Calibri"/>
               </a:rPr>
-              <a:t>A unified “staleness since last discipline”</a:t>
+              <a:t>gm_id + steps_removed — source &amp; hop count</a:t>
+            </a:r>
+          </a:p>
+          <a:p>
+            <a:pPr algn="l">
+              <a:spcBef>
+                <a:spcPts val="0"/>
+              </a:spcBef>
+              <a:spcAft>
+                <a:spcPts val="900"/>
+              </a:spcAft>
+            </a:pPr>
+            <a:r>
+              <a:rPr sz="1500" b="1" i="0">
+                <a:solidFill>
+                  <a:srgbClr val="14B8A6"/>
+                </a:solidFill>
+                <a:latin typeface="Calibri"/>
+              </a:rPr>
+              <a:t>•  </a:t>
+            </a:r>
+            <a:r>
+              <a:rPr sz="1500" b="0" i="0">
+                <a:solidFill>
+                  <a:srgbClr val="1A1D29"/>
+                </a:solidFill>
+                <a:latin typeface="Calibri"/>
+              </a:rPr>
+              <a:t>port state — optional (derivable)</a:t>
             </a:r>
           </a:p>
         </p:txBody>

--- a/time-uncertainty-error-bar.pptx
+++ b/time-uncertainty-error-bar.pptx
@@ -5,7 +5,7 @@
     <p:sldMasterId id="2147483648" r:id="rId1"/>
   </p:sldMasterIdLst>
   <p:notesMasterIdLst>
-    <p:notesMasterId r:id="rId43"/>
+    <p:notesMasterId r:id="rId44"/>
   </p:notesMasterIdLst>
   <p:sldIdLst>
     <p:sldId id="256" r:id="rId2"/>
@@ -40,15 +40,16 @@
     <p:sldId id="286" r:id="rId31"/>
     <p:sldId id="287" r:id="rId32"/>
     <p:sldId id="288" r:id="rId33"/>
-    <p:sldId id="289" r:id="rId34"/>
-    <p:sldId id="290" r:id="rId35"/>
-    <p:sldId id="291" r:id="rId36"/>
-    <p:sldId id="292" r:id="rId37"/>
-    <p:sldId id="293" r:id="rId38"/>
-    <p:sldId id="294" r:id="rId39"/>
-    <p:sldId id="295" r:id="rId40"/>
-    <p:sldId id="278" r:id="rId41"/>
-    <p:sldId id="296" r:id="rId42"/>
+    <p:sldId id="297" r:id="rId34"/>
+    <p:sldId id="289" r:id="rId35"/>
+    <p:sldId id="290" r:id="rId36"/>
+    <p:sldId id="291" r:id="rId37"/>
+    <p:sldId id="292" r:id="rId38"/>
+    <p:sldId id="293" r:id="rId39"/>
+    <p:sldId id="294" r:id="rId40"/>
+    <p:sldId id="295" r:id="rId41"/>
+    <p:sldId id="278" r:id="rId42"/>
+    <p:sldId id="296" r:id="rId43"/>
   </p:sldIdLst>
   <p:sldSz cx="12192000" cy="6858000"/>
   <p:notesSz cx="6858000" cy="9144000"/>
@@ -184,6 +185,7 @@
             <p14:sldId id="286"/>
             <p14:sldId id="287"/>
             <p14:sldId id="288"/>
+            <p14:sldId id="297"/>
             <p14:sldId id="289"/>
             <p14:sldId id="290"/>
             <p14:sldId id="291"/>
@@ -5929,7 +5931,13 @@
   <p:cSld>
     <p:spTree>
       <p:nvGrpSpPr>
-        <p:cNvPr id="1" name=""/>
+        <p:cNvPr id="1" name="">
+          <a:extLst>
+            <a:ext uri="{FF2B5EF4-FFF2-40B4-BE49-F238E27FC236}">
+              <a16:creationId xmlns:a16="http://schemas.microsoft.com/office/drawing/2014/main" id="{7E169EF0-2641-31D0-E7FD-31DA9FF9C1B8}"/>
+            </a:ext>
+          </a:extLst>
+        </p:cNvPr>
         <p:cNvGrpSpPr/>
         <p:nvPr/>
       </p:nvGrpSpPr>
@@ -5943,7 +5951,13 @@
       </p:grpSpPr>
       <p:sp>
         <p:nvSpPr>
-          <p:cNvPr id="2" name="Slide Image Placeholder 1"/>
+          <p:cNvPr id="2" name="Slide Image Placeholder 1">
+            <a:extLst>
+              <a:ext uri="{FF2B5EF4-FFF2-40B4-BE49-F238E27FC236}">
+                <a16:creationId xmlns:a16="http://schemas.microsoft.com/office/drawing/2014/main" id="{AD622A0F-AF98-DA1F-ADC5-B945F2563FF4}"/>
+              </a:ext>
+            </a:extLst>
+          </p:cNvPr>
           <p:cNvSpPr>
             <a:spLocks noGrp="1" noRot="1" noChangeAspect="1"/>
           </p:cNvSpPr>
@@ -5955,7 +5969,13 @@
       </p:sp>
       <p:sp>
         <p:nvSpPr>
-          <p:cNvPr id="3" name="Notes Placeholder 2"/>
+          <p:cNvPr id="3" name="Notes Placeholder 2">
+            <a:extLst>
+              <a:ext uri="{FF2B5EF4-FFF2-40B4-BE49-F238E27FC236}">
+                <a16:creationId xmlns:a16="http://schemas.microsoft.com/office/drawing/2014/main" id="{7237990C-2C9B-CE83-EC07-35B603BD8C7D}"/>
+              </a:ext>
+            </a:extLst>
+          </p:cNvPr>
           <p:cNvSpPr>
             <a:spLocks noGrp="1"/>
           </p:cNvSpPr>
@@ -5978,7 +5998,7 @@
                 <a:ea typeface="+mn-ea"/>
                 <a:cs typeface="+mn-cs"/>
               </a:rPr>
-              <a:t>Here's the bridge, and it's the second line I want you to remember.</a:t>
+              <a:t>One more view — the worst-case moment for each assumption, split into its two parts: the residual offset estimate in gray, and the attributed drift in color.</a:t>
             </a:r>
           </a:p>
           <a:p>
@@ -5992,7 +6012,21 @@
                 <a:ea typeface="+mn-ea"/>
                 <a:cs typeface="+mn-cs"/>
               </a:rPr>
-              <a:t>Last year's talk made reading the clock </a:t>
+              <a:t>For the tight bound, the residual offset and the attributed drift are comparable — the whole envelope is a few hundred nanoseconds. Loosen the bound and the drift term takes over: ninety-nine percent, then essentially all of it. [PAUSE]</a:t>
+            </a:r>
+          </a:p>
+          <a:p>
+            <a:r>
+              <a:rPr lang="en-US" sz="1200" b="0" i="0" kern="1200" dirty="0">
+                <a:solidFill>
+                  <a:schemeClr val="tx1"/>
+                </a:solidFill>
+                <a:effectLst/>
+                <a:latin typeface="+mn-lt"/>
+                <a:ea typeface="+mn-ea"/>
+                <a:cs typeface="+mn-cs"/>
+              </a:rPr>
+              <a:t>Same network, same daemon, same model — and the peak envelope runs from about a third of a microsecond to a hundred and twenty microseconds, decided by the configured drift bound alone. That's the point, and I'll state it carefully: the </a:t>
             </a:r>
             <a:r>
               <a:rPr lang="en-US" sz="1200" b="0" i="1" kern="1200" dirty="0">
@@ -6004,7 +6038,7 @@
                 <a:ea typeface="+mn-ea"/>
                 <a:cs typeface="+mn-cs"/>
               </a:rPr>
-              <a:t>fast</a:t>
+              <a:t>assumed</a:t>
             </a:r>
             <a:r>
               <a:rPr lang="en-US" sz="1200" b="0" i="0" kern="1200" dirty="0">
@@ -6016,114 +6050,20 @@
                 <a:ea typeface="+mn-ea"/>
                 <a:cs typeface="+mn-cs"/>
               </a:rPr>
-              <a:t> — the Hermóðr approximation gets you the device time in tens of nanoseconds instead of microseconds, without the </a:t>
-            </a:r>
-            <a:r>
-              <a:rPr lang="en-US" sz="1200" b="0" i="0" kern="1200" dirty="0" err="1">
-                <a:solidFill>
-                  <a:schemeClr val="tx1"/>
-                </a:solidFill>
-                <a:effectLst/>
-                <a:latin typeface="+mn-lt"/>
-                <a:ea typeface="+mn-ea"/>
-                <a:cs typeface="+mn-cs"/>
-              </a:rPr>
-              <a:t>syscall</a:t>
-            </a:r>
-            <a:r>
-              <a:rPr lang="en-US" sz="1200" b="0" i="0" kern="1200" dirty="0">
-                <a:solidFill>
-                  <a:schemeClr val="tx1"/>
-                </a:solidFill>
-                <a:effectLst/>
-                <a:latin typeface="+mn-lt"/>
-                <a:ea typeface="+mn-ea"/>
-                <a:cs typeface="+mn-cs"/>
-              </a:rPr>
-              <a:t> and PCIe overhead. That's real, and it's powerful. And notice it's built the same way this daemon is: a background process that cross-timestamps and estimates drift, a snapshot in shared memory, and a small client library.</a:t>
-            </a:r>
-          </a:p>
-          <a:p>
-            <a:r>
-              <a:rPr lang="en-US" sz="1200" b="0" i="0" kern="1200" dirty="0">
-                <a:solidFill>
-                  <a:schemeClr val="tx1"/>
-                </a:solidFill>
-                <a:effectLst/>
-                <a:latin typeface="+mn-lt"/>
-                <a:ea typeface="+mn-ea"/>
-                <a:cs typeface="+mn-cs"/>
-              </a:rPr>
-              <a:t>What this talk adds is the other half: </a:t>
-            </a:r>
-            <a:r>
-              <a:rPr lang="en-US" sz="1200" b="1" i="0" kern="1200" dirty="0">
-                <a:solidFill>
-                  <a:schemeClr val="tx1"/>
-                </a:solidFill>
-                <a:effectLst/>
-                <a:latin typeface="+mn-lt"/>
-                <a:ea typeface="+mn-ea"/>
-                <a:cs typeface="+mn-cs"/>
-              </a:rPr>
-              <a:t>it puts an error bar on that time.</a:t>
-            </a:r>
-            <a:r>
-              <a:rPr lang="en-US" sz="1200" b="0" i="0" kern="1200" dirty="0">
-                <a:solidFill>
-                  <a:schemeClr val="tx1"/>
-                </a:solidFill>
-                <a:effectLst/>
-                <a:latin typeface="+mn-lt"/>
-                <a:ea typeface="+mn-ea"/>
-                <a:cs typeface="+mn-cs"/>
-              </a:rPr>
-              <a:t> [PAUSE]</a:t>
-            </a:r>
-          </a:p>
-          <a:p>
-            <a:r>
-              <a:rPr lang="en-US" sz="1200" b="0" i="0" kern="1200" dirty="0">
-                <a:solidFill>
-                  <a:schemeClr val="tx1"/>
-                </a:solidFill>
-                <a:effectLst/>
-                <a:latin typeface="+mn-lt"/>
-                <a:ea typeface="+mn-ea"/>
-                <a:cs typeface="+mn-cs"/>
-              </a:rPr>
-              <a:t>Fast access gives you the time cheaply. Uncertainty tells you how far to trust it. A timestamp you can read cheaply </a:t>
-            </a:r>
-            <a:r>
-              <a:rPr lang="en-US" sz="1200" b="0" i="1" kern="1200" dirty="0">
-                <a:solidFill>
-                  <a:schemeClr val="tx1"/>
-                </a:solidFill>
-                <a:effectLst/>
-                <a:latin typeface="+mn-lt"/>
-                <a:ea typeface="+mn-ea"/>
-                <a:cs typeface="+mn-cs"/>
-              </a:rPr>
-              <a:t>and</a:t>
-            </a:r>
-            <a:r>
-              <a:rPr lang="en-US" sz="1200" b="0" i="0" kern="1200" dirty="0">
-                <a:solidFill>
-                  <a:schemeClr val="tx1"/>
-                </a:solidFill>
-                <a:effectLst/>
-                <a:latin typeface="+mn-lt"/>
-                <a:ea typeface="+mn-ea"/>
-                <a:cs typeface="+mn-cs"/>
-              </a:rPr>
-              <a:t> trust explicitly — that's a complete time primitive, and it takes both halves to build it.</a:t>
-            </a:r>
-          </a:p>
-        </p:txBody>
-      </p:sp>
-      <p:sp>
-        <p:nvSpPr>
-          <p:cNvPr id="4" name="Slide Number Placeholder 3"/>
+              <a:t> residual-frequency bound, not measured holdover, is what dominates between syncs. Which is exactly why that bound needs to be a first-class, explicitly-configured input — and why the kernel not exposing a coherent clock-state to hang it on is the real gap. Hold that for the last section.</a:t>
+            </a:r>
+          </a:p>
+        </p:txBody>
+      </p:sp>
+      <p:sp>
+        <p:nvSpPr>
+          <p:cNvPr id="4" name="Slide Number Placeholder 3">
+            <a:extLst>
+              <a:ext uri="{FF2B5EF4-FFF2-40B4-BE49-F238E27FC236}">
+                <a16:creationId xmlns:a16="http://schemas.microsoft.com/office/drawing/2014/main" id="{80E26380-62B7-12A3-6D65-A68A1B30136A}"/>
+              </a:ext>
+            </a:extLst>
+          </p:cNvPr>
           <p:cNvSpPr>
             <a:spLocks noGrp="1"/>
           </p:cNvSpPr>
@@ -6134,6 +6074,11 @@
         <p:spPr/>
       </p:sp>
     </p:spTree>
+    <p:extLst>
+      <p:ext uri="{BB962C8B-B14F-4D97-AF65-F5344CB8AC3E}">
+        <p14:creationId xmlns:p14="http://schemas.microsoft.com/office/powerpoint/2010/main" val="1343681310"/>
+      </p:ext>
+    </p:extLst>
   </p:cSld>
   <p:clrMapOvr>
     <a:masterClrMapping/>
@@ -6484,7 +6429,7 @@
                 <a:ea typeface="+mn-ea"/>
                 <a:cs typeface="+mn-cs"/>
               </a:rPr>
-              <a:t>Make it concrete. A fast read alone gives you a low-overhead timestamp — that's the first row, and it's genuinely valuable. But on its own it's still just a point: you compare two events point-to-point, you can't tell when the order is ambiguous, and you can't gate a decision on how trustworthy the time is.</a:t>
+              <a:t>Here's the bridge, and it's the second line I want you to remember.</a:t>
             </a:r>
           </a:p>
           <a:p>
@@ -6498,7 +6443,7 @@
                 <a:ea typeface="+mn-ea"/>
                 <a:cs typeface="+mn-cs"/>
               </a:rPr>
-              <a:t>Two events 300 nanoseconds apart, each known to within about 500 nanoseconds — the fast read alone happily says "A before B." With the uncertainty bound, that ordering is honestly </a:t>
+              <a:t>Last year's talk made reading the clock </a:t>
             </a:r>
             <a:r>
               <a:rPr lang="en-US" sz="1200" b="0" i="1" kern="1200" dirty="0">
@@ -6510,7 +6455,7 @@
                 <a:ea typeface="+mn-ea"/>
                 <a:cs typeface="+mn-cs"/>
               </a:rPr>
-              <a:t>ambiguous</a:t>
+              <a:t>fast</a:t>
             </a:r>
             <a:r>
               <a:rPr lang="en-US" sz="1200" b="0" i="0" kern="1200" dirty="0">
@@ -6522,10 +6467,20 @@
                 <a:ea typeface="+mn-ea"/>
                 <a:cs typeface="+mn-cs"/>
               </a:rPr>
-              <a:t>, and the system knows it. [PAUSE]</a:t>
-            </a:r>
-          </a:p>
-          <a:p>
+              <a:t> — the Hermóðr approximation gets you the device time in tens of nanoseconds instead of microseconds, without the </a:t>
+            </a:r>
+            <a:r>
+              <a:rPr lang="en-US" sz="1200" b="0" i="0" kern="1200" dirty="0" err="1">
+                <a:solidFill>
+                  <a:schemeClr val="tx1"/>
+                </a:solidFill>
+                <a:effectLst/>
+                <a:latin typeface="+mn-lt"/>
+                <a:ea typeface="+mn-ea"/>
+                <a:cs typeface="+mn-cs"/>
+              </a:rPr>
+              <a:t>syscall</a:t>
+            </a:r>
             <a:r>
               <a:rPr lang="en-US" sz="1200" b="0" i="0" kern="1200" dirty="0">
                 <a:solidFill>
@@ -6536,7 +6491,59 @@
                 <a:ea typeface="+mn-ea"/>
                 <a:cs typeface="+mn-cs"/>
               </a:rPr>
-              <a:t>Add uncertainty and every row upgrades. Point comparison becomes </a:t>
+              <a:t> and PCIe overhead. </a:t>
+            </a:r>
+          </a:p>
+          <a:p>
+            <a:r>
+              <a:rPr lang="en-US" sz="1200" b="0" i="0" kern="1200" dirty="0">
+                <a:solidFill>
+                  <a:schemeClr val="tx1"/>
+                </a:solidFill>
+                <a:effectLst/>
+                <a:latin typeface="+mn-lt"/>
+                <a:ea typeface="+mn-ea"/>
+                <a:cs typeface="+mn-cs"/>
+              </a:rPr>
+              <a:t>What this talk adds is the other half: </a:t>
+            </a:r>
+            <a:r>
+              <a:rPr lang="en-US" sz="1200" b="1" i="0" kern="1200" dirty="0">
+                <a:solidFill>
+                  <a:schemeClr val="tx1"/>
+                </a:solidFill>
+                <a:effectLst/>
+                <a:latin typeface="+mn-lt"/>
+                <a:ea typeface="+mn-ea"/>
+                <a:cs typeface="+mn-cs"/>
+              </a:rPr>
+              <a:t>it puts an error bar on that time.</a:t>
+            </a:r>
+            <a:r>
+              <a:rPr lang="en-US" sz="1200" b="0" i="0" kern="1200" dirty="0">
+                <a:solidFill>
+                  <a:schemeClr val="tx1"/>
+                </a:solidFill>
+                <a:effectLst/>
+                <a:latin typeface="+mn-lt"/>
+                <a:ea typeface="+mn-ea"/>
+                <a:cs typeface="+mn-cs"/>
+              </a:rPr>
+              <a:t> [PAUSE]</a:t>
+            </a:r>
+          </a:p>
+          <a:p>
+            <a:r>
+              <a:rPr lang="en-US" sz="1200" b="0" i="0" kern="1200" dirty="0">
+                <a:solidFill>
+                  <a:schemeClr val="tx1"/>
+                </a:solidFill>
+                <a:effectLst/>
+                <a:latin typeface="+mn-lt"/>
+                <a:ea typeface="+mn-ea"/>
+                <a:cs typeface="+mn-cs"/>
+              </a:rPr>
+              <a:t>Fast access gives you the time cheaply. Uncertainty tells you how far to trust it. A timestamp you can read cheaply </a:t>
             </a:r>
             <a:r>
               <a:rPr lang="en-US" sz="1200" b="0" i="1" kern="1200" dirty="0">
@@ -6548,7 +6555,7 @@
                 <a:ea typeface="+mn-ea"/>
                 <a:cs typeface="+mn-cs"/>
               </a:rPr>
-              <a:t>interval</a:t>
+              <a:t>and</a:t>
             </a:r>
             <a:r>
               <a:rPr lang="en-US" sz="1200" b="0" i="0" kern="1200" dirty="0">
@@ -6560,79 +6567,7 @@
                 <a:ea typeface="+mn-ea"/>
                 <a:cs typeface="+mn-cs"/>
               </a:rPr>
-              <a:t> comparison. Ambiguity becomes </a:t>
-            </a:r>
-            <a:r>
-              <a:rPr lang="en-US" sz="1200" b="0" i="1" kern="1200" dirty="0">
-                <a:solidFill>
-                  <a:schemeClr val="tx1"/>
-                </a:solidFill>
-                <a:effectLst/>
-                <a:latin typeface="+mn-lt"/>
-                <a:ea typeface="+mn-ea"/>
-                <a:cs typeface="+mn-cs"/>
-              </a:rPr>
-              <a:t>explicit</a:t>
-            </a:r>
-            <a:r>
-              <a:rPr lang="en-US" sz="1200" b="0" i="0" kern="1200" dirty="0">
-                <a:solidFill>
-                  <a:schemeClr val="tx1"/>
-                </a:solidFill>
-                <a:effectLst/>
-                <a:latin typeface="+mn-lt"/>
-                <a:ea typeface="+mn-ea"/>
-                <a:cs typeface="+mn-cs"/>
-              </a:rPr>
-              <a:t> instead of buried. Decisions can be </a:t>
-            </a:r>
-            <a:r>
-              <a:rPr lang="en-US" sz="1200" b="0" i="1" kern="1200" dirty="0">
-                <a:solidFill>
-                  <a:schemeClr val="tx1"/>
-                </a:solidFill>
-                <a:effectLst/>
-                <a:latin typeface="+mn-lt"/>
-                <a:ea typeface="+mn-ea"/>
-                <a:cs typeface="+mn-cs"/>
-              </a:rPr>
-              <a:t>gated</a:t>
-            </a:r>
-            <a:r>
-              <a:rPr lang="en-US" sz="1200" b="0" i="0" kern="1200" dirty="0">
-                <a:solidFill>
-                  <a:schemeClr val="tx1"/>
-                </a:solidFill>
-                <a:effectLst/>
-                <a:latin typeface="+mn-lt"/>
-                <a:ea typeface="+mn-ea"/>
-                <a:cs typeface="+mn-cs"/>
-              </a:rPr>
-              <a:t> on a threshold over U. And any correlation or merge window can </a:t>
-            </a:r>
-            <a:r>
-              <a:rPr lang="en-US" sz="1200" b="0" i="1" kern="1200" dirty="0">
-                <a:solidFill>
-                  <a:schemeClr val="tx1"/>
-                </a:solidFill>
-                <a:effectLst/>
-                <a:latin typeface="+mn-lt"/>
-                <a:ea typeface="+mn-ea"/>
-                <a:cs typeface="+mn-cs"/>
-              </a:rPr>
-              <a:t>adapt</a:t>
-            </a:r>
-            <a:r>
-              <a:rPr lang="en-US" sz="1200" b="0" i="0" kern="1200" dirty="0">
-                <a:solidFill>
-                  <a:schemeClr val="tx1"/>
-                </a:solidFill>
-                <a:effectLst/>
-                <a:latin typeface="+mn-lt"/>
-                <a:ea typeface="+mn-ea"/>
-                <a:cs typeface="+mn-cs"/>
-              </a:rPr>
-              <a:t> to the live quality of the clock — tight when it's good, wider when it's drifting. That's fast time and its uncertainty, composed into one primitive.</a:t>
+              <a:t> trust explicitly — that's a complete time primitive, and it takes both halves to build it.</a:t>
             </a:r>
           </a:p>
         </p:txBody>
@@ -6711,7 +6646,21 @@
                 <a:ea typeface="+mn-ea"/>
                 <a:cs typeface="+mn-cs"/>
               </a:rPr>
-              <a:t>Let me correct a framing you'll often hear — including from me earlier. The kernel gives us </a:t>
+              <a:t>Make it concrete. A fast read alone gives you a low-overhead timestamp — that's the first row, and it's genuinely valuable. But on its own it's still just a point: you compare two events point-to-point, you can't tell when the order is ambiguous, and you can't gate a decision on how trustworthy the time is.</a:t>
+            </a:r>
+          </a:p>
+          <a:p>
+            <a:r>
+              <a:rPr lang="en-US" sz="1200" b="0" i="0" kern="1200" dirty="0">
+                <a:solidFill>
+                  <a:schemeClr val="tx1"/>
+                </a:solidFill>
+                <a:effectLst/>
+                <a:latin typeface="+mn-lt"/>
+                <a:ea typeface="+mn-ea"/>
+                <a:cs typeface="+mn-cs"/>
+              </a:rPr>
+              <a:t>Two events 200 nanoseconds apart, each known to within about 150 nanoseconds — the fast read alone happily says "A before B." With the uncertainty bound, that ordering is honestly </a:t>
             </a:r>
             <a:r>
               <a:rPr lang="en-US" sz="1200" b="0" i="1" kern="1200" dirty="0">
@@ -6723,7 +6672,7 @@
                 <a:ea typeface="+mn-ea"/>
                 <a:cs typeface="+mn-cs"/>
               </a:rPr>
-              <a:t>ingredients</a:t>
+              <a:t>ambiguous</a:t>
             </a:r>
             <a:r>
               <a:rPr lang="en-US" sz="1200" b="0" i="0" kern="1200" dirty="0">
@@ -6735,20 +6684,10 @@
                 <a:ea typeface="+mn-ea"/>
                 <a:cs typeface="+mn-cs"/>
               </a:rPr>
-              <a:t>. On the left: SO_TIMESTAMPING for hardware and software timestamps; PTP_SYS_OFFSET to cross-reference the PHC against the system clock; and /dev/</a:t>
-            </a:r>
-            <a:r>
-              <a:rPr lang="en-US" sz="1200" b="0" i="0" kern="1200" dirty="0" err="1">
-                <a:solidFill>
-                  <a:schemeClr val="tx1"/>
-                </a:solidFill>
-                <a:effectLst/>
-                <a:latin typeface="+mn-lt"/>
-                <a:ea typeface="+mn-ea"/>
-                <a:cs typeface="+mn-cs"/>
-              </a:rPr>
-              <a:t>ptpN</a:t>
-            </a:r>
+              <a:t>, and the system knows it. [PAUSE]</a:t>
+            </a:r>
+          </a:p>
+          <a:p>
             <a:r>
               <a:rPr lang="en-US" sz="1200" b="0" i="0" kern="1200" dirty="0">
                 <a:solidFill>
@@ -6759,10 +6698,20 @@
                 <a:ea typeface="+mn-ea"/>
                 <a:cs typeface="+mn-cs"/>
               </a:rPr>
-              <a:t> for frequency adjustment and external timestamps.</a:t>
-            </a:r>
-          </a:p>
-          <a:p>
+              <a:t>Add uncertainty and every row upgrades. Point comparison becomes </a:t>
+            </a:r>
+            <a:r>
+              <a:rPr lang="en-US" sz="1200" b="0" i="1" kern="1200" dirty="0">
+                <a:solidFill>
+                  <a:schemeClr val="tx1"/>
+                </a:solidFill>
+                <a:effectLst/>
+                <a:latin typeface="+mn-lt"/>
+                <a:ea typeface="+mn-ea"/>
+                <a:cs typeface="+mn-cs"/>
+              </a:rPr>
+              <a:t>interval</a:t>
+            </a:r>
             <a:r>
               <a:rPr lang="en-US" sz="1200" b="0" i="0" kern="1200" dirty="0">
                 <a:solidFill>
@@ -6773,7 +6722,7 @@
                 <a:ea typeface="+mn-ea"/>
                 <a:cs typeface="+mn-cs"/>
               </a:rPr>
-              <a:t>But notice what is </a:t>
+              <a:t> comparison. Ambiguity becomes </a:t>
             </a:r>
             <a:r>
               <a:rPr lang="en-US" sz="1200" b="0" i="1" kern="1200" dirty="0">
@@ -6785,7 +6734,7 @@
                 <a:ea typeface="+mn-ea"/>
                 <a:cs typeface="+mn-cs"/>
               </a:rPr>
-              <a:t>not</a:t>
+              <a:t>explicit</a:t>
             </a:r>
             <a:r>
               <a:rPr lang="en-US" sz="1200" b="0" i="0" kern="1200" dirty="0">
@@ -6797,19 +6746,19 @@
                 <a:ea typeface="+mn-ea"/>
                 <a:cs typeface="+mn-cs"/>
               </a:rPr>
-              <a:t> on that list: the ptp4l management socket. That's the whole point — it isn't a kernel API at all. It lives in </a:t>
-            </a:r>
-            <a:r>
-              <a:rPr lang="en-US" sz="1200" b="0" i="1" kern="1200" dirty="0" err="1">
-                <a:solidFill>
-                  <a:schemeClr val="tx1"/>
-                </a:solidFill>
-                <a:effectLst/>
-                <a:latin typeface="+mn-lt"/>
-                <a:ea typeface="+mn-ea"/>
-                <a:cs typeface="+mn-cs"/>
-              </a:rPr>
-              <a:t>userspace</a:t>
+              <a:t> instead of buried. Decisions can be </a:t>
+            </a:r>
+            <a:r>
+              <a:rPr lang="en-US" sz="1200" b="0" i="1" kern="1200" dirty="0">
+                <a:solidFill>
+                  <a:schemeClr val="tx1"/>
+                </a:solidFill>
+                <a:effectLst/>
+                <a:latin typeface="+mn-lt"/>
+                <a:ea typeface="+mn-ea"/>
+                <a:cs typeface="+mn-cs"/>
+              </a:rPr>
+              <a:t>gated</a:t>
             </a:r>
             <a:r>
               <a:rPr lang="en-US" sz="1200" b="0" i="0" kern="1200" dirty="0">
@@ -6821,10 +6770,20 @@
                 <a:ea typeface="+mn-ea"/>
                 <a:cs typeface="+mn-cs"/>
               </a:rPr>
-              <a:t>. So the one thing we actually need — the disciplined PTP sync state — exists only inside ptp4l, and the only way to get it today is to talk to that daemon out-of-band.</a:t>
-            </a:r>
-          </a:p>
-          <a:p>
+              <a:t> on a threshold over U. And any correlation or merge window can </a:t>
+            </a:r>
+            <a:r>
+              <a:rPr lang="en-US" sz="1200" b="0" i="1" kern="1200" dirty="0">
+                <a:solidFill>
+                  <a:schemeClr val="tx1"/>
+                </a:solidFill>
+                <a:effectLst/>
+                <a:latin typeface="+mn-lt"/>
+                <a:ea typeface="+mn-ea"/>
+                <a:cs typeface="+mn-cs"/>
+              </a:rPr>
+              <a:t>adapt</a:t>
+            </a:r>
             <a:r>
               <a:rPr lang="en-US" sz="1200" b="0" i="0" kern="1200" dirty="0">
                 <a:solidFill>
@@ -6835,213 +6794,7 @@
                 <a:ea typeface="+mn-ea"/>
                 <a:cs typeface="+mn-cs"/>
               </a:rPr>
-              <a:t>That's the gap I want to close — and the critique of the model earlier actually sharpens it. The problem isn't merely that the data lives in </a:t>
-            </a:r>
-            <a:r>
-              <a:rPr lang="en-US" sz="1200" b="0" i="0" kern="1200" dirty="0" err="1">
-                <a:solidFill>
-                  <a:schemeClr val="tx1"/>
-                </a:solidFill>
-                <a:effectLst/>
-                <a:latin typeface="+mn-lt"/>
-                <a:ea typeface="+mn-ea"/>
-                <a:cs typeface="+mn-cs"/>
-              </a:rPr>
-              <a:t>userspace</a:t>
-            </a:r>
-            <a:r>
-              <a:rPr lang="en-US" sz="1200" b="0" i="0" kern="1200" dirty="0">
-                <a:solidFill>
-                  <a:schemeClr val="tx1"/>
-                </a:solidFill>
-                <a:effectLst/>
-                <a:latin typeface="+mn-lt"/>
-                <a:ea typeface="+mn-ea"/>
-                <a:cs typeface="+mn-cs"/>
-              </a:rPr>
-              <a:t>. It's that Linux and PTP expose no </a:t>
-            </a:r>
-            <a:r>
-              <a:rPr lang="en-US" sz="1200" b="0" i="1" kern="1200" dirty="0">
-                <a:solidFill>
-                  <a:schemeClr val="tx1"/>
-                </a:solidFill>
-                <a:effectLst/>
-                <a:latin typeface="+mn-lt"/>
-                <a:ea typeface="+mn-ea"/>
-                <a:cs typeface="+mn-cs"/>
-              </a:rPr>
-              <a:t>coherent</a:t>
-            </a:r>
-            <a:r>
-              <a:rPr lang="en-US" sz="1200" b="0" i="0" kern="1200" dirty="0">
-                <a:solidFill>
-                  <a:schemeClr val="tx1"/>
-                </a:solidFill>
-                <a:effectLst/>
-                <a:latin typeface="+mn-lt"/>
-                <a:ea typeface="+mn-ea"/>
-                <a:cs typeface="+mn-cs"/>
-              </a:rPr>
-              <a:t> clock-state at a single observation epoch. Remember slide twenty-one: offset comes from one dataset, ingress from another, polled independently — I had to stitch non-atomic observations into one "now." So the primitive I'd add isn't just "expose </a:t>
-            </a:r>
-            <a:r>
-              <a:rPr lang="en-US" sz="1200" b="0" i="0" kern="1200" dirty="0" err="1">
-                <a:solidFill>
-                  <a:schemeClr val="tx1"/>
-                </a:solidFill>
-                <a:effectLst/>
-                <a:latin typeface="+mn-lt"/>
-                <a:ea typeface="+mn-ea"/>
-                <a:cs typeface="+mn-cs"/>
-              </a:rPr>
-              <a:t>max_drift_ppb</a:t>
-            </a:r>
-            <a:r>
-              <a:rPr lang="en-US" sz="1200" b="0" i="0" kern="1200" dirty="0">
-                <a:solidFill>
-                  <a:schemeClr val="tx1"/>
-                </a:solidFill>
-                <a:effectLst/>
-                <a:latin typeface="+mn-lt"/>
-                <a:ea typeface="+mn-ea"/>
-                <a:cs typeface="+mn-cs"/>
-              </a:rPr>
-              <a:t>." It's </a:t>
-            </a:r>
-            <a:r>
-              <a:rPr lang="en-US" sz="1200" b="0" i="1" kern="1200" dirty="0">
-                <a:solidFill>
-                  <a:schemeClr val="tx1"/>
-                </a:solidFill>
-                <a:effectLst/>
-                <a:latin typeface="+mn-lt"/>
-                <a:ea typeface="+mn-ea"/>
-                <a:cs typeface="+mn-cs"/>
-              </a:rPr>
-              <a:t>one atomic snapshot at a defined epoch</a:t>
-            </a:r>
-            <a:r>
-              <a:rPr lang="en-US" sz="1200" b="0" i="0" kern="1200" dirty="0">
-                <a:solidFill>
-                  <a:schemeClr val="tx1"/>
-                </a:solidFill>
-                <a:effectLst/>
-                <a:latin typeface="+mn-lt"/>
-                <a:ea typeface="+mn-ea"/>
-                <a:cs typeface="+mn-cs"/>
-              </a:rPr>
-              <a:t>, built on the structure this daemon already publishes: </a:t>
-            </a:r>
-            <a:r>
-              <a:rPr lang="en-US" sz="1200" b="0" i="0" kern="1200" dirty="0" err="1">
-                <a:solidFill>
-                  <a:schemeClr val="tx1"/>
-                </a:solidFill>
-                <a:effectLst/>
-                <a:latin typeface="+mn-lt"/>
-                <a:ea typeface="+mn-ea"/>
-                <a:cs typeface="+mn-cs"/>
-              </a:rPr>
-              <a:t>master_offset_ns</a:t>
-            </a:r>
-            <a:r>
-              <a:rPr lang="en-US" sz="1200" b="0" i="0" kern="1200" dirty="0">
-                <a:solidFill>
-                  <a:schemeClr val="tx1"/>
-                </a:solidFill>
-                <a:effectLst/>
-                <a:latin typeface="+mn-lt"/>
-                <a:ea typeface="+mn-ea"/>
-                <a:cs typeface="+mn-cs"/>
-              </a:rPr>
-              <a:t> and </a:t>
-            </a:r>
-            <a:r>
-              <a:rPr lang="en-US" sz="1200" b="0" i="0" kern="1200" dirty="0" err="1">
-                <a:solidFill>
-                  <a:schemeClr val="tx1"/>
-                </a:solidFill>
-                <a:effectLst/>
-                <a:latin typeface="+mn-lt"/>
-                <a:ea typeface="+mn-ea"/>
-                <a:cs typeface="+mn-cs"/>
-              </a:rPr>
-              <a:t>ingress_time_ns</a:t>
-            </a:r>
-            <a:r>
-              <a:rPr lang="en-US" sz="1200" b="0" i="0" kern="1200" dirty="0">
-                <a:solidFill>
-                  <a:schemeClr val="tx1"/>
-                </a:solidFill>
-                <a:effectLst/>
-                <a:latin typeface="+mn-lt"/>
-                <a:ea typeface="+mn-ea"/>
-                <a:cs typeface="+mn-cs"/>
-              </a:rPr>
-              <a:t> together as the anchor; </a:t>
-            </a:r>
-            <a:r>
-              <a:rPr lang="en-US" sz="1200" b="0" i="0" kern="1200" dirty="0" err="1">
-                <a:solidFill>
-                  <a:schemeClr val="tx1"/>
-                </a:solidFill>
-                <a:effectLst/>
-                <a:latin typeface="+mn-lt"/>
-                <a:ea typeface="+mn-ea"/>
-                <a:cs typeface="+mn-cs"/>
-              </a:rPr>
-              <a:t>max_drift_ppb</a:t>
-            </a:r>
-            <a:r>
-              <a:rPr lang="en-US" sz="1200" b="0" i="0" kern="1200" dirty="0">
-                <a:solidFill>
-                  <a:schemeClr val="tx1"/>
-                </a:solidFill>
-                <a:effectLst/>
-                <a:latin typeface="+mn-lt"/>
-                <a:ea typeface="+mn-ea"/>
-                <a:cs typeface="+mn-cs"/>
-              </a:rPr>
-              <a:t> as the assumed frequency-error bound; the grandmaster identity and </a:t>
-            </a:r>
-            <a:r>
-              <a:rPr lang="en-US" sz="1200" b="0" i="0" kern="1200" dirty="0" err="1">
-                <a:solidFill>
-                  <a:schemeClr val="tx1"/>
-                </a:solidFill>
-                <a:effectLst/>
-                <a:latin typeface="+mn-lt"/>
-                <a:ea typeface="+mn-ea"/>
-                <a:cs typeface="+mn-cs"/>
-              </a:rPr>
-              <a:t>steps_removed</a:t>
-            </a:r>
-            <a:r>
-              <a:rPr lang="en-US" sz="1200" b="0" i="0" kern="1200" dirty="0">
-                <a:solidFill>
-                  <a:schemeClr val="tx1"/>
-                </a:solidFill>
-                <a:effectLst/>
-                <a:latin typeface="+mn-lt"/>
-                <a:ea typeface="+mn-ea"/>
-                <a:cs typeface="+mn-cs"/>
-              </a:rPr>
-              <a:t> — though I'll be honest that per-hop error is a crude policy, not a physical bound, since a transparent clock and a boundary clock fail differently. Enough metadata, at one epoch, to derive an uncertainty envelope under stated assumptions. [PAUSE]</a:t>
-            </a:r>
-          </a:p>
-          <a:p>
-            <a:r>
-              <a:rPr lang="en-US" sz="1200" b="0" i="0" kern="1200" dirty="0">
-                <a:solidFill>
-                  <a:schemeClr val="tx1"/>
-                </a:solidFill>
-                <a:effectLst/>
-                <a:latin typeface="+mn-lt"/>
-                <a:ea typeface="+mn-ea"/>
-                <a:cs typeface="+mn-cs"/>
-              </a:rPr>
-              <a:t>That's a much harder thesis to attack than "give me a drift number." With a coherent snapshot, any application could compute a live envelope without linking a PTP stack or scraping a daemon. The harder physical unknowns — oscillator stability, calibration age — still need operator config; I won't oversell that. But a coherent clock-state at a defined epoch is a small, concrete thing to build, and it's the missing recipe.</a:t>
+              <a:t> to the live quality of the clock — tight when it's good, wider when it's drifting. That's fast time and its uncertainty, composed into one primitive.</a:t>
             </a:r>
           </a:p>
         </p:txBody>
@@ -7120,10 +6873,20 @@
                 <a:ea typeface="+mn-ea"/>
                 <a:cs typeface="+mn-cs"/>
               </a:rPr>
-              <a:t>Six things to take with you.</a:t>
-            </a:r>
-          </a:p>
-          <a:p>
+              <a:t>The kernel gives us </a:t>
+            </a:r>
+            <a:r>
+              <a:rPr lang="en-US" sz="1200" b="0" i="1" kern="1200" dirty="0">
+                <a:solidFill>
+                  <a:schemeClr val="tx1"/>
+                </a:solidFill>
+                <a:effectLst/>
+                <a:latin typeface="+mn-lt"/>
+                <a:ea typeface="+mn-ea"/>
+                <a:cs typeface="+mn-cs"/>
+              </a:rPr>
+              <a:t>ingredients</a:t>
+            </a:r>
             <a:r>
               <a:rPr lang="en-US" sz="1200" b="0" i="0" kern="1200" dirty="0">
                 <a:solidFill>
@@ -7134,7 +6897,107 @@
                 <a:ea typeface="+mn-ea"/>
                 <a:cs typeface="+mn-cs"/>
               </a:rPr>
-              <a:t>One: timestamps are intervals. Design your systems around </a:t>
+              <a:t>. On the left: SO_TIMESTAMPING for hardware and software timestamps; PTP_SYS_OFFSET to cross-reference the PHC against the system clock; and /dev/</a:t>
+            </a:r>
+            <a:r>
+              <a:rPr lang="en-US" sz="1200" b="0" i="0" kern="1200" dirty="0" err="1">
+                <a:solidFill>
+                  <a:schemeClr val="tx1"/>
+                </a:solidFill>
+                <a:effectLst/>
+                <a:latin typeface="+mn-lt"/>
+                <a:ea typeface="+mn-ea"/>
+                <a:cs typeface="+mn-cs"/>
+              </a:rPr>
+              <a:t>ptpN</a:t>
+            </a:r>
+            <a:r>
+              <a:rPr lang="en-US" sz="1200" b="0" i="0" kern="1200" dirty="0">
+                <a:solidFill>
+                  <a:schemeClr val="tx1"/>
+                </a:solidFill>
+                <a:effectLst/>
+                <a:latin typeface="+mn-lt"/>
+                <a:ea typeface="+mn-ea"/>
+                <a:cs typeface="+mn-cs"/>
+              </a:rPr>
+              <a:t> for frequency adjustment and external timestamps.</a:t>
+            </a:r>
+          </a:p>
+          <a:p>
+            <a:r>
+              <a:rPr lang="en-US" sz="1200" b="0" i="0" kern="1200" dirty="0">
+                <a:solidFill>
+                  <a:schemeClr val="tx1"/>
+                </a:solidFill>
+                <a:effectLst/>
+                <a:latin typeface="+mn-lt"/>
+                <a:ea typeface="+mn-ea"/>
+                <a:cs typeface="+mn-cs"/>
+              </a:rPr>
+              <a:t>But notice the ptp4l management socket. It lives in </a:t>
+            </a:r>
+            <a:r>
+              <a:rPr lang="en-US" sz="1200" b="0" i="1" kern="1200" dirty="0" err="1">
+                <a:solidFill>
+                  <a:schemeClr val="tx1"/>
+                </a:solidFill>
+                <a:effectLst/>
+                <a:latin typeface="+mn-lt"/>
+                <a:ea typeface="+mn-ea"/>
+                <a:cs typeface="+mn-cs"/>
+              </a:rPr>
+              <a:t>userspace</a:t>
+            </a:r>
+            <a:r>
+              <a:rPr lang="en-US" sz="1200" b="0" i="0" kern="1200" dirty="0">
+                <a:solidFill>
+                  <a:schemeClr val="tx1"/>
+                </a:solidFill>
+                <a:effectLst/>
+                <a:latin typeface="+mn-lt"/>
+                <a:ea typeface="+mn-ea"/>
+                <a:cs typeface="+mn-cs"/>
+              </a:rPr>
+              <a:t>. So the one thing we actually need — the disciplined PTP sync state — exists only inside ptp4l, and the only way to get it today is to talk to that daemon out-of-band.</a:t>
+            </a:r>
+          </a:p>
+          <a:p>
+            <a:r>
+              <a:rPr lang="en-US" sz="1200" b="0" i="0" kern="1200" dirty="0">
+                <a:solidFill>
+                  <a:schemeClr val="tx1"/>
+                </a:solidFill>
+                <a:effectLst/>
+                <a:latin typeface="+mn-lt"/>
+                <a:ea typeface="+mn-ea"/>
+                <a:cs typeface="+mn-cs"/>
+              </a:rPr>
+              <a:t>That's the gap I want to close. The problem isn't merely that the data lives in </a:t>
+            </a:r>
+            <a:r>
+              <a:rPr lang="en-US" sz="1200" b="0" i="0" kern="1200" dirty="0" err="1">
+                <a:solidFill>
+                  <a:schemeClr val="tx1"/>
+                </a:solidFill>
+                <a:effectLst/>
+                <a:latin typeface="+mn-lt"/>
+                <a:ea typeface="+mn-ea"/>
+                <a:cs typeface="+mn-cs"/>
+              </a:rPr>
+              <a:t>userspace</a:t>
+            </a:r>
+            <a:r>
+              <a:rPr lang="en-US" sz="1200" b="0" i="0" kern="1200" dirty="0">
+                <a:solidFill>
+                  <a:schemeClr val="tx1"/>
+                </a:solidFill>
+                <a:effectLst/>
+                <a:latin typeface="+mn-lt"/>
+                <a:ea typeface="+mn-ea"/>
+                <a:cs typeface="+mn-cs"/>
+              </a:rPr>
+              <a:t>. It's that Linux and PTP expose no </a:t>
             </a:r>
             <a:r>
               <a:rPr lang="en-US" sz="1200" b="0" i="1" kern="1200" dirty="0">
@@ -7146,7 +7009,7 @@
                 <a:ea typeface="+mn-ea"/>
                 <a:cs typeface="+mn-cs"/>
               </a:rPr>
-              <a:t>t plus-or-minus U</a:t>
+              <a:t>coherent</a:t>
             </a:r>
             <a:r>
               <a:rPr lang="en-US" sz="1200" b="0" i="0" kern="1200" dirty="0">
@@ -7158,10 +7021,20 @@
                 <a:ea typeface="+mn-ea"/>
                 <a:cs typeface="+mn-cs"/>
               </a:rPr>
-              <a:t>.</a:t>
-            </a:r>
-          </a:p>
-          <a:p>
+              <a:t> clock-state at a single observation epoch. Remember slide twenty-one: offset comes from one dataset, ingress from another, polled independently — I had to stitch non-atomic observations into one "now." So the primitive I'd add isn't just "expose </a:t>
+            </a:r>
+            <a:r>
+              <a:rPr lang="en-US" sz="1200" b="0" i="0" kern="1200" dirty="0" err="1">
+                <a:solidFill>
+                  <a:schemeClr val="tx1"/>
+                </a:solidFill>
+                <a:effectLst/>
+                <a:latin typeface="+mn-lt"/>
+                <a:ea typeface="+mn-ea"/>
+                <a:cs typeface="+mn-cs"/>
+              </a:rPr>
+              <a:t>max_drift_ppb</a:t>
+            </a:r>
             <a:r>
               <a:rPr lang="en-US" sz="1200" b="0" i="0" kern="1200" dirty="0">
                 <a:solidFill>
@@ -7172,7 +7045,7 @@
                 <a:ea typeface="+mn-ea"/>
                 <a:cs typeface="+mn-cs"/>
               </a:rPr>
-              <a:t>Two, and this is the honest one: U is a </a:t>
+              <a:t>." It's </a:t>
             </a:r>
             <a:r>
               <a:rPr lang="en-US" sz="1200" b="0" i="1" kern="1200" dirty="0">
@@ -7184,7 +7057,7 @@
                 <a:ea typeface="+mn-ea"/>
                 <a:cs typeface="+mn-cs"/>
               </a:rPr>
-              <a:t>computed envelope under stated assumptions</a:t>
+              <a:t>one atomic snapshot at a defined epoch</a:t>
             </a:r>
             <a:r>
               <a:rPr lang="en-US" sz="1200" b="0" i="0" kern="1200" dirty="0">
@@ -7196,10 +7069,20 @@
                 <a:ea typeface="+mn-ea"/>
                 <a:cs typeface="+mn-cs"/>
               </a:rPr>
-              <a:t>, not a proven upper bound. Name the assumptions and it's defensible.</a:t>
-            </a:r>
-          </a:p>
-          <a:p>
+              <a:t>, built on the structure this daemon already publishes: </a:t>
+            </a:r>
+            <a:r>
+              <a:rPr lang="en-US" sz="1200" b="0" i="0" kern="1200" dirty="0" err="1">
+                <a:solidFill>
+                  <a:schemeClr val="tx1"/>
+                </a:solidFill>
+                <a:effectLst/>
+                <a:latin typeface="+mn-lt"/>
+                <a:ea typeface="+mn-ea"/>
+                <a:cs typeface="+mn-cs"/>
+              </a:rPr>
+              <a:t>master_offset_ns</a:t>
+            </a:r>
             <a:r>
               <a:rPr lang="en-US" sz="1200" b="0" i="0" kern="1200" dirty="0">
                 <a:solidFill>
@@ -7210,10 +7093,20 @@
                 <a:ea typeface="+mn-ea"/>
                 <a:cs typeface="+mn-cs"/>
               </a:rPr>
-              <a:t>Three: separate the two owners — U-clock, which the daemon bounds, and U-capture, which the application knows. The event uncertainty is their sum.</a:t>
-            </a:r>
-          </a:p>
-          <a:p>
+              <a:t> and </a:t>
+            </a:r>
+            <a:r>
+              <a:rPr lang="en-US" sz="1200" b="0" i="0" kern="1200" dirty="0" err="1">
+                <a:solidFill>
+                  <a:schemeClr val="tx1"/>
+                </a:solidFill>
+                <a:effectLst/>
+                <a:latin typeface="+mn-lt"/>
+                <a:ea typeface="+mn-ea"/>
+                <a:cs typeface="+mn-cs"/>
+              </a:rPr>
+              <a:t>ingress_time_ns</a:t>
+            </a:r>
             <a:r>
               <a:rPr lang="en-US" sz="1200" b="0" i="0" kern="1200" dirty="0">
                 <a:solidFill>
@@ -7224,19 +7117,19 @@
                 <a:ea typeface="+mn-ea"/>
                 <a:cs typeface="+mn-cs"/>
               </a:rPr>
-              <a:t>Four: staleness is an </a:t>
-            </a:r>
-            <a:r>
-              <a:rPr lang="en-US" sz="1200" b="0" i="1" kern="1200" dirty="0">
-                <a:solidFill>
-                  <a:schemeClr val="tx1"/>
-                </a:solidFill>
-                <a:effectLst/>
-                <a:latin typeface="+mn-lt"/>
-                <a:ea typeface="+mn-ea"/>
-                <a:cs typeface="+mn-cs"/>
-              </a:rPr>
-              <a:t>attributed</a:t>
+              <a:t> together as the anchor; </a:t>
+            </a:r>
+            <a:r>
+              <a:rPr lang="en-US" sz="1200" b="0" i="0" kern="1200" dirty="0" err="1">
+                <a:solidFill>
+                  <a:schemeClr val="tx1"/>
+                </a:solidFill>
+                <a:effectLst/>
+                <a:latin typeface="+mn-lt"/>
+                <a:ea typeface="+mn-ea"/>
+                <a:cs typeface="+mn-cs"/>
+              </a:rPr>
+              <a:t>max_drift_ppb</a:t>
             </a:r>
             <a:r>
               <a:rPr lang="en-US" sz="1200" b="0" i="0" kern="1200" dirty="0">
@@ -7248,10 +7141,20 @@
                 <a:ea typeface="+mn-ea"/>
                 <a:cs typeface="+mn-cs"/>
               </a:rPr>
-              <a:t> drift bound — age times a configured frequency-error limit, not measured oscillator drift. It's the term most tools ignore; don't.</a:t>
-            </a:r>
-          </a:p>
-          <a:p>
+              <a:t> as the assumed frequency-error bound; the grandmaster identity and </a:t>
+            </a:r>
+            <a:r>
+              <a:rPr lang="en-US" sz="1200" b="0" i="0" kern="1200" dirty="0" err="1">
+                <a:solidFill>
+                  <a:schemeClr val="tx1"/>
+                </a:solidFill>
+                <a:effectLst/>
+                <a:latin typeface="+mn-lt"/>
+                <a:ea typeface="+mn-ea"/>
+                <a:cs typeface="+mn-cs"/>
+              </a:rPr>
+              <a:t>steps_removed</a:t>
+            </a:r>
             <a:r>
               <a:rPr lang="en-US" sz="1200" b="0" i="0" kern="1200" dirty="0">
                 <a:solidFill>
@@ -7262,69 +7165,7 @@
                 <a:ea typeface="+mn-ea"/>
                 <a:cs typeface="+mn-cs"/>
               </a:rPr>
-              <a:t>Five: the real missing kernel primitive isn't a drift number — it's a </a:t>
-            </a:r>
-            <a:r>
-              <a:rPr lang="en-US" sz="1200" b="0" i="1" kern="1200" dirty="0">
-                <a:solidFill>
-                  <a:schemeClr val="tx1"/>
-                </a:solidFill>
-                <a:effectLst/>
-                <a:latin typeface="+mn-lt"/>
-                <a:ea typeface="+mn-ea"/>
-                <a:cs typeface="+mn-cs"/>
-              </a:rPr>
-              <a:t>coherent clock-state at one observation epoch</a:t>
-            </a:r>
-            <a:r>
-              <a:rPr lang="en-US" sz="1200" b="0" i="0" kern="1200" dirty="0">
-                <a:solidFill>
-                  <a:schemeClr val="tx1"/>
-                </a:solidFill>
-                <a:effectLst/>
-                <a:latin typeface="+mn-lt"/>
-                <a:ea typeface="+mn-ea"/>
-                <a:cs typeface="+mn-cs"/>
-              </a:rPr>
-              <a:t>, with enough metadata to derive an envelope.</a:t>
-            </a:r>
-          </a:p>
-          <a:p>
-            <a:r>
-              <a:rPr lang="en-US" sz="1200" b="0" i="0" kern="1200" dirty="0">
-                <a:solidFill>
-                  <a:schemeClr val="tx1"/>
-                </a:solidFill>
-                <a:effectLst/>
-                <a:latin typeface="+mn-lt"/>
-                <a:ea typeface="+mn-ea"/>
-                <a:cs typeface="+mn-cs"/>
-              </a:rPr>
-              <a:t>And six, the one that ties the two talks together: fast access gives you the time cheaply, and uncertainty tells you how far to trust it — fast access to the time </a:t>
-            </a:r>
-            <a:r>
-              <a:rPr lang="en-US" sz="1200" b="0" i="1" kern="1200" dirty="0">
-                <a:solidFill>
-                  <a:schemeClr val="tx1"/>
-                </a:solidFill>
-                <a:effectLst/>
-                <a:latin typeface="+mn-lt"/>
-                <a:ea typeface="+mn-ea"/>
-                <a:cs typeface="+mn-cs"/>
-              </a:rPr>
-              <a:t>and</a:t>
-            </a:r>
-            <a:r>
-              <a:rPr lang="en-US" sz="1200" b="0" i="0" kern="1200" dirty="0">
-                <a:solidFill>
-                  <a:schemeClr val="tx1"/>
-                </a:solidFill>
-                <a:effectLst/>
-                <a:latin typeface="+mn-lt"/>
-                <a:ea typeface="+mn-ea"/>
-                <a:cs typeface="+mn-cs"/>
-              </a:rPr>
-              <a:t> its associated uncertainty.</a:t>
+              <a:t> — though I'll be honest that per-hop error is a crude policy, not a physical bound, since a transparent clock and a boundary clock fail differently. Enough metadata, at one epoch, to derive an uncertainty envelope under stated assumptions. [PAUSE]</a:t>
             </a:r>
           </a:p>
         </p:txBody>
@@ -7394,7 +7235,275 @@
           <a:lstStyle/>
           <a:p>
             <a:r>
-              <a:t>Offer to collaborate with profiling-tool authors. Have the demo plot ready as a backup.</a:t>
+              <a:rPr lang="en-US" sz="1200" b="0" i="0" kern="1200" dirty="0">
+                <a:solidFill>
+                  <a:schemeClr val="tx1"/>
+                </a:solidFill>
+                <a:effectLst/>
+                <a:latin typeface="+mn-lt"/>
+                <a:ea typeface="+mn-ea"/>
+                <a:cs typeface="+mn-cs"/>
+              </a:rPr>
+              <a:t>Six things to take with you.</a:t>
+            </a:r>
+          </a:p>
+          <a:p>
+            <a:r>
+              <a:rPr lang="en-US" sz="1200" b="0" i="0" kern="1200" dirty="0">
+                <a:solidFill>
+                  <a:schemeClr val="tx1"/>
+                </a:solidFill>
+                <a:effectLst/>
+                <a:latin typeface="+mn-lt"/>
+                <a:ea typeface="+mn-ea"/>
+                <a:cs typeface="+mn-cs"/>
+              </a:rPr>
+              <a:t>One: timestamps are intervals. Design your systems around </a:t>
+            </a:r>
+            <a:r>
+              <a:rPr lang="en-US" sz="1200" b="0" i="1" kern="1200" dirty="0">
+                <a:solidFill>
+                  <a:schemeClr val="tx1"/>
+                </a:solidFill>
+                <a:effectLst/>
+                <a:latin typeface="+mn-lt"/>
+                <a:ea typeface="+mn-ea"/>
+                <a:cs typeface="+mn-cs"/>
+              </a:rPr>
+              <a:t>t plus-or-minus U</a:t>
+            </a:r>
+            <a:r>
+              <a:rPr lang="en-US" sz="1200" b="0" i="0" kern="1200" dirty="0">
+                <a:solidFill>
+                  <a:schemeClr val="tx1"/>
+                </a:solidFill>
+                <a:effectLst/>
+                <a:latin typeface="+mn-lt"/>
+                <a:ea typeface="+mn-ea"/>
+                <a:cs typeface="+mn-cs"/>
+              </a:rPr>
+              <a:t>.</a:t>
+            </a:r>
+          </a:p>
+          <a:p>
+            <a:endParaRPr lang="en-US" sz="1200" b="0" i="0" kern="1200" dirty="0">
+              <a:solidFill>
+                <a:schemeClr val="tx1"/>
+              </a:solidFill>
+              <a:effectLst/>
+              <a:latin typeface="+mn-lt"/>
+              <a:ea typeface="+mn-ea"/>
+              <a:cs typeface="+mn-cs"/>
+            </a:endParaRPr>
+          </a:p>
+          <a:p>
+            <a:r>
+              <a:rPr lang="en-US" sz="1200" b="0" i="0" kern="1200" dirty="0">
+                <a:solidFill>
+                  <a:schemeClr val="tx1"/>
+                </a:solidFill>
+                <a:effectLst/>
+                <a:latin typeface="+mn-lt"/>
+                <a:ea typeface="+mn-ea"/>
+                <a:cs typeface="+mn-cs"/>
+              </a:rPr>
+              <a:t>Two, and this is the honest one: Uncertainty is a </a:t>
+            </a:r>
+            <a:r>
+              <a:rPr lang="en-US" sz="1200" b="0" i="1" kern="1200" dirty="0">
+                <a:solidFill>
+                  <a:schemeClr val="tx1"/>
+                </a:solidFill>
+                <a:effectLst/>
+                <a:latin typeface="+mn-lt"/>
+                <a:ea typeface="+mn-ea"/>
+                <a:cs typeface="+mn-cs"/>
+              </a:rPr>
+              <a:t>computed envelope under stated assumptions</a:t>
+            </a:r>
+            <a:r>
+              <a:rPr lang="en-US" sz="1200" b="0" i="0" kern="1200" dirty="0">
+                <a:solidFill>
+                  <a:schemeClr val="tx1"/>
+                </a:solidFill>
+                <a:effectLst/>
+                <a:latin typeface="+mn-lt"/>
+                <a:ea typeface="+mn-ea"/>
+                <a:cs typeface="+mn-cs"/>
+              </a:rPr>
+              <a:t>, not a proven upper bound. Name the assumptions and it's defensible.</a:t>
+            </a:r>
+          </a:p>
+          <a:p>
+            <a:endParaRPr lang="en-US" sz="1200" b="0" i="0" kern="1200" dirty="0">
+              <a:solidFill>
+                <a:schemeClr val="tx1"/>
+              </a:solidFill>
+              <a:effectLst/>
+              <a:latin typeface="+mn-lt"/>
+              <a:ea typeface="+mn-ea"/>
+              <a:cs typeface="+mn-cs"/>
+            </a:endParaRPr>
+          </a:p>
+          <a:p>
+            <a:r>
+              <a:rPr lang="en-US" sz="1200" b="0" i="0" kern="1200" dirty="0">
+                <a:solidFill>
+                  <a:schemeClr val="tx1"/>
+                </a:solidFill>
+                <a:effectLst/>
+                <a:latin typeface="+mn-lt"/>
+                <a:ea typeface="+mn-ea"/>
+                <a:cs typeface="+mn-cs"/>
+              </a:rPr>
+              <a:t>Three: separate the two owners — U-clock, which the daemon bounds, and U-capture, which the application knows. The event uncertainty is their sum.</a:t>
+            </a:r>
+          </a:p>
+          <a:p>
+            <a:endParaRPr lang="en-US" sz="1200" b="0" i="0" kern="1200" dirty="0">
+              <a:solidFill>
+                <a:schemeClr val="tx1"/>
+              </a:solidFill>
+              <a:effectLst/>
+              <a:latin typeface="+mn-lt"/>
+              <a:ea typeface="+mn-ea"/>
+              <a:cs typeface="+mn-cs"/>
+            </a:endParaRPr>
+          </a:p>
+          <a:p>
+            <a:r>
+              <a:rPr lang="en-US" sz="1200" b="0" i="0" kern="1200" dirty="0">
+                <a:solidFill>
+                  <a:schemeClr val="tx1"/>
+                </a:solidFill>
+                <a:effectLst/>
+                <a:latin typeface="+mn-lt"/>
+                <a:ea typeface="+mn-ea"/>
+                <a:cs typeface="+mn-cs"/>
+              </a:rPr>
+              <a:t>Four: staleness is an </a:t>
+            </a:r>
+            <a:r>
+              <a:rPr lang="en-US" sz="1200" b="0" i="1" kern="1200" dirty="0">
+                <a:solidFill>
+                  <a:schemeClr val="tx1"/>
+                </a:solidFill>
+                <a:effectLst/>
+                <a:latin typeface="+mn-lt"/>
+                <a:ea typeface="+mn-ea"/>
+                <a:cs typeface="+mn-cs"/>
+              </a:rPr>
+              <a:t>attributed</a:t>
+            </a:r>
+            <a:r>
+              <a:rPr lang="en-US" sz="1200" b="0" i="0" kern="1200" dirty="0">
+                <a:solidFill>
+                  <a:schemeClr val="tx1"/>
+                </a:solidFill>
+                <a:effectLst/>
+                <a:latin typeface="+mn-lt"/>
+                <a:ea typeface="+mn-ea"/>
+                <a:cs typeface="+mn-cs"/>
+              </a:rPr>
+              <a:t> drift bound — age times a configured frequency-error limit, not measured oscillator drift. It's the term most tools ignore; don't.</a:t>
+            </a:r>
+          </a:p>
+          <a:p>
+            <a:endParaRPr lang="en-US" sz="1200" b="0" i="0" kern="1200" dirty="0">
+              <a:solidFill>
+                <a:schemeClr val="tx1"/>
+              </a:solidFill>
+              <a:effectLst/>
+              <a:latin typeface="+mn-lt"/>
+              <a:ea typeface="+mn-ea"/>
+              <a:cs typeface="+mn-cs"/>
+            </a:endParaRPr>
+          </a:p>
+          <a:p>
+            <a:r>
+              <a:rPr lang="en-US" sz="1200" b="0" i="0" kern="1200" dirty="0">
+                <a:solidFill>
+                  <a:schemeClr val="tx1"/>
+                </a:solidFill>
+                <a:effectLst/>
+                <a:latin typeface="+mn-lt"/>
+                <a:ea typeface="+mn-ea"/>
+                <a:cs typeface="+mn-cs"/>
+              </a:rPr>
+              <a:t>Five: the real missing kernel primitive isn't a drift number — it's a </a:t>
+            </a:r>
+            <a:r>
+              <a:rPr lang="en-US" sz="1200" b="0" i="1" kern="1200" dirty="0">
+                <a:solidFill>
+                  <a:schemeClr val="tx1"/>
+                </a:solidFill>
+                <a:effectLst/>
+                <a:latin typeface="+mn-lt"/>
+                <a:ea typeface="+mn-ea"/>
+                <a:cs typeface="+mn-cs"/>
+              </a:rPr>
+              <a:t>coherent clock-state at one observation epoch</a:t>
+            </a:r>
+            <a:r>
+              <a:rPr lang="en-US" sz="1200" b="0" i="0" kern="1200" dirty="0">
+                <a:solidFill>
+                  <a:schemeClr val="tx1"/>
+                </a:solidFill>
+                <a:effectLst/>
+                <a:latin typeface="+mn-lt"/>
+                <a:ea typeface="+mn-ea"/>
+                <a:cs typeface="+mn-cs"/>
+              </a:rPr>
+              <a:t>, with enough metadata to derive an envelope.</a:t>
+            </a:r>
+          </a:p>
+          <a:p>
+            <a:endParaRPr lang="en-US" sz="1200" b="0" i="0" kern="1200" dirty="0">
+              <a:solidFill>
+                <a:schemeClr val="tx1"/>
+              </a:solidFill>
+              <a:effectLst/>
+              <a:latin typeface="+mn-lt"/>
+              <a:ea typeface="+mn-ea"/>
+              <a:cs typeface="+mn-cs"/>
+            </a:endParaRPr>
+          </a:p>
+          <a:p>
+            <a:r>
+              <a:rPr lang="en-US" sz="1200" b="0" i="0" kern="1200" dirty="0">
+                <a:solidFill>
+                  <a:schemeClr val="tx1"/>
+                </a:solidFill>
+                <a:effectLst/>
+                <a:latin typeface="+mn-lt"/>
+                <a:ea typeface="+mn-ea"/>
+                <a:cs typeface="+mn-cs"/>
+              </a:rPr>
+              <a:t>And six, the one that ties the two talks together: fast access gives you the time cheaply, and uncertainty tells you how far to trust it — fast access to the time </a:t>
+            </a:r>
+            <a:r>
+              <a:rPr lang="en-US" sz="1200" b="0" i="1" kern="1200" dirty="0">
+                <a:solidFill>
+                  <a:schemeClr val="tx1"/>
+                </a:solidFill>
+                <a:effectLst/>
+                <a:latin typeface="+mn-lt"/>
+                <a:ea typeface="+mn-ea"/>
+                <a:cs typeface="+mn-cs"/>
+              </a:rPr>
+              <a:t>and</a:t>
+            </a:r>
+            <a:r>
+              <a:rPr lang="en-US" sz="1200" b="0" i="0" kern="1200" dirty="0">
+                <a:solidFill>
+                  <a:schemeClr val="tx1"/>
+                </a:solidFill>
+                <a:effectLst/>
+                <a:latin typeface="+mn-lt"/>
+                <a:ea typeface="+mn-ea"/>
+                <a:cs typeface="+mn-cs"/>
+              </a:rPr>
+              <a:t> its associated uncertainty.</a:t>
             </a:r>
           </a:p>
         </p:txBody>
@@ -7420,6 +7529,77 @@
 </file>
 
 <file path=ppt/notesSlides/notesSlide34.xml><?xml version="1.0" encoding="utf-8"?>
+<p:notes xmlns:a="http://schemas.openxmlformats.org/drawingml/2006/main" xmlns:r="http://schemas.openxmlformats.org/officeDocument/2006/relationships" xmlns:p="http://schemas.openxmlformats.org/presentationml/2006/main">
+  <p:cSld>
+    <p:spTree>
+      <p:nvGrpSpPr>
+        <p:cNvPr id="1" name=""/>
+        <p:cNvGrpSpPr/>
+        <p:nvPr/>
+      </p:nvGrpSpPr>
+      <p:grpSpPr>
+        <a:xfrm>
+          <a:off x="0" y="0"/>
+          <a:ext cx="0" cy="0"/>
+          <a:chOff x="0" y="0"/>
+          <a:chExt cx="0" cy="0"/>
+        </a:xfrm>
+      </p:grpSpPr>
+      <p:sp>
+        <p:nvSpPr>
+          <p:cNvPr id="2" name="Slide Image Placeholder 1"/>
+          <p:cNvSpPr>
+            <a:spLocks noGrp="1" noRot="1" noChangeAspect="1"/>
+          </p:cNvSpPr>
+          <p:nvPr>
+            <p:ph type="sldImg" idx="2"/>
+          </p:nvPr>
+        </p:nvSpPr>
+        <p:spPr/>
+      </p:sp>
+      <p:sp>
+        <p:nvSpPr>
+          <p:cNvPr id="3" name="Notes Placeholder 2"/>
+          <p:cNvSpPr>
+            <a:spLocks noGrp="1"/>
+          </p:cNvSpPr>
+          <p:nvPr>
+            <p:ph type="body" sz="quarter" idx="3"/>
+          </p:nvPr>
+        </p:nvSpPr>
+        <p:spPr/>
+        <p:txBody>
+          <a:bodyPr/>
+          <a:lstStyle/>
+          <a:p>
+            <a:r>
+              <a:rPr dirty="0"/>
+              <a:t>Offer to collaborate with profiling-tool authors. Have the demo plot ready as a backup.</a:t>
+            </a:r>
+          </a:p>
+        </p:txBody>
+      </p:sp>
+      <p:sp>
+        <p:nvSpPr>
+          <p:cNvPr id="4" name="Slide Number Placeholder 3"/>
+          <p:cNvSpPr>
+            <a:spLocks noGrp="1"/>
+          </p:cNvSpPr>
+          <p:nvPr>
+            <p:ph type="sldNum" sz="quarter" idx="5"/>
+          </p:nvPr>
+        </p:nvSpPr>
+        <p:spPr/>
+      </p:sp>
+    </p:spTree>
+  </p:cSld>
+  <p:clrMapOvr>
+    <a:masterClrMapping/>
+  </p:clrMapOvr>
+</p:notes>
+</file>
+
+<file path=ppt/notesSlides/notesSlide35.xml><?xml version="1.0" encoding="utf-8"?>
 <p:notes xmlns:a="http://schemas.openxmlformats.org/drawingml/2006/main" xmlns:r="http://schemas.openxmlformats.org/officeDocument/2006/relationships" xmlns:p="http://schemas.openxmlformats.org/presentationml/2006/main">
   <p:cSld>
     <p:spTree>
@@ -27341,8 +27521,8 @@
         </p:blipFill>
         <p:spPr>
           <a:xfrm>
-            <a:off x="746607" y="749808"/>
-            <a:ext cx="10698480" cy="5176683"/>
+            <a:off x="746607" y="749807"/>
+            <a:ext cx="10698722" cy="5176800"/>
           </a:xfrm>
           <a:prstGeom prst="rect">
             <a:avLst/>
@@ -27534,6 +27714,374 @@
     <p:bg>
       <p:bgPr>
         <a:solidFill>
+          <a:srgbClr val="FFFFFF"/>
+        </a:solidFill>
+        <a:effectLst/>
+      </p:bgPr>
+    </p:bg>
+    <p:spTree>
+      <p:nvGrpSpPr>
+        <p:cNvPr id="1" name="">
+          <a:extLst>
+            <a:ext uri="{FF2B5EF4-FFF2-40B4-BE49-F238E27FC236}">
+              <a16:creationId xmlns:a16="http://schemas.microsoft.com/office/drawing/2014/main" id="{ABF50B82-022D-5D1D-5A85-CD65A3C1C024}"/>
+            </a:ext>
+          </a:extLst>
+        </p:cNvPr>
+        <p:cNvGrpSpPr/>
+        <p:nvPr/>
+      </p:nvGrpSpPr>
+      <p:grpSpPr>
+        <a:xfrm>
+          <a:off x="0" y="0"/>
+          <a:ext cx="0" cy="0"/>
+          <a:chOff x="0" y="0"/>
+          <a:chExt cx="0" cy="0"/>
+        </a:xfrm>
+      </p:grpSpPr>
+      <p:sp>
+        <p:nvSpPr>
+          <p:cNvPr id="2" name="Rectangle 1">
+            <a:extLst>
+              <a:ext uri="{FF2B5EF4-FFF2-40B4-BE49-F238E27FC236}">
+                <a16:creationId xmlns:a16="http://schemas.microsoft.com/office/drawing/2014/main" id="{54F4E398-E69B-0D87-BC02-F4245537C285}"/>
+              </a:ext>
+            </a:extLst>
+          </p:cNvPr>
+          <p:cNvSpPr/>
+          <p:nvPr/>
+        </p:nvSpPr>
+        <p:spPr>
+          <a:xfrm>
+            <a:off x="0" y="164592"/>
+            <a:ext cx="164592" cy="502920"/>
+          </a:xfrm>
+          <a:prstGeom prst="rect">
+            <a:avLst/>
+          </a:prstGeom>
+          <a:solidFill>
+            <a:srgbClr val="2E6BE6"/>
+          </a:solidFill>
+          <a:ln>
+            <a:noFill/>
+          </a:ln>
+          <a:effectLst/>
+        </p:spPr>
+        <p:style>
+          <a:lnRef idx="1">
+            <a:schemeClr val="accent1"/>
+          </a:lnRef>
+          <a:fillRef idx="3">
+            <a:schemeClr val="accent1"/>
+          </a:fillRef>
+          <a:effectRef idx="2">
+            <a:schemeClr val="accent1"/>
+          </a:effectRef>
+          <a:fontRef idx="minor">
+            <a:schemeClr val="lt1"/>
+          </a:fontRef>
+        </p:style>
+        <p:txBody>
+          <a:bodyPr rtlCol="0" anchor="ctr"/>
+          <a:lstStyle/>
+          <a:p>
+            <a:pPr algn="ctr"/>
+            <a:endParaRPr/>
+          </a:p>
+        </p:txBody>
+      </p:sp>
+      <p:sp>
+        <p:nvSpPr>
+          <p:cNvPr id="3" name="TextBox 2">
+            <a:extLst>
+              <a:ext uri="{FF2B5EF4-FFF2-40B4-BE49-F238E27FC236}">
+                <a16:creationId xmlns:a16="http://schemas.microsoft.com/office/drawing/2014/main" id="{8D3B5662-CED3-E68E-2677-5EE6205ED9FD}"/>
+              </a:ext>
+            </a:extLst>
+          </p:cNvPr>
+          <p:cNvSpPr txBox="1"/>
+          <p:nvPr/>
+        </p:nvSpPr>
+        <p:spPr>
+          <a:xfrm>
+            <a:off x="502920" y="219456"/>
+            <a:ext cx="10972800" cy="365760"/>
+          </a:xfrm>
+          <a:prstGeom prst="rect">
+            <a:avLst/>
+          </a:prstGeom>
+          <a:noFill/>
+        </p:spPr>
+        <p:txBody>
+          <a:bodyPr wrap="square" lIns="0" tIns="0" rIns="0" bIns="0" anchor="t">
+            <a:spAutoFit/>
+          </a:bodyPr>
+          <a:lstStyle/>
+          <a:p>
+            <a:pPr algn="l">
+              <a:spcBef>
+                <a:spcPts val="0"/>
+              </a:spcBef>
+              <a:spcAft>
+                <a:spcPts val="600"/>
+              </a:spcAft>
+            </a:pPr>
+            <a:r>
+              <a:rPr sz="1300" b="1" i="0">
+                <a:solidFill>
+                  <a:srgbClr val="2E6BE6"/>
+                </a:solidFill>
+                <a:latin typeface="Calibri"/>
+              </a:rPr>
+              <a:t>MODEL SWEEP</a:t>
+            </a:r>
+          </a:p>
+        </p:txBody>
+      </p:sp>
+      <p:sp>
+        <p:nvSpPr>
+          <p:cNvPr id="5" name="TextBox 4">
+            <a:extLst>
+              <a:ext uri="{FF2B5EF4-FFF2-40B4-BE49-F238E27FC236}">
+                <a16:creationId xmlns:a16="http://schemas.microsoft.com/office/drawing/2014/main" id="{5A8D1ADE-BF4F-9159-2052-8012FA53963C}"/>
+              </a:ext>
+            </a:extLst>
+          </p:cNvPr>
+          <p:cNvSpPr txBox="1"/>
+          <p:nvPr/>
+        </p:nvSpPr>
+        <p:spPr>
+          <a:xfrm>
+            <a:off x="640080" y="5981355"/>
+            <a:ext cx="10881360" cy="457200"/>
+          </a:xfrm>
+          <a:prstGeom prst="rect">
+            <a:avLst/>
+          </a:prstGeom>
+          <a:noFill/>
+        </p:spPr>
+        <p:txBody>
+          <a:bodyPr wrap="square" lIns="0" tIns="0" rIns="0" bIns="0" anchor="t">
+            <a:spAutoFit/>
+          </a:bodyPr>
+          <a:lstStyle/>
+          <a:p>
+            <a:pPr algn="ctr">
+              <a:spcBef>
+                <a:spcPts val="0"/>
+              </a:spcBef>
+              <a:spcAft>
+                <a:spcPts val="600"/>
+              </a:spcAft>
+            </a:pPr>
+            <a:r>
+              <a:rPr sz="1500" b="1" i="0">
+                <a:solidFill>
+                  <a:srgbClr val="1A1D29"/>
+                </a:solidFill>
+                <a:latin typeface="Calibri"/>
+              </a:rPr>
+              <a:t>Between syncs the configured drift bound — not PTP — sets whether the envelope is 0.3 µs or 120 µs.</a:t>
+            </a:r>
+          </a:p>
+        </p:txBody>
+      </p:sp>
+      <p:sp>
+        <p:nvSpPr>
+          <p:cNvPr id="6" name="Rectangle 5">
+            <a:extLst>
+              <a:ext uri="{FF2B5EF4-FFF2-40B4-BE49-F238E27FC236}">
+                <a16:creationId xmlns:a16="http://schemas.microsoft.com/office/drawing/2014/main" id="{57EE4754-90DB-CA00-73A3-258C462091FE}"/>
+              </a:ext>
+            </a:extLst>
+          </p:cNvPr>
+          <p:cNvSpPr/>
+          <p:nvPr/>
+        </p:nvSpPr>
+        <p:spPr>
+          <a:xfrm>
+            <a:off x="0" y="6601968"/>
+            <a:ext cx="12191695" cy="256032"/>
+          </a:xfrm>
+          <a:prstGeom prst="rect">
+            <a:avLst/>
+          </a:prstGeom>
+          <a:solidFill>
+            <a:srgbClr val="2E6BE6"/>
+          </a:solidFill>
+          <a:ln>
+            <a:noFill/>
+          </a:ln>
+          <a:effectLst/>
+        </p:spPr>
+        <p:style>
+          <a:lnRef idx="1">
+            <a:schemeClr val="accent1"/>
+          </a:lnRef>
+          <a:fillRef idx="3">
+            <a:schemeClr val="accent1"/>
+          </a:fillRef>
+          <a:effectRef idx="2">
+            <a:schemeClr val="accent1"/>
+          </a:effectRef>
+          <a:fontRef idx="minor">
+            <a:schemeClr val="lt1"/>
+          </a:fontRef>
+        </p:style>
+        <p:txBody>
+          <a:bodyPr rtlCol="0" anchor="ctr"/>
+          <a:lstStyle/>
+          <a:p>
+            <a:pPr algn="ctr"/>
+            <a:endParaRPr/>
+          </a:p>
+        </p:txBody>
+      </p:sp>
+      <p:sp>
+        <p:nvSpPr>
+          <p:cNvPr id="7" name="TextBox 6">
+            <a:extLst>
+              <a:ext uri="{FF2B5EF4-FFF2-40B4-BE49-F238E27FC236}">
+                <a16:creationId xmlns:a16="http://schemas.microsoft.com/office/drawing/2014/main" id="{622163A8-21F4-1594-220E-8D3042A6D781}"/>
+              </a:ext>
+            </a:extLst>
+          </p:cNvPr>
+          <p:cNvSpPr txBox="1"/>
+          <p:nvPr/>
+        </p:nvSpPr>
+        <p:spPr>
+          <a:xfrm>
+            <a:off x="457200" y="6583680"/>
+            <a:ext cx="8229600" cy="256032"/>
+          </a:xfrm>
+          <a:prstGeom prst="rect">
+            <a:avLst/>
+          </a:prstGeom>
+          <a:noFill/>
+        </p:spPr>
+        <p:txBody>
+          <a:bodyPr wrap="square" lIns="0" tIns="0" rIns="0" bIns="0" anchor="ctr">
+            <a:spAutoFit/>
+          </a:bodyPr>
+          <a:lstStyle/>
+          <a:p>
+            <a:pPr algn="l">
+              <a:spcBef>
+                <a:spcPts val="0"/>
+              </a:spcBef>
+              <a:spcAft>
+                <a:spcPts val="600"/>
+              </a:spcAft>
+            </a:pPr>
+            <a:r>
+              <a:rPr sz="1000" b="0" i="0">
+                <a:solidFill>
+                  <a:srgbClr val="FFFFFF"/>
+                </a:solidFill>
+                <a:latin typeface="Calibri"/>
+              </a:rPr>
+              <a:t>Time Uncertainty as a First-Class Concept</a:t>
+            </a:r>
+          </a:p>
+        </p:txBody>
+      </p:sp>
+      <p:sp>
+        <p:nvSpPr>
+          <p:cNvPr id="8" name="TextBox 7">
+            <a:extLst>
+              <a:ext uri="{FF2B5EF4-FFF2-40B4-BE49-F238E27FC236}">
+                <a16:creationId xmlns:a16="http://schemas.microsoft.com/office/drawing/2014/main" id="{501B7419-E4EA-209B-828E-548CBCE0509E}"/>
+              </a:ext>
+            </a:extLst>
+          </p:cNvPr>
+          <p:cNvSpPr txBox="1"/>
+          <p:nvPr/>
+        </p:nvSpPr>
+        <p:spPr>
+          <a:xfrm>
+            <a:off x="11002975" y="6583680"/>
+            <a:ext cx="731520" cy="256032"/>
+          </a:xfrm>
+          <a:prstGeom prst="rect">
+            <a:avLst/>
+          </a:prstGeom>
+          <a:noFill/>
+        </p:spPr>
+        <p:txBody>
+          <a:bodyPr wrap="square" lIns="0" tIns="0" rIns="0" bIns="0" anchor="ctr">
+            <a:spAutoFit/>
+          </a:bodyPr>
+          <a:lstStyle/>
+          <a:p>
+            <a:pPr algn="r">
+              <a:spcBef>
+                <a:spcPts val="0"/>
+              </a:spcBef>
+              <a:spcAft>
+                <a:spcPts val="600"/>
+              </a:spcAft>
+            </a:pPr>
+            <a:r>
+              <a:rPr sz="1000" b="1" i="0">
+                <a:solidFill>
+                  <a:srgbClr val="FFFFFF"/>
+                </a:solidFill>
+                <a:latin typeface="Calibri"/>
+              </a:rPr>
+              <a:t>33</a:t>
+            </a:r>
+          </a:p>
+        </p:txBody>
+      </p:sp>
+      <p:pic>
+        <p:nvPicPr>
+          <p:cNvPr id="11" name="Picture 10">
+            <a:extLst>
+              <a:ext uri="{FF2B5EF4-FFF2-40B4-BE49-F238E27FC236}">
+                <a16:creationId xmlns:a16="http://schemas.microsoft.com/office/drawing/2014/main" id="{F76BB479-0F12-2934-3E3F-7D03DCE9057D}"/>
+              </a:ext>
+            </a:extLst>
+          </p:cNvPr>
+          <p:cNvPicPr>
+            <a:picLocks noChangeAspect="1"/>
+          </p:cNvPicPr>
+          <p:nvPr/>
+        </p:nvPicPr>
+        <p:blipFill>
+          <a:blip r:embed="rId3"/>
+          <a:stretch>
+            <a:fillRect/>
+          </a:stretch>
+        </p:blipFill>
+        <p:spPr>
+          <a:xfrm>
+            <a:off x="546099" y="685799"/>
+            <a:ext cx="10689133" cy="5176800"/>
+          </a:xfrm>
+          <a:prstGeom prst="rect">
+            <a:avLst/>
+          </a:prstGeom>
+        </p:spPr>
+      </p:pic>
+    </p:spTree>
+    <p:extLst>
+      <p:ext uri="{BB962C8B-B14F-4D97-AF65-F5344CB8AC3E}">
+        <p14:creationId xmlns:p14="http://schemas.microsoft.com/office/powerpoint/2010/main" val="2340540488"/>
+      </p:ext>
+    </p:extLst>
+  </p:cSld>
+  <p:clrMapOvr>
+    <a:masterClrMapping/>
+  </p:clrMapOvr>
+</p:sld>
+</file>
+
+<file path=ppt/slides/slide34.xml><?xml version="1.0" encoding="utf-8"?>
+<p:sld xmlns:a="http://schemas.openxmlformats.org/drawingml/2006/main" xmlns:r="http://schemas.openxmlformats.org/officeDocument/2006/relationships" xmlns:p="http://schemas.openxmlformats.org/presentationml/2006/main">
+  <p:cSld>
+    <p:bg>
+      <p:bgPr>
+        <a:solidFill>
           <a:srgbClr val="2E6BE6"/>
         </a:solidFill>
         <a:effectLst/>
@@ -27732,7 +28280,7 @@
 </p:sld>
 </file>
 
-<file path=ppt/slides/slide34.xml><?xml version="1.0" encoding="utf-8"?>
+<file path=ppt/slides/slide35.xml><?xml version="1.0" encoding="utf-8"?>
 <p:sld xmlns:a="http://schemas.openxmlformats.org/drawingml/2006/main" xmlns:r="http://schemas.openxmlformats.org/officeDocument/2006/relationships" xmlns:p="http://schemas.openxmlformats.org/presentationml/2006/main">
   <p:cSld>
     <p:bg>
@@ -28023,7 +28571,7 @@
 </p:sld>
 </file>
 
-<file path=ppt/slides/slide35.xml><?xml version="1.0" encoding="utf-8"?>
+<file path=ppt/slides/slide36.xml><?xml version="1.0" encoding="utf-8"?>
 <p:sld xmlns:a="http://schemas.openxmlformats.org/drawingml/2006/main" xmlns:r="http://schemas.openxmlformats.org/officeDocument/2006/relationships" xmlns:p="http://schemas.openxmlformats.org/presentationml/2006/main">
   <p:cSld>
     <p:bg>
@@ -28797,7 +29345,7 @@
 </p:sld>
 </file>
 
-<file path=ppt/slides/slide36.xml><?xml version="1.0" encoding="utf-8"?>
+<file path=ppt/slides/slide37.xml><?xml version="1.0" encoding="utf-8"?>
 <p:sld xmlns:a="http://schemas.openxmlformats.org/drawingml/2006/main" xmlns:r="http://schemas.openxmlformats.org/officeDocument/2006/relationships" xmlns:p="http://schemas.openxmlformats.org/presentationml/2006/main">
   <p:cSld>
     <p:bg>
@@ -28989,832 +29537,6 @@
                 <a:latin typeface="Calibri"/>
               </a:rPr>
               <a:t>37</a:t>
-            </a:r>
-          </a:p>
-        </p:txBody>
-      </p:sp>
-    </p:spTree>
-  </p:cSld>
-  <p:clrMapOvr>
-    <a:masterClrMapping/>
-  </p:clrMapOvr>
-</p:sld>
-</file>
-
-<file path=ppt/slides/slide37.xml><?xml version="1.0" encoding="utf-8"?>
-<p:sld xmlns:a="http://schemas.openxmlformats.org/drawingml/2006/main" xmlns:r="http://schemas.openxmlformats.org/officeDocument/2006/relationships" xmlns:p="http://schemas.openxmlformats.org/presentationml/2006/main">
-  <p:cSld>
-    <p:bg>
-      <p:bgPr>
-        <a:solidFill>
-          <a:srgbClr val="FFFFFF"/>
-        </a:solidFill>
-        <a:effectLst/>
-      </p:bgPr>
-    </p:bg>
-    <p:spTree>
-      <p:nvGrpSpPr>
-        <p:cNvPr id="1" name=""/>
-        <p:cNvGrpSpPr/>
-        <p:nvPr/>
-      </p:nvGrpSpPr>
-      <p:grpSpPr>
-        <a:xfrm>
-          <a:off x="0" y="0"/>
-          <a:ext cx="0" cy="0"/>
-          <a:chOff x="0" y="0"/>
-          <a:chExt cx="0" cy="0"/>
-        </a:xfrm>
-      </p:grpSpPr>
-      <p:sp>
-        <p:nvSpPr>
-          <p:cNvPr id="2" name="Rectangle 1"/>
-          <p:cNvSpPr/>
-          <p:nvPr/>
-        </p:nvSpPr>
-        <p:spPr>
-          <a:xfrm>
-            <a:off x="0" y="0"/>
-            <a:ext cx="164592" cy="1143000"/>
-          </a:xfrm>
-          <a:prstGeom prst="rect">
-            <a:avLst/>
-          </a:prstGeom>
-          <a:solidFill>
-            <a:srgbClr val="2E6BE6"/>
-          </a:solidFill>
-          <a:ln>
-            <a:noFill/>
-          </a:ln>
-          <a:effectLst/>
-        </p:spPr>
-        <p:style>
-          <a:lnRef idx="1">
-            <a:schemeClr val="accent1"/>
-          </a:lnRef>
-          <a:fillRef idx="3">
-            <a:schemeClr val="accent1"/>
-          </a:fillRef>
-          <a:effectRef idx="2">
-            <a:schemeClr val="accent1"/>
-          </a:effectRef>
-          <a:fontRef idx="minor">
-            <a:schemeClr val="lt1"/>
-          </a:fontRef>
-        </p:style>
-        <p:txBody>
-          <a:bodyPr rtlCol="0" anchor="ctr"/>
-          <a:lstStyle/>
-          <a:p>
-            <a:pPr algn="ctr"/>
-            <a:endParaRPr/>
-          </a:p>
-        </p:txBody>
-      </p:sp>
-      <p:sp>
-        <p:nvSpPr>
-          <p:cNvPr id="3" name="TextBox 2"/>
-          <p:cNvSpPr txBox="1"/>
-          <p:nvPr/>
-        </p:nvSpPr>
-        <p:spPr>
-          <a:xfrm>
-            <a:off x="502920" y="256032"/>
-            <a:ext cx="10972800" cy="365760"/>
-          </a:xfrm>
-          <a:prstGeom prst="rect">
-            <a:avLst/>
-          </a:prstGeom>
-          <a:noFill/>
-        </p:spPr>
-        <p:txBody>
-          <a:bodyPr wrap="square" lIns="0" tIns="0" rIns="0" bIns="0" anchor="t">
-            <a:spAutoFit/>
-          </a:bodyPr>
-          <a:lstStyle/>
-          <a:p>
-            <a:pPr algn="l">
-              <a:spcBef>
-                <a:spcPts val="0"/>
-              </a:spcBef>
-              <a:spcAft>
-                <a:spcPts val="600"/>
-              </a:spcAft>
-            </a:pPr>
-            <a:r>
-              <a:rPr sz="1300" b="1" i="0">
-                <a:solidFill>
-                  <a:srgbClr val="2E6BE6"/>
-                </a:solidFill>
-                <a:latin typeface="Calibri"/>
-              </a:rPr>
-              <a:t>KERNEL LIMITS</a:t>
-            </a:r>
-          </a:p>
-        </p:txBody>
-      </p:sp>
-      <p:sp>
-        <p:nvSpPr>
-          <p:cNvPr id="4" name="TextBox 3"/>
-          <p:cNvSpPr txBox="1"/>
-          <p:nvPr/>
-        </p:nvSpPr>
-        <p:spPr>
-          <a:xfrm>
-            <a:off x="502920" y="566928"/>
-            <a:ext cx="11155680" cy="822960"/>
-          </a:xfrm>
-          <a:prstGeom prst="rect">
-            <a:avLst/>
-          </a:prstGeom>
-          <a:noFill/>
-        </p:spPr>
-        <p:txBody>
-          <a:bodyPr wrap="square" lIns="0" tIns="0" rIns="0" bIns="0" anchor="t">
-            <a:spAutoFit/>
-          </a:bodyPr>
-          <a:lstStyle/>
-          <a:p>
-            <a:pPr algn="l">
-              <a:spcBef>
-                <a:spcPts val="0"/>
-              </a:spcBef>
-              <a:spcAft>
-                <a:spcPts val="600"/>
-              </a:spcAft>
-            </a:pPr>
-            <a:r>
-              <a:rPr sz="3000" b="1" i="0">
-                <a:solidFill>
-                  <a:srgbClr val="1A1D29"/>
-                </a:solidFill>
-                <a:latin typeface="Calibri"/>
-              </a:rPr>
-              <a:t>The kernel gives ingredients, not the recipe</a:t>
-            </a:r>
-          </a:p>
-        </p:txBody>
-      </p:sp>
-      <p:sp>
-        <p:nvSpPr>
-          <p:cNvPr id="5" name="Rectangle 4"/>
-          <p:cNvSpPr/>
-          <p:nvPr/>
-        </p:nvSpPr>
-        <p:spPr>
-          <a:xfrm>
-            <a:off x="640080" y="1691640"/>
-            <a:ext cx="5349240" cy="4297680"/>
-          </a:xfrm>
-          <a:prstGeom prst="rect">
-            <a:avLst/>
-          </a:prstGeom>
-          <a:solidFill>
-            <a:srgbClr val="EDF1FB"/>
-          </a:solidFill>
-          <a:ln>
-            <a:noFill/>
-          </a:ln>
-          <a:effectLst/>
-        </p:spPr>
-        <p:style>
-          <a:lnRef idx="1">
-            <a:schemeClr val="accent1"/>
-          </a:lnRef>
-          <a:fillRef idx="3">
-            <a:schemeClr val="accent1"/>
-          </a:fillRef>
-          <a:effectRef idx="2">
-            <a:schemeClr val="accent1"/>
-          </a:effectRef>
-          <a:fontRef idx="minor">
-            <a:schemeClr val="lt1"/>
-          </a:fontRef>
-        </p:style>
-        <p:txBody>
-          <a:bodyPr rtlCol="0" anchor="ctr"/>
-          <a:lstStyle/>
-          <a:p>
-            <a:pPr algn="ctr"/>
-            <a:endParaRPr/>
-          </a:p>
-        </p:txBody>
-      </p:sp>
-      <p:sp>
-        <p:nvSpPr>
-          <p:cNvPr id="6" name="TextBox 5"/>
-          <p:cNvSpPr txBox="1"/>
-          <p:nvPr/>
-        </p:nvSpPr>
-        <p:spPr>
-          <a:xfrm>
-            <a:off x="868680" y="1856232"/>
-            <a:ext cx="4892040" cy="457200"/>
-          </a:xfrm>
-          <a:prstGeom prst="rect">
-            <a:avLst/>
-          </a:prstGeom>
-          <a:noFill/>
-        </p:spPr>
-        <p:txBody>
-          <a:bodyPr wrap="square" lIns="0" tIns="0" rIns="0" bIns="0" anchor="t">
-            <a:spAutoFit/>
-          </a:bodyPr>
-          <a:lstStyle/>
-          <a:p>
-            <a:pPr algn="l">
-              <a:spcBef>
-                <a:spcPts val="0"/>
-              </a:spcBef>
-              <a:spcAft>
-                <a:spcPts val="600"/>
-              </a:spcAft>
-            </a:pPr>
-            <a:r>
-              <a:rPr sz="1800" b="1" i="0">
-                <a:solidFill>
-                  <a:srgbClr val="2E6BE6"/>
-                </a:solidFill>
-                <a:latin typeface="Calibri"/>
-              </a:rPr>
-              <a:t>Kernel today: raw ingredients</a:t>
-            </a:r>
-          </a:p>
-        </p:txBody>
-      </p:sp>
-      <p:sp>
-        <p:nvSpPr>
-          <p:cNvPr id="7" name="TextBox 6"/>
-          <p:cNvSpPr txBox="1"/>
-          <p:nvPr/>
-        </p:nvSpPr>
-        <p:spPr>
-          <a:xfrm>
-            <a:off x="868680" y="2468880"/>
-            <a:ext cx="4892040" cy="3291840"/>
-          </a:xfrm>
-          <a:prstGeom prst="rect">
-            <a:avLst/>
-          </a:prstGeom>
-          <a:noFill/>
-        </p:spPr>
-        <p:txBody>
-          <a:bodyPr wrap="square" lIns="0" tIns="0" rIns="0" bIns="0" anchor="t">
-            <a:spAutoFit/>
-          </a:bodyPr>
-          <a:lstStyle/>
-          <a:p>
-            <a:pPr algn="l">
-              <a:spcBef>
-                <a:spcPts val="0"/>
-              </a:spcBef>
-              <a:spcAft>
-                <a:spcPts val="900"/>
-              </a:spcAft>
-            </a:pPr>
-            <a:r>
-              <a:rPr sz="1500" b="1" i="0">
-                <a:solidFill>
-                  <a:srgbClr val="2E6BE6"/>
-                </a:solidFill>
-                <a:latin typeface="Calibri"/>
-              </a:rPr>
-              <a:t>•  </a:t>
-            </a:r>
-            <a:r>
-              <a:rPr sz="1500" b="0" i="0">
-                <a:solidFill>
-                  <a:srgbClr val="1A1D29"/>
-                </a:solidFill>
-                <a:latin typeface="Calibri"/>
-              </a:rPr>
-              <a:t>SO_TIMESTAMPING — HW/SW RX/TX timestamps</a:t>
-            </a:r>
-          </a:p>
-          <a:p>
-            <a:pPr algn="l">
-              <a:spcBef>
-                <a:spcPts val="0"/>
-              </a:spcBef>
-              <a:spcAft>
-                <a:spcPts val="900"/>
-              </a:spcAft>
-            </a:pPr>
-            <a:r>
-              <a:rPr sz="1500" b="1" i="0">
-                <a:solidFill>
-                  <a:srgbClr val="2E6BE6"/>
-                </a:solidFill>
-                <a:latin typeface="Calibri"/>
-              </a:rPr>
-              <a:t>•  </a:t>
-            </a:r>
-            <a:r>
-              <a:rPr sz="1500" b="0" i="0">
-                <a:solidFill>
-                  <a:srgbClr val="1A1D29"/>
-                </a:solidFill>
-                <a:latin typeface="Calibri"/>
-              </a:rPr>
-              <a:t>PTP_SYS_OFFSET(_EXTENDED) — PHC ↔ system</a:t>
-            </a:r>
-          </a:p>
-          <a:p>
-            <a:pPr algn="l">
-              <a:spcBef>
-                <a:spcPts val="0"/>
-              </a:spcBef>
-              <a:spcAft>
-                <a:spcPts val="900"/>
-              </a:spcAft>
-            </a:pPr>
-            <a:r>
-              <a:rPr sz="1500" b="1" i="0">
-                <a:solidFill>
-                  <a:srgbClr val="2E6BE6"/>
-                </a:solidFill>
-                <a:latin typeface="Calibri"/>
-              </a:rPr>
-              <a:t>•  </a:t>
-            </a:r>
-            <a:r>
-              <a:rPr sz="1500" b="0" i="0">
-                <a:solidFill>
-                  <a:srgbClr val="1A1D29"/>
-                </a:solidFill>
-                <a:latin typeface="Calibri"/>
-              </a:rPr>
-              <a:t>/dev/ptpN — freq adjust, ext timestamps</a:t>
-            </a:r>
-          </a:p>
-          <a:p>
-            <a:pPr algn="l">
-              <a:spcBef>
-                <a:spcPts val="0"/>
-              </a:spcBef>
-              <a:spcAft>
-                <a:spcPts val="900"/>
-              </a:spcAft>
-            </a:pPr>
-            <a:r>
-              <a:rPr sz="1500" b="1" i="0">
-                <a:solidFill>
-                  <a:srgbClr val="2E6BE6"/>
-                </a:solidFill>
-                <a:latin typeface="Calibri"/>
-              </a:rPr>
-              <a:t>•  </a:t>
-            </a:r>
-            <a:r>
-              <a:rPr sz="1500" b="0" i="0">
-                <a:solidFill>
-                  <a:srgbClr val="1A1D29"/>
-                </a:solidFill>
-                <a:latin typeface="Calibri"/>
-              </a:rPr>
-              <a:t>sync state lives only in ptp4l userspace</a:t>
-            </a:r>
-          </a:p>
-        </p:txBody>
-      </p:sp>
-      <p:sp>
-        <p:nvSpPr>
-          <p:cNvPr id="8" name="Rectangle 7"/>
-          <p:cNvSpPr/>
-          <p:nvPr/>
-        </p:nvSpPr>
-        <p:spPr>
-          <a:xfrm>
-            <a:off x="6355080" y="1691640"/>
-            <a:ext cx="5349240" cy="4297680"/>
-          </a:xfrm>
-          <a:prstGeom prst="rect">
-            <a:avLst/>
-          </a:prstGeom>
-          <a:solidFill>
-            <a:srgbClr val="EAF7F5"/>
-          </a:solidFill>
-          <a:ln>
-            <a:noFill/>
-          </a:ln>
-          <a:effectLst/>
-        </p:spPr>
-        <p:style>
-          <a:lnRef idx="1">
-            <a:schemeClr val="accent1"/>
-          </a:lnRef>
-          <a:fillRef idx="3">
-            <a:schemeClr val="accent1"/>
-          </a:fillRef>
-          <a:effectRef idx="2">
-            <a:schemeClr val="accent1"/>
-          </a:effectRef>
-          <a:fontRef idx="minor">
-            <a:schemeClr val="lt1"/>
-          </a:fontRef>
-        </p:style>
-        <p:txBody>
-          <a:bodyPr rtlCol="0" anchor="ctr"/>
-          <a:lstStyle/>
-          <a:p>
-            <a:pPr algn="ctr"/>
-            <a:endParaRPr/>
-          </a:p>
-        </p:txBody>
-      </p:sp>
-      <p:sp>
-        <p:nvSpPr>
-          <p:cNvPr id="9" name="TextBox 8"/>
-          <p:cNvSpPr txBox="1"/>
-          <p:nvPr/>
-        </p:nvSpPr>
-        <p:spPr>
-          <a:xfrm>
-            <a:off x="6583680" y="1856232"/>
-            <a:ext cx="4892040" cy="457200"/>
-          </a:xfrm>
-          <a:prstGeom prst="rect">
-            <a:avLst/>
-          </a:prstGeom>
-          <a:noFill/>
-        </p:spPr>
-        <p:txBody>
-          <a:bodyPr wrap="square" lIns="0" tIns="0" rIns="0" bIns="0" anchor="t">
-            <a:spAutoFit/>
-          </a:bodyPr>
-          <a:lstStyle/>
-          <a:p>
-            <a:pPr algn="l">
-              <a:spcBef>
-                <a:spcPts val="0"/>
-              </a:spcBef>
-              <a:spcAft>
-                <a:spcPts val="600"/>
-              </a:spcAft>
-            </a:pPr>
-            <a:r>
-              <a:rPr sz="1800" b="1" i="0">
-                <a:solidFill>
-                  <a:srgbClr val="14B8A6"/>
-                </a:solidFill>
-                <a:latin typeface="Calibri"/>
-              </a:rPr>
-              <a:t>Missing: a coherent clock-state snapshot</a:t>
-            </a:r>
-          </a:p>
-        </p:txBody>
-      </p:sp>
-      <p:sp>
-        <p:nvSpPr>
-          <p:cNvPr id="10" name="TextBox 9"/>
-          <p:cNvSpPr txBox="1"/>
-          <p:nvPr/>
-        </p:nvSpPr>
-        <p:spPr>
-          <a:xfrm>
-            <a:off x="6583680" y="2468880"/>
-            <a:ext cx="4892040" cy="3291840"/>
-          </a:xfrm>
-          <a:prstGeom prst="rect">
-            <a:avLst/>
-          </a:prstGeom>
-          <a:noFill/>
-        </p:spPr>
-        <p:txBody>
-          <a:bodyPr wrap="square" lIns="0" tIns="0" rIns="0" bIns="0" anchor="t">
-            <a:spAutoFit/>
-          </a:bodyPr>
-          <a:lstStyle/>
-          <a:p>
-            <a:pPr algn="l">
-              <a:spcBef>
-                <a:spcPts val="0"/>
-              </a:spcBef>
-              <a:spcAft>
-                <a:spcPts val="900"/>
-              </a:spcAft>
-            </a:pPr>
-            <a:r>
-              <a:rPr sz="1500" b="1" i="0" dirty="0">
-                <a:solidFill>
-                  <a:srgbClr val="14B8A6"/>
-                </a:solidFill>
-                <a:latin typeface="Calibri"/>
-              </a:rPr>
-              <a:t>•  </a:t>
-            </a:r>
-            <a:r>
-              <a:rPr sz="1500" b="0" i="0" dirty="0">
-                <a:solidFill>
-                  <a:srgbClr val="1A1D29"/>
-                </a:solidFill>
-                <a:latin typeface="Calibri"/>
-              </a:rPr>
-              <a:t>one atomic read at a defined epoch</a:t>
-            </a:r>
-          </a:p>
-          <a:p>
-            <a:pPr algn="l">
-              <a:spcBef>
-                <a:spcPts val="0"/>
-              </a:spcBef>
-              <a:spcAft>
-                <a:spcPts val="900"/>
-              </a:spcAft>
-            </a:pPr>
-            <a:r>
-              <a:rPr sz="1500" b="1" i="0" dirty="0">
-                <a:solidFill>
-                  <a:srgbClr val="14B8A6"/>
-                </a:solidFill>
-                <a:latin typeface="Calibri"/>
-              </a:rPr>
-              <a:t>•  </a:t>
-            </a:r>
-            <a:r>
-              <a:rPr sz="1500" b="0" i="0" dirty="0" err="1">
-                <a:solidFill>
-                  <a:srgbClr val="1A1D29"/>
-                </a:solidFill>
-                <a:latin typeface="Calibri"/>
-              </a:rPr>
-              <a:t>master_offset_ns</a:t>
-            </a:r>
-            <a:r>
-              <a:rPr sz="1500" b="0" i="0" dirty="0">
-                <a:solidFill>
-                  <a:srgbClr val="1A1D29"/>
-                </a:solidFill>
-                <a:latin typeface="Calibri"/>
-              </a:rPr>
-              <a:t> + </a:t>
-            </a:r>
-            <a:r>
-              <a:rPr sz="1500" b="0" i="0" dirty="0" err="1">
-                <a:solidFill>
-                  <a:srgbClr val="1A1D29"/>
-                </a:solidFill>
-                <a:latin typeface="Calibri"/>
-              </a:rPr>
-              <a:t>ingress_time_ns</a:t>
-            </a:r>
-            <a:r>
-              <a:rPr sz="1500" b="0" i="0" dirty="0">
-                <a:solidFill>
-                  <a:srgbClr val="1A1D29"/>
-                </a:solidFill>
-                <a:latin typeface="Calibri"/>
-              </a:rPr>
-              <a:t> (anchor)</a:t>
-            </a:r>
-          </a:p>
-          <a:p>
-            <a:pPr algn="l">
-              <a:spcBef>
-                <a:spcPts val="0"/>
-              </a:spcBef>
-              <a:spcAft>
-                <a:spcPts val="900"/>
-              </a:spcAft>
-            </a:pPr>
-            <a:r>
-              <a:rPr sz="1500" b="1" i="0" dirty="0">
-                <a:solidFill>
-                  <a:srgbClr val="14B8A6"/>
-                </a:solidFill>
-                <a:latin typeface="Calibri"/>
-              </a:rPr>
-              <a:t>•  </a:t>
-            </a:r>
-            <a:r>
-              <a:rPr sz="1500" b="0" i="0" dirty="0" err="1">
-                <a:solidFill>
-                  <a:srgbClr val="1A1D29"/>
-                </a:solidFill>
-                <a:latin typeface="Calibri"/>
-              </a:rPr>
-              <a:t>max_drift_ppb</a:t>
-            </a:r>
-            <a:r>
-              <a:rPr sz="1500" b="0" i="0" dirty="0">
-                <a:solidFill>
-                  <a:srgbClr val="1A1D29"/>
-                </a:solidFill>
-                <a:latin typeface="Calibri"/>
-              </a:rPr>
-              <a:t> — assumed frequency-error bound</a:t>
-            </a:r>
-          </a:p>
-          <a:p>
-            <a:pPr algn="l">
-              <a:spcBef>
-                <a:spcPts val="0"/>
-              </a:spcBef>
-              <a:spcAft>
-                <a:spcPts val="900"/>
-              </a:spcAft>
-            </a:pPr>
-            <a:r>
-              <a:rPr sz="1500" b="1" i="0" dirty="0">
-                <a:solidFill>
-                  <a:srgbClr val="14B8A6"/>
-                </a:solidFill>
-                <a:latin typeface="Calibri"/>
-              </a:rPr>
-              <a:t>•  </a:t>
-            </a:r>
-            <a:r>
-              <a:rPr sz="1500" b="0" i="0" dirty="0" err="1">
-                <a:solidFill>
-                  <a:srgbClr val="1A1D29"/>
-                </a:solidFill>
-                <a:latin typeface="Calibri"/>
-              </a:rPr>
-              <a:t>gm_id</a:t>
-            </a:r>
-            <a:r>
-              <a:rPr sz="1500" b="0" i="0" dirty="0">
-                <a:solidFill>
-                  <a:srgbClr val="1A1D29"/>
-                </a:solidFill>
-                <a:latin typeface="Calibri"/>
-              </a:rPr>
-              <a:t> + </a:t>
-            </a:r>
-            <a:r>
-              <a:rPr sz="1500" b="0" i="0" dirty="0" err="1">
-                <a:solidFill>
-                  <a:srgbClr val="1A1D29"/>
-                </a:solidFill>
-                <a:latin typeface="Calibri"/>
-              </a:rPr>
-              <a:t>steps_removed</a:t>
-            </a:r>
-            <a:r>
-              <a:rPr sz="1500" b="0" i="0" dirty="0">
-                <a:solidFill>
-                  <a:srgbClr val="1A1D29"/>
-                </a:solidFill>
-                <a:latin typeface="Calibri"/>
-              </a:rPr>
-              <a:t> (per-hop = policy, not a bound)</a:t>
-            </a:r>
-          </a:p>
-          <a:p>
-            <a:pPr algn="l">
-              <a:spcBef>
-                <a:spcPts val="0"/>
-              </a:spcBef>
-              <a:spcAft>
-                <a:spcPts val="900"/>
-              </a:spcAft>
-            </a:pPr>
-            <a:r>
-              <a:rPr sz="1500" b="1" i="0" dirty="0">
-                <a:solidFill>
-                  <a:srgbClr val="14B8A6"/>
-                </a:solidFill>
-                <a:latin typeface="Calibri"/>
-              </a:rPr>
-              <a:t>•  </a:t>
-            </a:r>
-            <a:r>
-              <a:rPr sz="1500" b="0" i="0" dirty="0">
-                <a:solidFill>
-                  <a:srgbClr val="1A1D29"/>
-                </a:solidFill>
-                <a:latin typeface="Calibri"/>
-              </a:rPr>
-              <a:t>→ enough metadata to derive U under stated assumptions</a:t>
-            </a:r>
-          </a:p>
-        </p:txBody>
-      </p:sp>
-      <p:sp>
-        <p:nvSpPr>
-          <p:cNvPr id="11" name="Rectangle 10"/>
-          <p:cNvSpPr/>
-          <p:nvPr/>
-        </p:nvSpPr>
-        <p:spPr>
-          <a:xfrm>
-            <a:off x="0" y="6601968"/>
-            <a:ext cx="12191695" cy="256032"/>
-          </a:xfrm>
-          <a:prstGeom prst="rect">
-            <a:avLst/>
-          </a:prstGeom>
-          <a:solidFill>
-            <a:srgbClr val="2E6BE6"/>
-          </a:solidFill>
-          <a:ln>
-            <a:noFill/>
-          </a:ln>
-          <a:effectLst/>
-        </p:spPr>
-        <p:style>
-          <a:lnRef idx="1">
-            <a:schemeClr val="accent1"/>
-          </a:lnRef>
-          <a:fillRef idx="3">
-            <a:schemeClr val="accent1"/>
-          </a:fillRef>
-          <a:effectRef idx="2">
-            <a:schemeClr val="accent1"/>
-          </a:effectRef>
-          <a:fontRef idx="minor">
-            <a:schemeClr val="lt1"/>
-          </a:fontRef>
-        </p:style>
-        <p:txBody>
-          <a:bodyPr rtlCol="0" anchor="ctr"/>
-          <a:lstStyle/>
-          <a:p>
-            <a:pPr algn="ctr"/>
-            <a:endParaRPr/>
-          </a:p>
-        </p:txBody>
-      </p:sp>
-      <p:sp>
-        <p:nvSpPr>
-          <p:cNvPr id="12" name="TextBox 11"/>
-          <p:cNvSpPr txBox="1"/>
-          <p:nvPr/>
-        </p:nvSpPr>
-        <p:spPr>
-          <a:xfrm>
-            <a:off x="457200" y="6583680"/>
-            <a:ext cx="8229600" cy="256032"/>
-          </a:xfrm>
-          <a:prstGeom prst="rect">
-            <a:avLst/>
-          </a:prstGeom>
-          <a:noFill/>
-        </p:spPr>
-        <p:txBody>
-          <a:bodyPr wrap="square" lIns="0" tIns="0" rIns="0" bIns="0" anchor="ctr">
-            <a:spAutoFit/>
-          </a:bodyPr>
-          <a:lstStyle/>
-          <a:p>
-            <a:pPr algn="l">
-              <a:spcBef>
-                <a:spcPts val="0"/>
-              </a:spcBef>
-              <a:spcAft>
-                <a:spcPts val="600"/>
-              </a:spcAft>
-            </a:pPr>
-            <a:r>
-              <a:rPr sz="1000" b="0" i="0">
-                <a:solidFill>
-                  <a:srgbClr val="FFFFFF"/>
-                </a:solidFill>
-                <a:latin typeface="Calibri"/>
-              </a:rPr>
-              <a:t>Time Uncertainty as a First-Class Concept</a:t>
-            </a:r>
-          </a:p>
-        </p:txBody>
-      </p:sp>
-      <p:sp>
-        <p:nvSpPr>
-          <p:cNvPr id="13" name="TextBox 12"/>
-          <p:cNvSpPr txBox="1"/>
-          <p:nvPr/>
-        </p:nvSpPr>
-        <p:spPr>
-          <a:xfrm>
-            <a:off x="11002975" y="6583680"/>
-            <a:ext cx="731520" cy="256032"/>
-          </a:xfrm>
-          <a:prstGeom prst="rect">
-            <a:avLst/>
-          </a:prstGeom>
-          <a:noFill/>
-        </p:spPr>
-        <p:txBody>
-          <a:bodyPr wrap="square" lIns="0" tIns="0" rIns="0" bIns="0" anchor="ctr">
-            <a:spAutoFit/>
-          </a:bodyPr>
-          <a:lstStyle/>
-          <a:p>
-            <a:pPr algn="r">
-              <a:spcBef>
-                <a:spcPts val="0"/>
-              </a:spcBef>
-              <a:spcAft>
-                <a:spcPts val="600"/>
-              </a:spcAft>
-            </a:pPr>
-            <a:r>
-              <a:rPr sz="1000" b="1" i="0">
-                <a:solidFill>
-                  <a:srgbClr val="FFFFFF"/>
-                </a:solidFill>
-                <a:latin typeface="Calibri"/>
-              </a:rPr>
-              <a:t>38</a:t>
             </a:r>
           </a:p>
         </p:txBody>
@@ -29934,7 +29656,7 @@
                 </a:solidFill>
                 <a:latin typeface="Calibri"/>
               </a:rPr>
-              <a:t>CLOSING</a:t>
+              <a:t>KERNEL LIMITS</a:t>
             </a:r>
           </a:p>
         </p:txBody>
@@ -29976,21 +29698,66 @@
                 </a:solidFill>
                 <a:latin typeface="Calibri"/>
               </a:rPr>
-              <a:t>Takeaways</a:t>
-            </a:r>
-          </a:p>
-        </p:txBody>
-      </p:sp>
-      <p:sp>
-        <p:nvSpPr>
-          <p:cNvPr id="5" name="TextBox 4"/>
+              <a:t>The kernel gives ingredients, not the recipe</a:t>
+            </a:r>
+          </a:p>
+        </p:txBody>
+      </p:sp>
+      <p:sp>
+        <p:nvSpPr>
+          <p:cNvPr id="5" name="Rectangle 4"/>
+          <p:cNvSpPr/>
+          <p:nvPr/>
+        </p:nvSpPr>
+        <p:spPr>
+          <a:xfrm>
+            <a:off x="640080" y="1691640"/>
+            <a:ext cx="5349240" cy="4297680"/>
+          </a:xfrm>
+          <a:prstGeom prst="rect">
+            <a:avLst/>
+          </a:prstGeom>
+          <a:solidFill>
+            <a:srgbClr val="EDF1FB"/>
+          </a:solidFill>
+          <a:ln>
+            <a:noFill/>
+          </a:ln>
+          <a:effectLst/>
+        </p:spPr>
+        <p:style>
+          <a:lnRef idx="1">
+            <a:schemeClr val="accent1"/>
+          </a:lnRef>
+          <a:fillRef idx="3">
+            <a:schemeClr val="accent1"/>
+          </a:fillRef>
+          <a:effectRef idx="2">
+            <a:schemeClr val="accent1"/>
+          </a:effectRef>
+          <a:fontRef idx="minor">
+            <a:schemeClr val="lt1"/>
+          </a:fontRef>
+        </p:style>
+        <p:txBody>
+          <a:bodyPr rtlCol="0" anchor="ctr"/>
+          <a:lstStyle/>
+          <a:p>
+            <a:pPr algn="ctr"/>
+            <a:endParaRPr/>
+          </a:p>
+        </p:txBody>
+      </p:sp>
+      <p:sp>
+        <p:nvSpPr>
+          <p:cNvPr id="6" name="TextBox 5"/>
           <p:cNvSpPr txBox="1"/>
           <p:nvPr/>
         </p:nvSpPr>
         <p:spPr>
           <a:xfrm>
-            <a:off x="640080" y="1554480"/>
-            <a:ext cx="10972800" cy="4754880"/>
+            <a:off x="868680" y="1856232"/>
+            <a:ext cx="4892040" cy="457200"/>
           </a:xfrm>
           <a:prstGeom prst="rect">
             <a:avLst/>
@@ -30008,7 +29775,7 @@
                 <a:spcPts val="0"/>
               </a:spcBef>
               <a:spcAft>
-                <a:spcPts val="1000"/>
+                <a:spcPts val="600"/>
               </a:spcAft>
             </a:pPr>
             <a:r>
@@ -30018,44 +29785,58 @@
                 </a:solidFill>
                 <a:latin typeface="Calibri"/>
               </a:rPr>
-              <a:t>▸  </a:t>
-            </a:r>
-            <a:r>
-              <a:rPr sz="1800" b="0" i="0">
-                <a:solidFill>
-                  <a:srgbClr val="1A1D29"/>
-                </a:solidFill>
-                <a:latin typeface="Calibri"/>
-              </a:rPr>
-              <a:t>Timestamps are intervals — design systems around t ± U</a:t>
-            </a:r>
-          </a:p>
+              <a:t>Kernel today: raw ingredients</a:t>
+            </a:r>
+          </a:p>
+        </p:txBody>
+      </p:sp>
+      <p:sp>
+        <p:nvSpPr>
+          <p:cNvPr id="7" name="TextBox 6"/>
+          <p:cNvSpPr txBox="1"/>
+          <p:nvPr/>
+        </p:nvSpPr>
+        <p:spPr>
+          <a:xfrm>
+            <a:off x="868680" y="2468880"/>
+            <a:ext cx="4892040" cy="3291840"/>
+          </a:xfrm>
+          <a:prstGeom prst="rect">
+            <a:avLst/>
+          </a:prstGeom>
+          <a:noFill/>
+        </p:spPr>
+        <p:txBody>
+          <a:bodyPr wrap="square" lIns="0" tIns="0" rIns="0" bIns="0" anchor="t">
+            <a:spAutoFit/>
+          </a:bodyPr>
+          <a:lstStyle/>
           <a:p>
             <a:pPr algn="l">
               <a:spcBef>
                 <a:spcPts val="0"/>
               </a:spcBef>
               <a:spcAft>
-                <a:spcPts val="1000"/>
+                <a:spcPts val="900"/>
               </a:spcAft>
             </a:pPr>
             <a:r>
-              <a:rPr sz="1800" b="1" i="0">
+              <a:rPr sz="1500" b="1" i="0">
                 <a:solidFill>
                   <a:srgbClr val="2E6BE6"/>
                 </a:solidFill>
                 <a:latin typeface="Calibri"/>
               </a:rPr>
-              <a:t>▸  </a:t>
-            </a:r>
-            <a:r>
-              <a:rPr sz="1800" b="0" i="0">
+              <a:t>•  </a:t>
+            </a:r>
+            <a:r>
+              <a:rPr sz="1500" b="0" i="0">
                 <a:solidFill>
                   <a:srgbClr val="1A1D29"/>
                 </a:solidFill>
                 <a:latin typeface="Calibri"/>
               </a:rPr>
-              <a:t>U is an envelope under stated assumptions, not a proven bound</a:t>
+              <a:t>SO_TIMESTAMPING — HW/SW RX/TX timestamps</a:t>
             </a:r>
           </a:p>
           <a:p>
@@ -30064,26 +29845,26 @@
                 <a:spcPts val="0"/>
               </a:spcBef>
               <a:spcAft>
-                <a:spcPts val="1000"/>
+                <a:spcPts val="900"/>
               </a:spcAft>
             </a:pPr>
             <a:r>
-              <a:rPr sz="1800" b="1" i="0">
+              <a:rPr sz="1500" b="1" i="0">
                 <a:solidFill>
                   <a:srgbClr val="2E6BE6"/>
                 </a:solidFill>
                 <a:latin typeface="Calibri"/>
               </a:rPr>
-              <a:t>▸  </a:t>
-            </a:r>
-            <a:r>
-              <a:rPr sz="1800" b="0" i="0">
+              <a:t>•  </a:t>
+            </a:r>
+            <a:r>
+              <a:rPr sz="1500" b="0" i="0">
                 <a:solidFill>
                   <a:srgbClr val="1A1D29"/>
                 </a:solidFill>
                 <a:latin typeface="Calibri"/>
               </a:rPr>
-              <a:t>Separate U_clock (daemon) from U_capture (application)</a:t>
+              <a:t>PTP_SYS_OFFSET(_EXTENDED) — PHC ↔ system</a:t>
             </a:r>
           </a:p>
           <a:p>
@@ -30092,26 +29873,26 @@
                 <a:spcPts val="0"/>
               </a:spcBef>
               <a:spcAft>
-                <a:spcPts val="1000"/>
+                <a:spcPts val="900"/>
               </a:spcAft>
             </a:pPr>
             <a:r>
-              <a:rPr sz="1800" b="1" i="0">
+              <a:rPr sz="1500" b="1" i="0">
                 <a:solidFill>
                   <a:srgbClr val="2E6BE6"/>
                 </a:solidFill>
                 <a:latin typeface="Calibri"/>
               </a:rPr>
-              <a:t>▸  </a:t>
-            </a:r>
-            <a:r>
-              <a:rPr sz="1800" b="0" i="0">
+              <a:t>•  </a:t>
+            </a:r>
+            <a:r>
+              <a:rPr sz="1500" b="0" i="0">
                 <a:solidFill>
                   <a:srgbClr val="1A1D29"/>
                 </a:solidFill>
                 <a:latin typeface="Calibri"/>
               </a:rPr>
-              <a:t>Staleness is an attributed drift bound — the term most tools ignore</a:t>
+              <a:t>/dev/ptpN — freq adjust, ext timestamps</a:t>
             </a:r>
           </a:p>
           <a:p>
@@ -30120,61 +29901,346 @@
                 <a:spcPts val="0"/>
               </a:spcBef>
               <a:spcAft>
-                <a:spcPts val="1000"/>
+                <a:spcPts val="900"/>
               </a:spcAft>
             </a:pPr>
             <a:r>
-              <a:rPr sz="1800" b="1" i="0">
+              <a:rPr sz="1500" b="1" i="0">
                 <a:solidFill>
                   <a:srgbClr val="2E6BE6"/>
                 </a:solidFill>
                 <a:latin typeface="Calibri"/>
               </a:rPr>
-              <a:t>▸  </a:t>
-            </a:r>
-            <a:r>
-              <a:rPr sz="1800" b="0" i="0">
+              <a:t>•  </a:t>
+            </a:r>
+            <a:r>
+              <a:rPr sz="1500" b="0" i="0">
                 <a:solidFill>
                   <a:srgbClr val="1A1D29"/>
                 </a:solidFill>
                 <a:latin typeface="Calibri"/>
               </a:rPr>
-              <a:t>Missing kernel primitive: a coherent clock-state at one epoch</a:t>
-            </a:r>
-          </a:p>
+              <a:t>sync state lives only in ptp4l userspace</a:t>
+            </a:r>
+          </a:p>
+        </p:txBody>
+      </p:sp>
+      <p:sp>
+        <p:nvSpPr>
+          <p:cNvPr id="8" name="Rectangle 7"/>
+          <p:cNvSpPr/>
+          <p:nvPr/>
+        </p:nvSpPr>
+        <p:spPr>
+          <a:xfrm>
+            <a:off x="6355080" y="1691640"/>
+            <a:ext cx="5349240" cy="4297680"/>
+          </a:xfrm>
+          <a:prstGeom prst="rect">
+            <a:avLst/>
+          </a:prstGeom>
+          <a:solidFill>
+            <a:srgbClr val="EAF7F5"/>
+          </a:solidFill>
+          <a:ln>
+            <a:noFill/>
+          </a:ln>
+          <a:effectLst/>
+        </p:spPr>
+        <p:style>
+          <a:lnRef idx="1">
+            <a:schemeClr val="accent1"/>
+          </a:lnRef>
+          <a:fillRef idx="3">
+            <a:schemeClr val="accent1"/>
+          </a:fillRef>
+          <a:effectRef idx="2">
+            <a:schemeClr val="accent1"/>
+          </a:effectRef>
+          <a:fontRef idx="minor">
+            <a:schemeClr val="lt1"/>
+          </a:fontRef>
+        </p:style>
+        <p:txBody>
+          <a:bodyPr rtlCol="0" anchor="ctr"/>
+          <a:lstStyle/>
+          <a:p>
+            <a:pPr algn="ctr"/>
+            <a:endParaRPr/>
+          </a:p>
+        </p:txBody>
+      </p:sp>
+      <p:sp>
+        <p:nvSpPr>
+          <p:cNvPr id="9" name="TextBox 8"/>
+          <p:cNvSpPr txBox="1"/>
+          <p:nvPr/>
+        </p:nvSpPr>
+        <p:spPr>
+          <a:xfrm>
+            <a:off x="6583680" y="1856232"/>
+            <a:ext cx="4892040" cy="457200"/>
+          </a:xfrm>
+          <a:prstGeom prst="rect">
+            <a:avLst/>
+          </a:prstGeom>
+          <a:noFill/>
+        </p:spPr>
+        <p:txBody>
+          <a:bodyPr wrap="square" lIns="0" tIns="0" rIns="0" bIns="0" anchor="t">
+            <a:spAutoFit/>
+          </a:bodyPr>
+          <a:lstStyle/>
           <a:p>
             <a:pPr algn="l">
               <a:spcBef>
                 <a:spcPts val="0"/>
               </a:spcBef>
               <a:spcAft>
-                <a:spcPts val="1000"/>
+                <a:spcPts val="600"/>
               </a:spcAft>
             </a:pPr>
             <a:r>
               <a:rPr sz="1800" b="1" i="0">
                 <a:solidFill>
-                  <a:srgbClr val="2E6BE6"/>
+                  <a:srgbClr val="14B8A6"/>
                 </a:solidFill>
                 <a:latin typeface="Calibri"/>
               </a:rPr>
-              <a:t>▸  </a:t>
-            </a:r>
-            <a:r>
-              <a:rPr sz="1800" b="0" i="0">
+              <a:t>Missing: a coherent clock-state snapshot</a:t>
+            </a:r>
+          </a:p>
+        </p:txBody>
+      </p:sp>
+      <p:sp>
+        <p:nvSpPr>
+          <p:cNvPr id="10" name="TextBox 9"/>
+          <p:cNvSpPr txBox="1"/>
+          <p:nvPr/>
+        </p:nvSpPr>
+        <p:spPr>
+          <a:xfrm>
+            <a:off x="6583680" y="2468880"/>
+            <a:ext cx="4892040" cy="3291840"/>
+          </a:xfrm>
+          <a:prstGeom prst="rect">
+            <a:avLst/>
+          </a:prstGeom>
+          <a:noFill/>
+        </p:spPr>
+        <p:txBody>
+          <a:bodyPr wrap="square" lIns="0" tIns="0" rIns="0" bIns="0" anchor="t">
+            <a:spAutoFit/>
+          </a:bodyPr>
+          <a:lstStyle/>
+          <a:p>
+            <a:pPr algn="l">
+              <a:spcBef>
+                <a:spcPts val="0"/>
+              </a:spcBef>
+              <a:spcAft>
+                <a:spcPts val="900"/>
+              </a:spcAft>
+            </a:pPr>
+            <a:r>
+              <a:rPr sz="1500" b="1" i="0" dirty="0">
+                <a:solidFill>
+                  <a:srgbClr val="14B8A6"/>
+                </a:solidFill>
+                <a:latin typeface="Calibri"/>
+              </a:rPr>
+              <a:t>•  </a:t>
+            </a:r>
+            <a:r>
+              <a:rPr sz="1500" b="0" i="0" dirty="0">
                 <a:solidFill>
                   <a:srgbClr val="1A1D29"/>
                 </a:solidFill>
                 <a:latin typeface="Calibri"/>
               </a:rPr>
-              <a:t>The full story: fast access to the time and its uncertainty</a:t>
-            </a:r>
-          </a:p>
-        </p:txBody>
-      </p:sp>
-      <p:sp>
-        <p:nvSpPr>
-          <p:cNvPr id="6" name="Rectangle 5"/>
+              <a:t>one atomic read at a defined epoch</a:t>
+            </a:r>
+          </a:p>
+          <a:p>
+            <a:pPr algn="l">
+              <a:spcBef>
+                <a:spcPts val="0"/>
+              </a:spcBef>
+              <a:spcAft>
+                <a:spcPts val="900"/>
+              </a:spcAft>
+            </a:pPr>
+            <a:r>
+              <a:rPr sz="1500" b="1" i="0" dirty="0">
+                <a:solidFill>
+                  <a:srgbClr val="14B8A6"/>
+                </a:solidFill>
+                <a:latin typeface="Calibri"/>
+              </a:rPr>
+              <a:t>•  </a:t>
+            </a:r>
+            <a:r>
+              <a:rPr sz="1500" b="0" i="0" dirty="0" err="1">
+                <a:solidFill>
+                  <a:srgbClr val="1A1D29"/>
+                </a:solidFill>
+                <a:latin typeface="Calibri"/>
+              </a:rPr>
+              <a:t>master_offset_ns</a:t>
+            </a:r>
+            <a:r>
+              <a:rPr sz="1500" b="0" i="0" dirty="0">
+                <a:solidFill>
+                  <a:srgbClr val="1A1D29"/>
+                </a:solidFill>
+                <a:latin typeface="Calibri"/>
+              </a:rPr>
+              <a:t> + </a:t>
+            </a:r>
+            <a:r>
+              <a:rPr sz="1500" b="0" i="0" dirty="0" err="1">
+                <a:solidFill>
+                  <a:srgbClr val="1A1D29"/>
+                </a:solidFill>
+                <a:latin typeface="Calibri"/>
+              </a:rPr>
+              <a:t>ingress_time_ns</a:t>
+            </a:r>
+            <a:r>
+              <a:rPr sz="1500" b="0" i="0" dirty="0">
+                <a:solidFill>
+                  <a:srgbClr val="1A1D29"/>
+                </a:solidFill>
+                <a:latin typeface="Calibri"/>
+              </a:rPr>
+              <a:t> (anchor)</a:t>
+            </a:r>
+          </a:p>
+          <a:p>
+            <a:pPr algn="l">
+              <a:spcBef>
+                <a:spcPts val="0"/>
+              </a:spcBef>
+              <a:spcAft>
+                <a:spcPts val="900"/>
+              </a:spcAft>
+            </a:pPr>
+            <a:r>
+              <a:rPr sz="1500" b="1" i="0" dirty="0">
+                <a:solidFill>
+                  <a:srgbClr val="14B8A6"/>
+                </a:solidFill>
+                <a:latin typeface="Calibri"/>
+              </a:rPr>
+              <a:t>•  </a:t>
+            </a:r>
+            <a:r>
+              <a:rPr sz="1500" b="0" i="0" dirty="0" err="1">
+                <a:solidFill>
+                  <a:srgbClr val="1A1D29"/>
+                </a:solidFill>
+                <a:latin typeface="Calibri"/>
+              </a:rPr>
+              <a:t>max_drift_ppb</a:t>
+            </a:r>
+            <a:r>
+              <a:rPr sz="1500" b="0" i="0" dirty="0">
+                <a:solidFill>
+                  <a:srgbClr val="1A1D29"/>
+                </a:solidFill>
+                <a:latin typeface="Calibri"/>
+              </a:rPr>
+              <a:t> — assumed frequency-error bound</a:t>
+            </a:r>
+          </a:p>
+          <a:p>
+            <a:pPr algn="l">
+              <a:spcBef>
+                <a:spcPts val="0"/>
+              </a:spcBef>
+              <a:spcAft>
+                <a:spcPts val="900"/>
+              </a:spcAft>
+            </a:pPr>
+            <a:r>
+              <a:rPr sz="1500" b="1" i="0" dirty="0">
+                <a:solidFill>
+                  <a:srgbClr val="14B8A6"/>
+                </a:solidFill>
+                <a:latin typeface="Calibri"/>
+              </a:rPr>
+              <a:t>•  </a:t>
+            </a:r>
+            <a:r>
+              <a:rPr sz="1500" b="0" i="0" dirty="0" err="1">
+                <a:solidFill>
+                  <a:srgbClr val="1A1D29"/>
+                </a:solidFill>
+                <a:latin typeface="Calibri"/>
+              </a:rPr>
+              <a:t>gm_id</a:t>
+            </a:r>
+            <a:r>
+              <a:rPr sz="1500" b="0" i="0" dirty="0">
+                <a:solidFill>
+                  <a:srgbClr val="1A1D29"/>
+                </a:solidFill>
+                <a:latin typeface="Calibri"/>
+              </a:rPr>
+              <a:t> + </a:t>
+            </a:r>
+            <a:r>
+              <a:rPr sz="1500" b="0" i="0" dirty="0" err="1">
+                <a:solidFill>
+                  <a:srgbClr val="1A1D29"/>
+                </a:solidFill>
+                <a:latin typeface="Calibri"/>
+              </a:rPr>
+              <a:t>steps_removed</a:t>
+            </a:r>
+            <a:r>
+              <a:rPr sz="1500" b="0" i="0" dirty="0">
+                <a:solidFill>
+                  <a:srgbClr val="1A1D29"/>
+                </a:solidFill>
+                <a:latin typeface="Calibri"/>
+              </a:rPr>
+              <a:t> (per-hop = policy, not a bound)</a:t>
+            </a:r>
+          </a:p>
+          <a:p>
+            <a:pPr algn="l">
+              <a:spcBef>
+                <a:spcPts val="0"/>
+              </a:spcBef>
+              <a:spcAft>
+                <a:spcPts val="900"/>
+              </a:spcAft>
+            </a:pPr>
+            <a:r>
+              <a:rPr sz="1500" b="1" i="0" dirty="0">
+                <a:solidFill>
+                  <a:srgbClr val="14B8A6"/>
+                </a:solidFill>
+                <a:latin typeface="Calibri"/>
+              </a:rPr>
+              <a:t>•  </a:t>
+            </a:r>
+            <a:r>
+              <a:rPr sz="1500" b="0" i="0" dirty="0">
+                <a:solidFill>
+                  <a:srgbClr val="1A1D29"/>
+                </a:solidFill>
+                <a:latin typeface="Calibri"/>
+              </a:rPr>
+              <a:t>→ enough metadata to derive U under stated assumptions</a:t>
+            </a:r>
+          </a:p>
+        </p:txBody>
+      </p:sp>
+      <p:sp>
+        <p:nvSpPr>
+          <p:cNvPr id="11" name="Rectangle 10"/>
           <p:cNvSpPr/>
           <p:nvPr/>
         </p:nvSpPr>
@@ -30219,7 +30285,7 @@
       </p:sp>
       <p:sp>
         <p:nvSpPr>
-          <p:cNvPr id="7" name="TextBox 6"/>
+          <p:cNvPr id="12" name="TextBox 11"/>
           <p:cNvSpPr txBox="1"/>
           <p:nvPr/>
         </p:nvSpPr>
@@ -30261,7 +30327,7 @@
       </p:sp>
       <p:sp>
         <p:nvSpPr>
-          <p:cNvPr id="8" name="TextBox 7"/>
+          <p:cNvPr id="13" name="TextBox 12"/>
           <p:cNvSpPr txBox="1"/>
           <p:nvPr/>
         </p:nvSpPr>
@@ -30296,7 +30362,7 @@
                 </a:solidFill>
                 <a:latin typeface="Calibri"/>
               </a:rPr>
-              <a:t>39</a:t>
+              <a:t>38</a:t>
             </a:r>
           </a:p>
         </p:txBody>
@@ -30310,6 +30376,1155 @@
 </file>
 
 <file path=ppt/slides/slide39.xml><?xml version="1.0" encoding="utf-8"?>
+<p:sld xmlns:a="http://schemas.openxmlformats.org/drawingml/2006/main" xmlns:r="http://schemas.openxmlformats.org/officeDocument/2006/relationships" xmlns:p="http://schemas.openxmlformats.org/presentationml/2006/main">
+  <p:cSld>
+    <p:bg>
+      <p:bgPr>
+        <a:solidFill>
+          <a:srgbClr val="FFFFFF"/>
+        </a:solidFill>
+        <a:effectLst/>
+      </p:bgPr>
+    </p:bg>
+    <p:spTree>
+      <p:nvGrpSpPr>
+        <p:cNvPr id="1" name=""/>
+        <p:cNvGrpSpPr/>
+        <p:nvPr/>
+      </p:nvGrpSpPr>
+      <p:grpSpPr>
+        <a:xfrm>
+          <a:off x="0" y="0"/>
+          <a:ext cx="0" cy="0"/>
+          <a:chOff x="0" y="0"/>
+          <a:chExt cx="0" cy="0"/>
+        </a:xfrm>
+      </p:grpSpPr>
+      <p:sp>
+        <p:nvSpPr>
+          <p:cNvPr id="2" name="Rectangle 1"/>
+          <p:cNvSpPr/>
+          <p:nvPr/>
+        </p:nvSpPr>
+        <p:spPr>
+          <a:xfrm>
+            <a:off x="0" y="0"/>
+            <a:ext cx="164592" cy="1143000"/>
+          </a:xfrm>
+          <a:prstGeom prst="rect">
+            <a:avLst/>
+          </a:prstGeom>
+          <a:solidFill>
+            <a:srgbClr val="2E6BE6"/>
+          </a:solidFill>
+          <a:ln>
+            <a:noFill/>
+          </a:ln>
+          <a:effectLst/>
+        </p:spPr>
+        <p:style>
+          <a:lnRef idx="1">
+            <a:schemeClr val="accent1"/>
+          </a:lnRef>
+          <a:fillRef idx="3">
+            <a:schemeClr val="accent1"/>
+          </a:fillRef>
+          <a:effectRef idx="2">
+            <a:schemeClr val="accent1"/>
+          </a:effectRef>
+          <a:fontRef idx="minor">
+            <a:schemeClr val="lt1"/>
+          </a:fontRef>
+        </p:style>
+        <p:txBody>
+          <a:bodyPr rtlCol="0" anchor="ctr"/>
+          <a:lstStyle/>
+          <a:p>
+            <a:pPr algn="ctr"/>
+            <a:endParaRPr/>
+          </a:p>
+        </p:txBody>
+      </p:sp>
+      <p:sp>
+        <p:nvSpPr>
+          <p:cNvPr id="3" name="TextBox 2"/>
+          <p:cNvSpPr txBox="1"/>
+          <p:nvPr/>
+        </p:nvSpPr>
+        <p:spPr>
+          <a:xfrm>
+            <a:off x="502920" y="256032"/>
+            <a:ext cx="10972800" cy="365760"/>
+          </a:xfrm>
+          <a:prstGeom prst="rect">
+            <a:avLst/>
+          </a:prstGeom>
+          <a:noFill/>
+        </p:spPr>
+        <p:txBody>
+          <a:bodyPr wrap="square" lIns="0" tIns="0" rIns="0" bIns="0" anchor="t">
+            <a:spAutoFit/>
+          </a:bodyPr>
+          <a:lstStyle/>
+          <a:p>
+            <a:pPr algn="l">
+              <a:spcBef>
+                <a:spcPts val="0"/>
+              </a:spcBef>
+              <a:spcAft>
+                <a:spcPts val="600"/>
+              </a:spcAft>
+            </a:pPr>
+            <a:r>
+              <a:rPr sz="1300" b="1" i="0">
+                <a:solidFill>
+                  <a:srgbClr val="2E6BE6"/>
+                </a:solidFill>
+                <a:latin typeface="Calibri"/>
+              </a:rPr>
+              <a:t>CLOSING</a:t>
+            </a:r>
+          </a:p>
+        </p:txBody>
+      </p:sp>
+      <p:sp>
+        <p:nvSpPr>
+          <p:cNvPr id="4" name="TextBox 3"/>
+          <p:cNvSpPr txBox="1"/>
+          <p:nvPr/>
+        </p:nvSpPr>
+        <p:spPr>
+          <a:xfrm>
+            <a:off x="502920" y="566928"/>
+            <a:ext cx="11155680" cy="822960"/>
+          </a:xfrm>
+          <a:prstGeom prst="rect">
+            <a:avLst/>
+          </a:prstGeom>
+          <a:noFill/>
+        </p:spPr>
+        <p:txBody>
+          <a:bodyPr wrap="square" lIns="0" tIns="0" rIns="0" bIns="0" anchor="t">
+            <a:spAutoFit/>
+          </a:bodyPr>
+          <a:lstStyle/>
+          <a:p>
+            <a:pPr algn="l">
+              <a:spcBef>
+                <a:spcPts val="0"/>
+              </a:spcBef>
+              <a:spcAft>
+                <a:spcPts val="600"/>
+              </a:spcAft>
+            </a:pPr>
+            <a:r>
+              <a:rPr sz="3000" b="1" i="0">
+                <a:solidFill>
+                  <a:srgbClr val="1A1D29"/>
+                </a:solidFill>
+                <a:latin typeface="Calibri"/>
+              </a:rPr>
+              <a:t>Takeaways</a:t>
+            </a:r>
+          </a:p>
+        </p:txBody>
+      </p:sp>
+      <p:sp>
+        <p:nvSpPr>
+          <p:cNvPr id="5" name="TextBox 4"/>
+          <p:cNvSpPr txBox="1"/>
+          <p:nvPr/>
+        </p:nvSpPr>
+        <p:spPr>
+          <a:xfrm>
+            <a:off x="640080" y="1554480"/>
+            <a:ext cx="10972800" cy="4754880"/>
+          </a:xfrm>
+          <a:prstGeom prst="rect">
+            <a:avLst/>
+          </a:prstGeom>
+          <a:noFill/>
+        </p:spPr>
+        <p:txBody>
+          <a:bodyPr wrap="square" lIns="0" tIns="0" rIns="0" bIns="0" anchor="t">
+            <a:spAutoFit/>
+          </a:bodyPr>
+          <a:lstStyle/>
+          <a:p>
+            <a:pPr algn="l">
+              <a:spcBef>
+                <a:spcPts val="0"/>
+              </a:spcBef>
+              <a:spcAft>
+                <a:spcPts val="1000"/>
+              </a:spcAft>
+            </a:pPr>
+            <a:r>
+              <a:rPr sz="1800" b="1" i="0" dirty="0">
+                <a:solidFill>
+                  <a:srgbClr val="2E6BE6"/>
+                </a:solidFill>
+                <a:latin typeface="Calibri"/>
+              </a:rPr>
+              <a:t>▸  </a:t>
+            </a:r>
+            <a:r>
+              <a:rPr sz="1800" b="0" i="0" dirty="0">
+                <a:solidFill>
+                  <a:srgbClr val="1A1D29"/>
+                </a:solidFill>
+                <a:latin typeface="Calibri"/>
+              </a:rPr>
+              <a:t>Timestamps are intervals — design systems around t ± U</a:t>
+            </a:r>
+          </a:p>
+          <a:p>
+            <a:pPr algn="l">
+              <a:spcBef>
+                <a:spcPts val="0"/>
+              </a:spcBef>
+              <a:spcAft>
+                <a:spcPts val="1000"/>
+              </a:spcAft>
+            </a:pPr>
+            <a:r>
+              <a:rPr sz="1800" b="1" i="0" dirty="0">
+                <a:solidFill>
+                  <a:srgbClr val="2E6BE6"/>
+                </a:solidFill>
+                <a:latin typeface="Calibri"/>
+              </a:rPr>
+              <a:t>▸  </a:t>
+            </a:r>
+            <a:r>
+              <a:rPr sz="1800" b="0" i="0" dirty="0">
+                <a:solidFill>
+                  <a:srgbClr val="1A1D29"/>
+                </a:solidFill>
+                <a:latin typeface="Calibri"/>
+              </a:rPr>
+              <a:t>U is an envelope under stated assumptions, not a proven bound</a:t>
+            </a:r>
+          </a:p>
+          <a:p>
+            <a:pPr algn="l">
+              <a:spcBef>
+                <a:spcPts val="0"/>
+              </a:spcBef>
+              <a:spcAft>
+                <a:spcPts val="1000"/>
+              </a:spcAft>
+            </a:pPr>
+            <a:r>
+              <a:rPr sz="1800" b="1" i="0" dirty="0">
+                <a:solidFill>
+                  <a:srgbClr val="2E6BE6"/>
+                </a:solidFill>
+                <a:latin typeface="Calibri"/>
+              </a:rPr>
+              <a:t>▸  </a:t>
+            </a:r>
+            <a:r>
+              <a:rPr sz="1800" b="0" i="0" dirty="0">
+                <a:solidFill>
+                  <a:srgbClr val="1A1D29"/>
+                </a:solidFill>
+                <a:latin typeface="Calibri"/>
+              </a:rPr>
+              <a:t>Separate </a:t>
+            </a:r>
+            <a:r>
+              <a:rPr sz="1800" b="0" i="0" dirty="0" err="1">
+                <a:solidFill>
+                  <a:srgbClr val="1A1D29"/>
+                </a:solidFill>
+                <a:latin typeface="Calibri"/>
+              </a:rPr>
+              <a:t>U_clock</a:t>
+            </a:r>
+            <a:r>
+              <a:rPr sz="1800" b="0" i="0" dirty="0">
+                <a:solidFill>
+                  <a:srgbClr val="1A1D29"/>
+                </a:solidFill>
+                <a:latin typeface="Calibri"/>
+              </a:rPr>
+              <a:t> (daemon) from </a:t>
+            </a:r>
+            <a:r>
+              <a:rPr sz="1800" b="0" i="0" dirty="0" err="1">
+                <a:solidFill>
+                  <a:srgbClr val="1A1D29"/>
+                </a:solidFill>
+                <a:latin typeface="Calibri"/>
+              </a:rPr>
+              <a:t>U_capture</a:t>
+            </a:r>
+            <a:r>
+              <a:rPr sz="1800" b="0" i="0" dirty="0">
+                <a:solidFill>
+                  <a:srgbClr val="1A1D29"/>
+                </a:solidFill>
+                <a:latin typeface="Calibri"/>
+              </a:rPr>
+              <a:t> (application)</a:t>
+            </a:r>
+          </a:p>
+          <a:p>
+            <a:pPr algn="l">
+              <a:spcBef>
+                <a:spcPts val="0"/>
+              </a:spcBef>
+              <a:spcAft>
+                <a:spcPts val="1000"/>
+              </a:spcAft>
+            </a:pPr>
+            <a:r>
+              <a:rPr sz="1800" b="1" i="0" dirty="0">
+                <a:solidFill>
+                  <a:srgbClr val="2E6BE6"/>
+                </a:solidFill>
+                <a:latin typeface="Calibri"/>
+              </a:rPr>
+              <a:t>▸  </a:t>
+            </a:r>
+            <a:r>
+              <a:rPr sz="1800" b="0" i="0" dirty="0">
+                <a:solidFill>
+                  <a:srgbClr val="1A1D29"/>
+                </a:solidFill>
+                <a:latin typeface="Calibri"/>
+              </a:rPr>
+              <a:t>Staleness is an attributed drift bound — the term most tools ignore</a:t>
+            </a:r>
+          </a:p>
+          <a:p>
+            <a:pPr algn="l">
+              <a:spcBef>
+                <a:spcPts val="0"/>
+              </a:spcBef>
+              <a:spcAft>
+                <a:spcPts val="1000"/>
+              </a:spcAft>
+            </a:pPr>
+            <a:r>
+              <a:rPr sz="1800" b="1" i="0" dirty="0">
+                <a:solidFill>
+                  <a:srgbClr val="2E6BE6"/>
+                </a:solidFill>
+                <a:latin typeface="Calibri"/>
+              </a:rPr>
+              <a:t>▸  </a:t>
+            </a:r>
+            <a:r>
+              <a:rPr sz="1800" b="0" i="0" dirty="0">
+                <a:solidFill>
+                  <a:srgbClr val="1A1D29"/>
+                </a:solidFill>
+                <a:latin typeface="Calibri"/>
+              </a:rPr>
+              <a:t>Missing kernel primitive: a coherent clock-state at one epoch</a:t>
+            </a:r>
+          </a:p>
+          <a:p>
+            <a:pPr algn="l">
+              <a:spcBef>
+                <a:spcPts val="0"/>
+              </a:spcBef>
+              <a:spcAft>
+                <a:spcPts val="1000"/>
+              </a:spcAft>
+            </a:pPr>
+            <a:r>
+              <a:rPr sz="1800" b="1" i="0" dirty="0">
+                <a:solidFill>
+                  <a:srgbClr val="2E6BE6"/>
+                </a:solidFill>
+                <a:latin typeface="Calibri"/>
+              </a:rPr>
+              <a:t>▸  </a:t>
+            </a:r>
+            <a:r>
+              <a:rPr sz="1800" b="0" i="0" dirty="0">
+                <a:solidFill>
+                  <a:srgbClr val="1A1D29"/>
+                </a:solidFill>
+                <a:latin typeface="Calibri"/>
+              </a:rPr>
+              <a:t>The full story: fast access to the time and its uncertainty</a:t>
+            </a:r>
+          </a:p>
+        </p:txBody>
+      </p:sp>
+      <p:sp>
+        <p:nvSpPr>
+          <p:cNvPr id="6" name="Rectangle 5"/>
+          <p:cNvSpPr/>
+          <p:nvPr/>
+        </p:nvSpPr>
+        <p:spPr>
+          <a:xfrm>
+            <a:off x="0" y="6601968"/>
+            <a:ext cx="12191695" cy="256032"/>
+          </a:xfrm>
+          <a:prstGeom prst="rect">
+            <a:avLst/>
+          </a:prstGeom>
+          <a:solidFill>
+            <a:srgbClr val="2E6BE6"/>
+          </a:solidFill>
+          <a:ln>
+            <a:noFill/>
+          </a:ln>
+          <a:effectLst/>
+        </p:spPr>
+        <p:style>
+          <a:lnRef idx="1">
+            <a:schemeClr val="accent1"/>
+          </a:lnRef>
+          <a:fillRef idx="3">
+            <a:schemeClr val="accent1"/>
+          </a:fillRef>
+          <a:effectRef idx="2">
+            <a:schemeClr val="accent1"/>
+          </a:effectRef>
+          <a:fontRef idx="minor">
+            <a:schemeClr val="lt1"/>
+          </a:fontRef>
+        </p:style>
+        <p:txBody>
+          <a:bodyPr rtlCol="0" anchor="ctr"/>
+          <a:lstStyle/>
+          <a:p>
+            <a:pPr algn="ctr"/>
+            <a:endParaRPr/>
+          </a:p>
+        </p:txBody>
+      </p:sp>
+      <p:sp>
+        <p:nvSpPr>
+          <p:cNvPr id="7" name="TextBox 6"/>
+          <p:cNvSpPr txBox="1"/>
+          <p:nvPr/>
+        </p:nvSpPr>
+        <p:spPr>
+          <a:xfrm>
+            <a:off x="457200" y="6583680"/>
+            <a:ext cx="8229600" cy="256032"/>
+          </a:xfrm>
+          <a:prstGeom prst="rect">
+            <a:avLst/>
+          </a:prstGeom>
+          <a:noFill/>
+        </p:spPr>
+        <p:txBody>
+          <a:bodyPr wrap="square" lIns="0" tIns="0" rIns="0" bIns="0" anchor="ctr">
+            <a:spAutoFit/>
+          </a:bodyPr>
+          <a:lstStyle/>
+          <a:p>
+            <a:pPr algn="l">
+              <a:spcBef>
+                <a:spcPts val="0"/>
+              </a:spcBef>
+              <a:spcAft>
+                <a:spcPts val="600"/>
+              </a:spcAft>
+            </a:pPr>
+            <a:r>
+              <a:rPr sz="1000" b="0" i="0">
+                <a:solidFill>
+                  <a:srgbClr val="FFFFFF"/>
+                </a:solidFill>
+                <a:latin typeface="Calibri"/>
+              </a:rPr>
+              <a:t>Time Uncertainty as a First-Class Concept</a:t>
+            </a:r>
+          </a:p>
+        </p:txBody>
+      </p:sp>
+      <p:sp>
+        <p:nvSpPr>
+          <p:cNvPr id="8" name="TextBox 7"/>
+          <p:cNvSpPr txBox="1"/>
+          <p:nvPr/>
+        </p:nvSpPr>
+        <p:spPr>
+          <a:xfrm>
+            <a:off x="11002975" y="6583680"/>
+            <a:ext cx="731520" cy="256032"/>
+          </a:xfrm>
+          <a:prstGeom prst="rect">
+            <a:avLst/>
+          </a:prstGeom>
+          <a:noFill/>
+        </p:spPr>
+        <p:txBody>
+          <a:bodyPr wrap="square" lIns="0" tIns="0" rIns="0" bIns="0" anchor="ctr">
+            <a:spAutoFit/>
+          </a:bodyPr>
+          <a:lstStyle/>
+          <a:p>
+            <a:pPr algn="r">
+              <a:spcBef>
+                <a:spcPts val="0"/>
+              </a:spcBef>
+              <a:spcAft>
+                <a:spcPts val="600"/>
+              </a:spcAft>
+            </a:pPr>
+            <a:r>
+              <a:rPr sz="1000" b="1" i="0">
+                <a:solidFill>
+                  <a:srgbClr val="FFFFFF"/>
+                </a:solidFill>
+                <a:latin typeface="Calibri"/>
+              </a:rPr>
+              <a:t>39</a:t>
+            </a:r>
+          </a:p>
+        </p:txBody>
+      </p:sp>
+    </p:spTree>
+  </p:cSld>
+  <p:clrMapOvr>
+    <a:masterClrMapping/>
+  </p:clrMapOvr>
+  <p:timing>
+    <p:tnLst>
+      <p:par>
+        <p:cTn id="1" dur="indefinite" restart="never" nodeType="tmRoot">
+          <p:childTnLst>
+            <p:seq concurrent="1" nextAc="seek">
+              <p:cTn id="2" dur="indefinite" nodeType="mainSeq">
+                <p:childTnLst>
+                  <p:par>
+                    <p:cTn id="3" fill="hold">
+                      <p:stCondLst>
+                        <p:cond delay="indefinite"/>
+                        <p:cond evt="onBegin" delay="0">
+                          <p:tn val="2"/>
+                        </p:cond>
+                      </p:stCondLst>
+                      <p:childTnLst>
+                        <p:par>
+                          <p:cTn id="4" fill="hold">
+                            <p:stCondLst>
+                              <p:cond delay="0"/>
+                            </p:stCondLst>
+                            <p:childTnLst>
+                              <p:par>
+                                <p:cTn id="5" presetID="1" presetClass="entr" presetSubtype="0" fill="hold" nodeType="withEffect">
+                                  <p:stCondLst>
+                                    <p:cond delay="0"/>
+                                  </p:stCondLst>
+                                  <p:childTnLst>
+                                    <p:set>
+                                      <p:cBhvr>
+                                        <p:cTn id="6" dur="1" fill="hold">
+                                          <p:stCondLst>
+                                            <p:cond delay="0"/>
+                                          </p:stCondLst>
+                                        </p:cTn>
+                                        <p:tgtEl>
+                                          <p:spTgt spid="5">
+                                            <p:txEl>
+                                              <p:pRg st="0" end="0"/>
+                                            </p:txEl>
+                                          </p:spTgt>
+                                        </p:tgtEl>
+                                        <p:attrNameLst>
+                                          <p:attrName>style.visibility</p:attrName>
+                                        </p:attrNameLst>
+                                      </p:cBhvr>
+                                      <p:to>
+                                        <p:strVal val="visible"/>
+                                      </p:to>
+                                    </p:set>
+                                  </p:childTnLst>
+                                  <p:subTnLst>
+                                    <p:animClr clrSpc="rgb" dir="cw">
+                                      <p:cBhvr override="childStyle">
+                                        <p:cTn dur="1" fill="hold" display="0" masterRel="nextClick" afterEffect="1"/>
+                                        <p:tgtEl>
+                                          <p:spTgt spid="5">
+                                            <p:txEl>
+                                              <p:pRg st="0" end="0"/>
+                                            </p:txEl>
+                                          </p:spTgt>
+                                        </p:tgtEl>
+                                        <p:attrNameLst>
+                                          <p:attrName>ppt_c</p:attrName>
+                                        </p:attrNameLst>
+                                      </p:cBhvr>
+                                      <p:to>
+                                        <a:srgbClr val="9EA0A0"/>
+                                      </p:to>
+                                    </p:animClr>
+                                  </p:subTnLst>
+                                </p:cTn>
+                              </p:par>
+                            </p:childTnLst>
+                          </p:cTn>
+                        </p:par>
+                      </p:childTnLst>
+                    </p:cTn>
+                  </p:par>
+                  <p:par>
+                    <p:cTn id="7" fill="hold">
+                      <p:stCondLst>
+                        <p:cond delay="indefinite"/>
+                      </p:stCondLst>
+                      <p:childTnLst>
+                        <p:par>
+                          <p:cTn id="8" fill="hold">
+                            <p:stCondLst>
+                              <p:cond delay="0"/>
+                            </p:stCondLst>
+                            <p:childTnLst>
+                              <p:par>
+                                <p:cTn id="9" presetID="1" presetClass="entr" presetSubtype="0" fill="hold" nodeType="clickEffect">
+                                  <p:stCondLst>
+                                    <p:cond delay="0"/>
+                                  </p:stCondLst>
+                                  <p:childTnLst>
+                                    <p:set>
+                                      <p:cBhvr>
+                                        <p:cTn id="10" dur="1" fill="hold">
+                                          <p:stCondLst>
+                                            <p:cond delay="0"/>
+                                          </p:stCondLst>
+                                        </p:cTn>
+                                        <p:tgtEl>
+                                          <p:spTgt spid="5">
+                                            <p:txEl>
+                                              <p:pRg st="1" end="1"/>
+                                            </p:txEl>
+                                          </p:spTgt>
+                                        </p:tgtEl>
+                                        <p:attrNameLst>
+                                          <p:attrName>style.visibility</p:attrName>
+                                        </p:attrNameLst>
+                                      </p:cBhvr>
+                                      <p:to>
+                                        <p:strVal val="visible"/>
+                                      </p:to>
+                                    </p:set>
+                                  </p:childTnLst>
+                                  <p:subTnLst>
+                                    <p:animClr clrSpc="rgb" dir="cw">
+                                      <p:cBhvr override="childStyle">
+                                        <p:cTn dur="1" fill="hold" display="0" masterRel="nextClick" afterEffect="1"/>
+                                        <p:tgtEl>
+                                          <p:spTgt spid="5">
+                                            <p:txEl>
+                                              <p:pRg st="1" end="1"/>
+                                            </p:txEl>
+                                          </p:spTgt>
+                                        </p:tgtEl>
+                                        <p:attrNameLst>
+                                          <p:attrName>ppt_c</p:attrName>
+                                        </p:attrNameLst>
+                                      </p:cBhvr>
+                                      <p:to>
+                                        <a:srgbClr val="9EA0A0"/>
+                                      </p:to>
+                                    </p:animClr>
+                                  </p:subTnLst>
+                                </p:cTn>
+                              </p:par>
+                            </p:childTnLst>
+                          </p:cTn>
+                        </p:par>
+                      </p:childTnLst>
+                    </p:cTn>
+                  </p:par>
+                  <p:par>
+                    <p:cTn id="11" fill="hold">
+                      <p:stCondLst>
+                        <p:cond delay="indefinite"/>
+                      </p:stCondLst>
+                      <p:childTnLst>
+                        <p:par>
+                          <p:cTn id="12" fill="hold">
+                            <p:stCondLst>
+                              <p:cond delay="0"/>
+                            </p:stCondLst>
+                            <p:childTnLst>
+                              <p:par>
+                                <p:cTn id="13" presetID="1" presetClass="entr" presetSubtype="0" fill="hold" nodeType="clickEffect">
+                                  <p:stCondLst>
+                                    <p:cond delay="0"/>
+                                  </p:stCondLst>
+                                  <p:childTnLst>
+                                    <p:set>
+                                      <p:cBhvr>
+                                        <p:cTn id="14" dur="1" fill="hold">
+                                          <p:stCondLst>
+                                            <p:cond delay="0"/>
+                                          </p:stCondLst>
+                                        </p:cTn>
+                                        <p:tgtEl>
+                                          <p:spTgt spid="5">
+                                            <p:txEl>
+                                              <p:pRg st="2" end="2"/>
+                                            </p:txEl>
+                                          </p:spTgt>
+                                        </p:tgtEl>
+                                        <p:attrNameLst>
+                                          <p:attrName>style.visibility</p:attrName>
+                                        </p:attrNameLst>
+                                      </p:cBhvr>
+                                      <p:to>
+                                        <p:strVal val="visible"/>
+                                      </p:to>
+                                    </p:set>
+                                  </p:childTnLst>
+                                  <p:subTnLst>
+                                    <p:animClr clrSpc="rgb" dir="cw">
+                                      <p:cBhvr override="childStyle">
+                                        <p:cTn dur="1" fill="hold" display="0" masterRel="nextClick" afterEffect="1"/>
+                                        <p:tgtEl>
+                                          <p:spTgt spid="5">
+                                            <p:txEl>
+                                              <p:pRg st="2" end="2"/>
+                                            </p:txEl>
+                                          </p:spTgt>
+                                        </p:tgtEl>
+                                        <p:attrNameLst>
+                                          <p:attrName>ppt_c</p:attrName>
+                                        </p:attrNameLst>
+                                      </p:cBhvr>
+                                      <p:to>
+                                        <a:srgbClr val="9EA0A0"/>
+                                      </p:to>
+                                    </p:animClr>
+                                  </p:subTnLst>
+                                </p:cTn>
+                              </p:par>
+                            </p:childTnLst>
+                          </p:cTn>
+                        </p:par>
+                      </p:childTnLst>
+                    </p:cTn>
+                  </p:par>
+                  <p:par>
+                    <p:cTn id="15" fill="hold">
+                      <p:stCondLst>
+                        <p:cond delay="indefinite"/>
+                      </p:stCondLst>
+                      <p:childTnLst>
+                        <p:par>
+                          <p:cTn id="16" fill="hold">
+                            <p:stCondLst>
+                              <p:cond delay="0"/>
+                            </p:stCondLst>
+                            <p:childTnLst>
+                              <p:par>
+                                <p:cTn id="17" presetID="1" presetClass="entr" presetSubtype="0" fill="hold" nodeType="clickEffect">
+                                  <p:stCondLst>
+                                    <p:cond delay="0"/>
+                                  </p:stCondLst>
+                                  <p:childTnLst>
+                                    <p:set>
+                                      <p:cBhvr>
+                                        <p:cTn id="18" dur="1" fill="hold">
+                                          <p:stCondLst>
+                                            <p:cond delay="0"/>
+                                          </p:stCondLst>
+                                        </p:cTn>
+                                        <p:tgtEl>
+                                          <p:spTgt spid="5">
+                                            <p:txEl>
+                                              <p:pRg st="3" end="3"/>
+                                            </p:txEl>
+                                          </p:spTgt>
+                                        </p:tgtEl>
+                                        <p:attrNameLst>
+                                          <p:attrName>style.visibility</p:attrName>
+                                        </p:attrNameLst>
+                                      </p:cBhvr>
+                                      <p:to>
+                                        <p:strVal val="visible"/>
+                                      </p:to>
+                                    </p:set>
+                                  </p:childTnLst>
+                                  <p:subTnLst>
+                                    <p:animClr clrSpc="rgb" dir="cw">
+                                      <p:cBhvr override="childStyle">
+                                        <p:cTn dur="1" fill="hold" display="0" masterRel="nextClick" afterEffect="1"/>
+                                        <p:tgtEl>
+                                          <p:spTgt spid="5">
+                                            <p:txEl>
+                                              <p:pRg st="3" end="3"/>
+                                            </p:txEl>
+                                          </p:spTgt>
+                                        </p:tgtEl>
+                                        <p:attrNameLst>
+                                          <p:attrName>ppt_c</p:attrName>
+                                        </p:attrNameLst>
+                                      </p:cBhvr>
+                                      <p:to>
+                                        <a:srgbClr val="9EA0A0"/>
+                                      </p:to>
+                                    </p:animClr>
+                                  </p:subTnLst>
+                                </p:cTn>
+                              </p:par>
+                            </p:childTnLst>
+                          </p:cTn>
+                        </p:par>
+                      </p:childTnLst>
+                    </p:cTn>
+                  </p:par>
+                  <p:par>
+                    <p:cTn id="19" fill="hold">
+                      <p:stCondLst>
+                        <p:cond delay="indefinite"/>
+                      </p:stCondLst>
+                      <p:childTnLst>
+                        <p:par>
+                          <p:cTn id="20" fill="hold">
+                            <p:stCondLst>
+                              <p:cond delay="0"/>
+                            </p:stCondLst>
+                            <p:childTnLst>
+                              <p:par>
+                                <p:cTn id="21" presetID="1" presetClass="entr" presetSubtype="0" fill="hold" nodeType="clickEffect">
+                                  <p:stCondLst>
+                                    <p:cond delay="0"/>
+                                  </p:stCondLst>
+                                  <p:childTnLst>
+                                    <p:set>
+                                      <p:cBhvr>
+                                        <p:cTn id="22" dur="1" fill="hold">
+                                          <p:stCondLst>
+                                            <p:cond delay="0"/>
+                                          </p:stCondLst>
+                                        </p:cTn>
+                                        <p:tgtEl>
+                                          <p:spTgt spid="5">
+                                            <p:txEl>
+                                              <p:pRg st="4" end="4"/>
+                                            </p:txEl>
+                                          </p:spTgt>
+                                        </p:tgtEl>
+                                        <p:attrNameLst>
+                                          <p:attrName>style.visibility</p:attrName>
+                                        </p:attrNameLst>
+                                      </p:cBhvr>
+                                      <p:to>
+                                        <p:strVal val="visible"/>
+                                      </p:to>
+                                    </p:set>
+                                  </p:childTnLst>
+                                  <p:subTnLst>
+                                    <p:animClr clrSpc="rgb" dir="cw">
+                                      <p:cBhvr override="childStyle">
+                                        <p:cTn dur="1" fill="hold" display="0" masterRel="nextClick" afterEffect="1"/>
+                                        <p:tgtEl>
+                                          <p:spTgt spid="5">
+                                            <p:txEl>
+                                              <p:pRg st="4" end="4"/>
+                                            </p:txEl>
+                                          </p:spTgt>
+                                        </p:tgtEl>
+                                        <p:attrNameLst>
+                                          <p:attrName>ppt_c</p:attrName>
+                                        </p:attrNameLst>
+                                      </p:cBhvr>
+                                      <p:to>
+                                        <a:srgbClr val="9EA0A0"/>
+                                      </p:to>
+                                    </p:animClr>
+                                  </p:subTnLst>
+                                </p:cTn>
+                              </p:par>
+                            </p:childTnLst>
+                          </p:cTn>
+                        </p:par>
+                      </p:childTnLst>
+                    </p:cTn>
+                  </p:par>
+                  <p:par>
+                    <p:cTn id="23" fill="hold">
+                      <p:stCondLst>
+                        <p:cond delay="indefinite"/>
+                      </p:stCondLst>
+                      <p:childTnLst>
+                        <p:par>
+                          <p:cTn id="24" fill="hold">
+                            <p:stCondLst>
+                              <p:cond delay="0"/>
+                            </p:stCondLst>
+                            <p:childTnLst>
+                              <p:par>
+                                <p:cTn id="25" presetID="1" presetClass="entr" presetSubtype="0" fill="hold" nodeType="clickEffect">
+                                  <p:stCondLst>
+                                    <p:cond delay="0"/>
+                                  </p:stCondLst>
+                                  <p:childTnLst>
+                                    <p:set>
+                                      <p:cBhvr>
+                                        <p:cTn id="26" dur="1" fill="hold">
+                                          <p:stCondLst>
+                                            <p:cond delay="0"/>
+                                          </p:stCondLst>
+                                        </p:cTn>
+                                        <p:tgtEl>
+                                          <p:spTgt spid="5">
+                                            <p:txEl>
+                                              <p:pRg st="5" end="5"/>
+                                            </p:txEl>
+                                          </p:spTgt>
+                                        </p:tgtEl>
+                                        <p:attrNameLst>
+                                          <p:attrName>style.visibility</p:attrName>
+                                        </p:attrNameLst>
+                                      </p:cBhvr>
+                                      <p:to>
+                                        <p:strVal val="visible"/>
+                                      </p:to>
+                                    </p:set>
+                                  </p:childTnLst>
+                                </p:cTn>
+                              </p:par>
+                            </p:childTnLst>
+                          </p:cTn>
+                        </p:par>
+                      </p:childTnLst>
+                    </p:cTn>
+                  </p:par>
+                </p:childTnLst>
+              </p:cTn>
+              <p:prevCondLst>
+                <p:cond evt="onPrev" delay="0">
+                  <p:tgtEl>
+                    <p:sldTgt/>
+                  </p:tgtEl>
+                </p:cond>
+              </p:prevCondLst>
+              <p:nextCondLst>
+                <p:cond evt="onNext" delay="0">
+                  <p:tgtEl>
+                    <p:sldTgt/>
+                  </p:tgtEl>
+                </p:cond>
+              </p:nextCondLst>
+            </p:seq>
+          </p:childTnLst>
+        </p:cTn>
+      </p:par>
+    </p:tnLst>
+  </p:timing>
+</p:sld>
+</file>
+
+<file path=ppt/slides/slide4.xml><?xml version="1.0" encoding="utf-8"?>
+<p:sld xmlns:a="http://schemas.openxmlformats.org/drawingml/2006/main" xmlns:r="http://schemas.openxmlformats.org/officeDocument/2006/relationships" xmlns:p="http://schemas.openxmlformats.org/presentationml/2006/main">
+  <p:cSld>
+    <p:bg>
+      <p:bgPr>
+        <a:solidFill>
+          <a:srgbClr val="2E6BE6"/>
+        </a:solidFill>
+        <a:effectLst/>
+      </p:bgPr>
+    </p:bg>
+    <p:spTree>
+      <p:nvGrpSpPr>
+        <p:cNvPr id="1" name=""/>
+        <p:cNvGrpSpPr/>
+        <p:nvPr/>
+      </p:nvGrpSpPr>
+      <p:grpSpPr>
+        <a:xfrm>
+          <a:off x="0" y="0"/>
+          <a:ext cx="0" cy="0"/>
+          <a:chOff x="0" y="0"/>
+          <a:chExt cx="0" cy="0"/>
+        </a:xfrm>
+      </p:grpSpPr>
+      <p:sp>
+        <p:nvSpPr>
+          <p:cNvPr id="2" name="Rectangle 1"/>
+          <p:cNvSpPr/>
+          <p:nvPr/>
+        </p:nvSpPr>
+        <p:spPr>
+          <a:xfrm>
+            <a:off x="0" y="2468880"/>
+            <a:ext cx="3200400" cy="91440"/>
+          </a:xfrm>
+          <a:prstGeom prst="rect">
+            <a:avLst/>
+          </a:prstGeom>
+          <a:solidFill>
+            <a:srgbClr val="14B8A6"/>
+          </a:solidFill>
+          <a:ln>
+            <a:noFill/>
+          </a:ln>
+          <a:effectLst/>
+        </p:spPr>
+        <p:style>
+          <a:lnRef idx="1">
+            <a:schemeClr val="accent1"/>
+          </a:lnRef>
+          <a:fillRef idx="3">
+            <a:schemeClr val="accent1"/>
+          </a:fillRef>
+          <a:effectRef idx="2">
+            <a:schemeClr val="accent1"/>
+          </a:effectRef>
+          <a:fontRef idx="minor">
+            <a:schemeClr val="lt1"/>
+          </a:fontRef>
+        </p:style>
+        <p:txBody>
+          <a:bodyPr rtlCol="0" anchor="ctr"/>
+          <a:lstStyle/>
+          <a:p>
+            <a:pPr algn="ctr"/>
+            <a:endParaRPr/>
+          </a:p>
+        </p:txBody>
+      </p:sp>
+      <p:sp>
+        <p:nvSpPr>
+          <p:cNvPr id="3" name="TextBox 2"/>
+          <p:cNvSpPr txBox="1"/>
+          <p:nvPr/>
+        </p:nvSpPr>
+        <p:spPr>
+          <a:xfrm>
+            <a:off x="822960" y="1828800"/>
+            <a:ext cx="10058400" cy="548640"/>
+          </a:xfrm>
+          <a:prstGeom prst="rect">
+            <a:avLst/>
+          </a:prstGeom>
+          <a:noFill/>
+        </p:spPr>
+        <p:txBody>
+          <a:bodyPr wrap="square" lIns="0" tIns="0" rIns="0" bIns="0" anchor="t">
+            <a:spAutoFit/>
+          </a:bodyPr>
+          <a:lstStyle/>
+          <a:p>
+            <a:pPr algn="l">
+              <a:spcBef>
+                <a:spcPts val="0"/>
+              </a:spcBef>
+              <a:spcAft>
+                <a:spcPts val="600"/>
+              </a:spcAft>
+            </a:pPr>
+            <a:r>
+              <a:rPr sz="2000" b="1" i="0">
+                <a:solidFill>
+                  <a:srgbClr val="C7D2F0"/>
+                </a:solidFill>
+                <a:latin typeface="Calibri"/>
+              </a:rPr>
+              <a:t>PART 1</a:t>
+            </a:r>
+          </a:p>
+        </p:txBody>
+      </p:sp>
+      <p:sp>
+        <p:nvSpPr>
+          <p:cNvPr id="4" name="TextBox 3"/>
+          <p:cNvSpPr txBox="1"/>
+          <p:nvPr/>
+        </p:nvSpPr>
+        <p:spPr>
+          <a:xfrm>
+            <a:off x="804672" y="2697480"/>
+            <a:ext cx="10515600" cy="1828800"/>
+          </a:xfrm>
+          <a:prstGeom prst="rect">
+            <a:avLst/>
+          </a:prstGeom>
+          <a:noFill/>
+        </p:spPr>
+        <p:txBody>
+          <a:bodyPr wrap="square" lIns="0" tIns="0" rIns="0" bIns="0" anchor="t">
+            <a:spAutoFit/>
+          </a:bodyPr>
+          <a:lstStyle/>
+          <a:p>
+            <a:pPr algn="l">
+              <a:spcBef>
+                <a:spcPts val="0"/>
+              </a:spcBef>
+              <a:spcAft>
+                <a:spcPts val="600"/>
+              </a:spcAft>
+            </a:pPr>
+            <a:r>
+              <a:rPr sz="4000" b="1" i="0">
+                <a:solidFill>
+                  <a:srgbClr val="FFFFFF"/>
+                </a:solidFill>
+                <a:latin typeface="Calibri"/>
+              </a:rPr>
+              <a:t>Precise is not the same as correct</a:t>
+            </a:r>
+          </a:p>
+        </p:txBody>
+      </p:sp>
+      <p:sp>
+        <p:nvSpPr>
+          <p:cNvPr id="5" name="TextBox 4"/>
+          <p:cNvSpPr txBox="1"/>
+          <p:nvPr/>
+        </p:nvSpPr>
+        <p:spPr>
+          <a:xfrm>
+            <a:off x="11002975" y="6263640"/>
+            <a:ext cx="822960" cy="365760"/>
+          </a:xfrm>
+          <a:prstGeom prst="rect">
+            <a:avLst/>
+          </a:prstGeom>
+          <a:noFill/>
+        </p:spPr>
+        <p:txBody>
+          <a:bodyPr wrap="square" lIns="0" tIns="0" rIns="0" bIns="0" anchor="t">
+            <a:spAutoFit/>
+          </a:bodyPr>
+          <a:lstStyle/>
+          <a:p>
+            <a:pPr algn="r">
+              <a:spcBef>
+                <a:spcPts val="0"/>
+              </a:spcBef>
+              <a:spcAft>
+                <a:spcPts val="600"/>
+              </a:spcAft>
+            </a:pPr>
+            <a:r>
+              <a:rPr sz="1200" b="1" i="0">
+                <a:solidFill>
+                  <a:srgbClr val="FFFFFF"/>
+                </a:solidFill>
+                <a:latin typeface="Calibri"/>
+              </a:rPr>
+              <a:t>4</a:t>
+            </a:r>
+          </a:p>
+        </p:txBody>
+      </p:sp>
+    </p:spTree>
+  </p:cSld>
+  <p:clrMapOvr>
+    <a:masterClrMapping/>
+  </p:clrMapOvr>
+</p:sld>
+</file>
+
+<file path=ppt/slides/slide40.xml><?xml version="1.0" encoding="utf-8"?>
 <p:sld xmlns:a="http://schemas.openxmlformats.org/drawingml/2006/main" xmlns:r="http://schemas.openxmlformats.org/officeDocument/2006/relationships" xmlns:p="http://schemas.openxmlformats.org/presentationml/2006/main">
   <p:cSld>
     <p:bg>
@@ -30558,211 +31773,7 @@
 </p:sld>
 </file>
 
-<file path=ppt/slides/slide4.xml><?xml version="1.0" encoding="utf-8"?>
-<p:sld xmlns:a="http://schemas.openxmlformats.org/drawingml/2006/main" xmlns:r="http://schemas.openxmlformats.org/officeDocument/2006/relationships" xmlns:p="http://schemas.openxmlformats.org/presentationml/2006/main">
-  <p:cSld>
-    <p:bg>
-      <p:bgPr>
-        <a:solidFill>
-          <a:srgbClr val="2E6BE6"/>
-        </a:solidFill>
-        <a:effectLst/>
-      </p:bgPr>
-    </p:bg>
-    <p:spTree>
-      <p:nvGrpSpPr>
-        <p:cNvPr id="1" name=""/>
-        <p:cNvGrpSpPr/>
-        <p:nvPr/>
-      </p:nvGrpSpPr>
-      <p:grpSpPr>
-        <a:xfrm>
-          <a:off x="0" y="0"/>
-          <a:ext cx="0" cy="0"/>
-          <a:chOff x="0" y="0"/>
-          <a:chExt cx="0" cy="0"/>
-        </a:xfrm>
-      </p:grpSpPr>
-      <p:sp>
-        <p:nvSpPr>
-          <p:cNvPr id="2" name="Rectangle 1"/>
-          <p:cNvSpPr/>
-          <p:nvPr/>
-        </p:nvSpPr>
-        <p:spPr>
-          <a:xfrm>
-            <a:off x="0" y="2468880"/>
-            <a:ext cx="3200400" cy="91440"/>
-          </a:xfrm>
-          <a:prstGeom prst="rect">
-            <a:avLst/>
-          </a:prstGeom>
-          <a:solidFill>
-            <a:srgbClr val="14B8A6"/>
-          </a:solidFill>
-          <a:ln>
-            <a:noFill/>
-          </a:ln>
-          <a:effectLst/>
-        </p:spPr>
-        <p:style>
-          <a:lnRef idx="1">
-            <a:schemeClr val="accent1"/>
-          </a:lnRef>
-          <a:fillRef idx="3">
-            <a:schemeClr val="accent1"/>
-          </a:fillRef>
-          <a:effectRef idx="2">
-            <a:schemeClr val="accent1"/>
-          </a:effectRef>
-          <a:fontRef idx="minor">
-            <a:schemeClr val="lt1"/>
-          </a:fontRef>
-        </p:style>
-        <p:txBody>
-          <a:bodyPr rtlCol="0" anchor="ctr"/>
-          <a:lstStyle/>
-          <a:p>
-            <a:pPr algn="ctr"/>
-            <a:endParaRPr/>
-          </a:p>
-        </p:txBody>
-      </p:sp>
-      <p:sp>
-        <p:nvSpPr>
-          <p:cNvPr id="3" name="TextBox 2"/>
-          <p:cNvSpPr txBox="1"/>
-          <p:nvPr/>
-        </p:nvSpPr>
-        <p:spPr>
-          <a:xfrm>
-            <a:off x="822960" y="1828800"/>
-            <a:ext cx="10058400" cy="548640"/>
-          </a:xfrm>
-          <a:prstGeom prst="rect">
-            <a:avLst/>
-          </a:prstGeom>
-          <a:noFill/>
-        </p:spPr>
-        <p:txBody>
-          <a:bodyPr wrap="square" lIns="0" tIns="0" rIns="0" bIns="0" anchor="t">
-            <a:spAutoFit/>
-          </a:bodyPr>
-          <a:lstStyle/>
-          <a:p>
-            <a:pPr algn="l">
-              <a:spcBef>
-                <a:spcPts val="0"/>
-              </a:spcBef>
-              <a:spcAft>
-                <a:spcPts val="600"/>
-              </a:spcAft>
-            </a:pPr>
-            <a:r>
-              <a:rPr sz="2000" b="1" i="0">
-                <a:solidFill>
-                  <a:srgbClr val="C7D2F0"/>
-                </a:solidFill>
-                <a:latin typeface="Calibri"/>
-              </a:rPr>
-              <a:t>PART 1</a:t>
-            </a:r>
-          </a:p>
-        </p:txBody>
-      </p:sp>
-      <p:sp>
-        <p:nvSpPr>
-          <p:cNvPr id="4" name="TextBox 3"/>
-          <p:cNvSpPr txBox="1"/>
-          <p:nvPr/>
-        </p:nvSpPr>
-        <p:spPr>
-          <a:xfrm>
-            <a:off x="804672" y="2697480"/>
-            <a:ext cx="10515600" cy="1828800"/>
-          </a:xfrm>
-          <a:prstGeom prst="rect">
-            <a:avLst/>
-          </a:prstGeom>
-          <a:noFill/>
-        </p:spPr>
-        <p:txBody>
-          <a:bodyPr wrap="square" lIns="0" tIns="0" rIns="0" bIns="0" anchor="t">
-            <a:spAutoFit/>
-          </a:bodyPr>
-          <a:lstStyle/>
-          <a:p>
-            <a:pPr algn="l">
-              <a:spcBef>
-                <a:spcPts val="0"/>
-              </a:spcBef>
-              <a:spcAft>
-                <a:spcPts val="600"/>
-              </a:spcAft>
-            </a:pPr>
-            <a:r>
-              <a:rPr sz="4000" b="1" i="0">
-                <a:solidFill>
-                  <a:srgbClr val="FFFFFF"/>
-                </a:solidFill>
-                <a:latin typeface="Calibri"/>
-              </a:rPr>
-              <a:t>Precise is not the same as correct</a:t>
-            </a:r>
-          </a:p>
-        </p:txBody>
-      </p:sp>
-      <p:sp>
-        <p:nvSpPr>
-          <p:cNvPr id="5" name="TextBox 4"/>
-          <p:cNvSpPr txBox="1"/>
-          <p:nvPr/>
-        </p:nvSpPr>
-        <p:spPr>
-          <a:xfrm>
-            <a:off x="11002975" y="6263640"/>
-            <a:ext cx="822960" cy="365760"/>
-          </a:xfrm>
-          <a:prstGeom prst="rect">
-            <a:avLst/>
-          </a:prstGeom>
-          <a:noFill/>
-        </p:spPr>
-        <p:txBody>
-          <a:bodyPr wrap="square" lIns="0" tIns="0" rIns="0" bIns="0" anchor="t">
-            <a:spAutoFit/>
-          </a:bodyPr>
-          <a:lstStyle/>
-          <a:p>
-            <a:pPr algn="r">
-              <a:spcBef>
-                <a:spcPts val="0"/>
-              </a:spcBef>
-              <a:spcAft>
-                <a:spcPts val="600"/>
-              </a:spcAft>
-            </a:pPr>
-            <a:r>
-              <a:rPr sz="1200" b="1" i="0">
-                <a:solidFill>
-                  <a:srgbClr val="FFFFFF"/>
-                </a:solidFill>
-                <a:latin typeface="Calibri"/>
-              </a:rPr>
-              <a:t>4</a:t>
-            </a:r>
-          </a:p>
-        </p:txBody>
-      </p:sp>
-    </p:spTree>
-  </p:cSld>
-  <p:clrMapOvr>
-    <a:masterClrMapping/>
-  </p:clrMapOvr>
-</p:sld>
-</file>
-
-<file path=ppt/slides/slide40.xml><?xml version="1.0" encoding="utf-8"?>
+<file path=ppt/slides/slide41.xml><?xml version="1.0" encoding="utf-8"?>
 <p:sld xmlns:a="http://schemas.openxmlformats.org/drawingml/2006/main" xmlns:r="http://schemas.openxmlformats.org/officeDocument/2006/relationships" xmlns:p="http://schemas.openxmlformats.org/presentationml/2006/main" show="0">
   <p:cSld>
     <p:bg>
@@ -31346,7 +32357,7 @@
 </p:sld>
 </file>
 
-<file path=ppt/slides/slide41.xml><?xml version="1.0" encoding="utf-8"?>
+<file path=ppt/slides/slide42.xml><?xml version="1.0" encoding="utf-8"?>
 <p:sld xmlns:a="http://schemas.openxmlformats.org/drawingml/2006/main" xmlns:r="http://schemas.openxmlformats.org/officeDocument/2006/relationships" xmlns:p="http://schemas.openxmlformats.org/presentationml/2006/main" show="0">
   <p:cSld>
     <p:bg>
